--- a/05_작업자료/_PPT생성본/데이터분석_계획서.pptx
+++ b/05_작업자료/_PPT생성본/데이터분석_계획서.pptx
@@ -7844,7 +7844,7 @@
                 <a:latin typeface="맑은 고딕"/>
                 <a:ea typeface="맑은 고딕"/>
               </a:rPr>
-              <a:t>출발점 — 의료 공백은 정말 "자원이 모자라서" 생기는가</a:t>
+              <a:t>아이디어의 발단 — 자원 부족은 실재한다. 그런데 원인이 그것뿐인가</a:t>
             </a:r>
           </a:p>
         </p:txBody>
@@ -7982,7 +7982,7 @@
                 <a:latin typeface="맑은 고딕"/>
                 <a:ea typeface="맑은 고딕"/>
               </a:rPr>
-              <a:t>주제를 고른 이유, 그리고 왜 "취약지"가 아니라 "제도"를 분석 대상으로 삼는가</a:t>
+              <a:t>부족(㉠)과 배분(㉡)은 다른 문제이고 해법도 다르다 — 본 계획은 ㉡을 맡는다</a:t>
             </a:r>
           </a:p>
         </p:txBody>
@@ -8122,7 +8122,7 @@
                 <a:latin typeface="맑은 고딕"/>
                 <a:ea typeface="맑은 고딕"/>
               </a:rPr>
-              <a:t>① 익숙한 진단</a:t>
+              <a:t>① 여전히 존재하는 분만취약지</a:t>
             </a:r>
           </a:p>
           <a:p>
@@ -8142,7 +8142,7 @@
                 <a:latin typeface="맑은 고딕"/>
                 <a:ea typeface="맑은 고딕"/>
               </a:rPr>
-              <a:t>• "지방에 분만실이 없다" — 해마다 반복되는 기사. 따라붙는 처방도 늘 같다: 의사를 늘리고 병원을 지어라</a:t>
+              <a:t>• "지방에 분만실이 없다" — 해마다 반복되는 기사. 처방도 늘 같다: 의사를 늘리고 병원을 지어라. 그리고 이 처방은 옳다 — 절대량이 모자란 것은 사실이다</a:t>
             </a:r>
           </a:p>
         </p:txBody>
@@ -8239,7 +8239,7 @@
                 <a:latin typeface="맑은 고딕"/>
                 <a:ea typeface="맑은 고딕"/>
               </a:rPr>
-              <a:t>② 그 처방이 선 전제</a:t>
+              <a:t>② 그런데 원인이 그것뿐인가</a:t>
             </a:r>
           </a:p>
           <a:p>
@@ -8259,7 +8259,7 @@
                 <a:latin typeface="맑은 고딕"/>
                 <a:ea typeface="맑은 고딕"/>
               </a:rPr>
-              <a:t>• 공백의 원인이 자원의 절대량 부족이라는 것. 사실이라면 답은 예산뿐이고, 데이터가 할 말은 없다</a:t>
+              <a:t>• 자원이 모자란 것(㉠)과, 있는 자원이 체계적으로 배분되지 않는 것(㉡)은 다른 문제다. 그리고 둘은 동시에 성립할 수 있다</a:t>
             </a:r>
           </a:p>
         </p:txBody>
@@ -8356,7 +8356,7 @@
                 <a:latin typeface="맑은 고딕"/>
                 <a:ea typeface="맑은 고딕"/>
               </a:rPr>
-              <a:t>③ 우리의 의심</a:t>
+              <a:t>③ 해결할 수 있는 문제</a:t>
             </a:r>
           </a:p>
           <a:p>
@@ -8376,7 +8376,7 @@
                 <a:latin typeface="맑은 고딕"/>
                 <a:ea typeface="맑은 고딕"/>
               </a:rPr>
-              <a:t>• 자원이 없는 것과, 있는 자원이 필요한 곳에 닿지 않는 것은 다른 문제다. 뒤쪽이라면 예산 없이도 줄일 수 있다</a:t>
+              <a:t>• ㉠은 예산·인력의 영역이라 데이터가 답할 수 없다. ㉡은 배분 규칙의 문제이므로 데이터로 답할 수 있다 — 그리고 ㉡은 아직 검증된 적이 없다</a:t>
             </a:r>
           </a:p>
         </p:txBody>
@@ -8576,7 +8576,7 @@
                 <a:latin typeface="맑은 고딕"/>
                 <a:ea typeface="맑은 고딕"/>
               </a:rPr>
-              <a:t>통로가 이미 깔려 있다면, 물어야 할 것은 "얼마나 부족한가"가 아니다.</a:t>
+              <a:t>자원 부족은 여전히 문제다. 다만 그것과 별개로, 있는 자원이 체계적으로 배분되지 않는 문제가 함께 있다.</a:t>
             </a:r>
           </a:p>
           <a:p>
@@ -8596,7 +8596,7 @@
                 <a:latin typeface="맑은 고딕"/>
                 <a:ea typeface="맑은 고딕"/>
               </a:rPr>
-              <a:t>"지금 있는 것은 필요한 곳으로 제대로 가고 있는가" — 이 물음을 데이터로 검증하는 것이 본 계획이다.</a:t>
+              <a:t>"지금 있는 것은 체계적으로, 필요한 곳으로 배분되고 있는가" — 이를 데이터로 검증하는 것이 본 계획이다.</a:t>
             </a:r>
           </a:p>
         </p:txBody>

--- a/05_작업자료/_PPT생성본/데이터분석_계획서.pptx
+++ b/05_작업자료/_PPT생성본/데이터분석_계획서.pptx
@@ -11104,7 +11104,7 @@
                 <a:latin typeface="맑은 고딕"/>
                 <a:ea typeface="맑은 고딕"/>
               </a:rPr>
-              <a:t>RQ1·2는 "지정 감사", RQ3·4는 "배분 감사·처방"으로 묶여 제도 파이프라인 전체를 관통한다.</a:t>
+              <a:t>RQ1·2는 지정을, RQ3·4는 배분을 본다. 앞의 둘로 "규칙이 무엇을 보는가"를 확정해야 뒤의 둘에서 "그 규칙대로 나눠지고 있는가"를 물을 수 있다.</a:t>
             </a:r>
           </a:p>
           <a:p>
@@ -11124,7 +11124,7 @@
                 <a:latin typeface="맑은 고딕"/>
                 <a:ea typeface="맑은 고딕"/>
               </a:rPr>
-              <a:t>각 질문은 판단 기준을 분석 전에 명시해(사전 등록 성격) 사후 해석 시비를 차단한다.</a:t>
+              <a:t>무엇을 "재현 성공"으로 볼지, 무엇을 "사각지대"로 볼지는 분석을 시작하기 전에 정해 둔다 — 결과를 보고 기준을 맞추지 않기 위해서다.</a:t>
             </a:r>
           </a:p>
         </p:txBody>

--- a/05_작업자료/_PPT생성본/데이터분석_계획서.pptx
+++ b/05_작업자료/_PPT생성본/데이터분석_계획서.pptx
@@ -18,6 +18,7 @@
     <p:sldId id="266" r:id="rId17"/>
     <p:sldId id="267" r:id="rId18"/>
     <p:sldId id="268" r:id="rId19"/>
+    <p:sldId id="269" r:id="rId20"/>
   </p:sldIdLst>
   <p:sldSz cx="12191695" cy="6858000" type="screen4x3"/>
   <p:notesSz cx="6858000" cy="9144000"/>
@@ -3582,7 +3583,7 @@
                 <a:latin typeface="맑은 고딕"/>
                 <a:ea typeface="맑은 고딕"/>
               </a:rPr>
-              <a:t>분석 설계 ② 배분 진단 (RQ3)</a:t>
+              <a:t>분석 설계 ① 지정 감사 (RQ1·RQ2)</a:t>
             </a:r>
           </a:p>
         </p:txBody>
@@ -3678,6 +3679,900 @@
                 <a:ea typeface="맑은 고딕"/>
               </a:rPr>
               <a:t>10</a:t>
+            </a:r>
+          </a:p>
+        </p:txBody>
+      </p:sp>
+      <p:sp>
+        <p:nvSpPr>
+          <p:cNvPr id="7" name="TextBox 6"/>
+          <p:cNvSpPr txBox="1"/>
+          <p:nvPr/>
+        </p:nvSpPr>
+        <p:spPr>
+          <a:xfrm>
+            <a:off x="548640" y="1097280"/>
+            <a:ext cx="11155680" cy="384048"/>
+          </a:xfrm>
+          <a:prstGeom prst="rect">
+            <a:avLst/>
+          </a:prstGeom>
+          <a:noFill/>
+        </p:spPr>
+        <p:txBody>
+          <a:bodyPr wrap="square" anchor="t">
+            <a:spAutoFit/>
+          </a:bodyPr>
+          <a:lstStyle/>
+          <a:p>
+            <a:pPr>
+              <a:lnSpc>
+                <a:spcPct val="114000"/>
+              </a:lnSpc>
+              <a:spcAft>
+                <a:spcPts val="0"/>
+              </a:spcAft>
+            </a:pPr>
+            <a:r>
+              <a:rPr sz="1250" b="0">
+                <a:solidFill>
+                  <a:srgbClr val="767A7F"/>
+                </a:solidFill>
+                <a:latin typeface="맑은 고딕"/>
+                <a:ea typeface="맑은 고딕"/>
+              </a:rPr>
+              <a:t>공표된 규칙을 그대로 재계산해 실제와 대조한다</a:t>
+            </a:r>
+          </a:p>
+        </p:txBody>
+      </p:sp>
+      <p:sp>
+        <p:nvSpPr>
+          <p:cNvPr id="8" name="TextBox 7"/>
+          <p:cNvSpPr txBox="1"/>
+          <p:nvPr/>
+        </p:nvSpPr>
+        <p:spPr>
+          <a:xfrm>
+            <a:off x="502920" y="6492240"/>
+            <a:ext cx="11247120" cy="320040"/>
+          </a:xfrm>
+          <a:prstGeom prst="rect">
+            <a:avLst/>
+          </a:prstGeom>
+          <a:noFill/>
+        </p:spPr>
+        <p:txBody>
+          <a:bodyPr wrap="square" anchor="t">
+            <a:spAutoFit/>
+          </a:bodyPr>
+          <a:lstStyle/>
+          <a:p>
+            <a:pPr>
+              <a:lnSpc>
+                <a:spcPct val="114000"/>
+              </a:lnSpc>
+              <a:spcAft>
+                <a:spcPts val="0"/>
+              </a:spcAft>
+            </a:pPr>
+            <a:r>
+              <a:rPr sz="850" b="0">
+                <a:solidFill>
+                  <a:srgbClr val="B2B5B9"/>
+                </a:solidFill>
+                <a:latin typeface="맑은 고딕"/>
+                <a:ea typeface="맑은 고딕"/>
+              </a:rPr>
+              <a:t>2026 명지대학교 창의적 SW프로그램 경진대회 · 빅데이터 분석 — 데이터 분석 계획서</a:t>
+            </a:r>
+          </a:p>
+        </p:txBody>
+      </p:sp>
+      <p:sp>
+        <p:nvSpPr>
+          <p:cNvPr id="9" name="Rounded Rectangle 8"/>
+          <p:cNvSpPr/>
+          <p:nvPr/>
+        </p:nvSpPr>
+        <p:spPr>
+          <a:xfrm>
+            <a:off x="502920" y="1737360"/>
+            <a:ext cx="3611880" cy="2651760"/>
+          </a:xfrm>
+          <a:prstGeom prst="roundRect">
+            <a:avLst>
+              <a:gd name="adj" fmla="val 3103"/>
+            </a:avLst>
+          </a:prstGeom>
+          <a:solidFill>
+            <a:srgbClr val="FFFFFF"/>
+          </a:solidFill>
+          <a:ln w="12700">
+            <a:solidFill>
+              <a:srgbClr val="E4E6E9"/>
+            </a:solidFill>
+          </a:ln>
+          <a:effectLst>
+            <a:outerShdw blurRad="182880" dist="64008" dir="5400000" rotWithShape="0">
+              <a:srgbClr val="000000">
+                <a:alpha val="30000"/>
+              </a:srgbClr>
+            </a:outerShdw>
+          </a:effectLst>
+        </p:spPr>
+        <p:style>
+          <a:lnRef idx="1">
+            <a:schemeClr val="accent1"/>
+          </a:lnRef>
+          <a:fillRef idx="3">
+            <a:schemeClr val="accent1"/>
+          </a:fillRef>
+          <a:effectRef idx="2">
+            <a:schemeClr val="accent1"/>
+          </a:effectRef>
+          <a:fontRef idx="minor">
+            <a:schemeClr val="lt1"/>
+          </a:fontRef>
+        </p:style>
+        <p:txBody>
+          <a:bodyPr rtlCol="0" anchor="ctr"/>
+          <a:lstStyle/>
+          <a:p>
+            <a:pPr algn="ctr"/>
+          </a:p>
+        </p:txBody>
+      </p:sp>
+      <p:sp>
+        <p:nvSpPr>
+          <p:cNvPr id="10" name="TextBox 9"/>
+          <p:cNvSpPr txBox="1"/>
+          <p:nvPr/>
+        </p:nvSpPr>
+        <p:spPr>
+          <a:xfrm>
+            <a:off x="685800" y="1865376"/>
+            <a:ext cx="3246120" cy="2395728"/>
+          </a:xfrm>
+          <a:prstGeom prst="rect">
+            <a:avLst/>
+          </a:prstGeom>
+          <a:noFill/>
+        </p:spPr>
+        <p:txBody>
+          <a:bodyPr wrap="square" anchor="t">
+            <a:spAutoFit/>
+          </a:bodyPr>
+          <a:lstStyle/>
+          <a:p>
+            <a:pPr>
+              <a:lnSpc>
+                <a:spcPct val="114000"/>
+              </a:lnSpc>
+              <a:spcAft>
+                <a:spcPts val="350"/>
+              </a:spcAft>
+            </a:pPr>
+            <a:r>
+              <a:rPr sz="1350" b="1">
+                <a:solidFill>
+                  <a:srgbClr val="33393F"/>
+                </a:solidFill>
+                <a:latin typeface="맑은 고딕"/>
+                <a:ea typeface="맑은 고딕"/>
+              </a:rPr>
+              <a:t>1단계 · 판정식 검증</a:t>
+            </a:r>
+          </a:p>
+          <a:p>
+            <a:pPr marL="160020" indent="-160020">
+              <a:lnSpc>
+                <a:spcPct val="114000"/>
+              </a:lnSpc>
+              <a:spcAft>
+                <a:spcPts val="200"/>
+              </a:spcAft>
+            </a:pPr>
+            <a:r>
+              <a:rPr sz="1100" b="0">
+                <a:solidFill>
+                  <a:srgbClr val="1C1C1E"/>
+                </a:solidFill>
+                <a:latin typeface="맑은 고딕"/>
+                <a:ea typeface="맑은 고딕"/>
+              </a:rPr>
+              <a:t>• 공표 임계값(접근성·TRI 30/30 등)으로 전 지역을 재판정하고 실제 지정 결과와 대조한다</a:t>
+            </a:r>
+          </a:p>
+          <a:p>
+            <a:pPr marL="160020" indent="-160020">
+              <a:lnSpc>
+                <a:spcPct val="114000"/>
+              </a:lnSpc>
+              <a:spcAft>
+                <a:spcPts val="200"/>
+              </a:spcAft>
+            </a:pPr>
+            <a:r>
+              <a:rPr sz="1100" b="0">
+                <a:solidFill>
+                  <a:srgbClr val="1C1C1E"/>
+                </a:solidFill>
+                <a:latin typeface="맑은 고딕"/>
+                <a:ea typeface="맑은 고딕"/>
+              </a:rPr>
+              <a:t>• 일치율과 불일치 사례를 모두 보고한다 — 불일치는 오류가 아니라 행정 층의 증거로 해석할 계획</a:t>
+            </a:r>
+          </a:p>
+        </p:txBody>
+      </p:sp>
+      <p:sp>
+        <p:nvSpPr>
+          <p:cNvPr id="11" name="Rounded Rectangle 10"/>
+          <p:cNvSpPr/>
+          <p:nvPr/>
+        </p:nvSpPr>
+        <p:spPr>
+          <a:xfrm>
+            <a:off x="4343400" y="1737360"/>
+            <a:ext cx="3611880" cy="2651760"/>
+          </a:xfrm>
+          <a:prstGeom prst="roundRect">
+            <a:avLst>
+              <a:gd name="adj" fmla="val 3103"/>
+            </a:avLst>
+          </a:prstGeom>
+          <a:solidFill>
+            <a:srgbClr val="FFFFFF"/>
+          </a:solidFill>
+          <a:ln w="12700">
+            <a:solidFill>
+              <a:srgbClr val="E4E6E9"/>
+            </a:solidFill>
+          </a:ln>
+          <a:effectLst>
+            <a:outerShdw blurRad="182880" dist="64008" dir="5400000" rotWithShape="0">
+              <a:srgbClr val="000000">
+                <a:alpha val="30000"/>
+              </a:srgbClr>
+            </a:outerShdw>
+          </a:effectLst>
+        </p:spPr>
+        <p:style>
+          <a:lnRef idx="1">
+            <a:schemeClr val="accent1"/>
+          </a:lnRef>
+          <a:fillRef idx="3">
+            <a:schemeClr val="accent1"/>
+          </a:fillRef>
+          <a:effectRef idx="2">
+            <a:schemeClr val="accent1"/>
+          </a:effectRef>
+          <a:fontRef idx="minor">
+            <a:schemeClr val="lt1"/>
+          </a:fontRef>
+        </p:style>
+        <p:txBody>
+          <a:bodyPr rtlCol="0" anchor="ctr"/>
+          <a:lstStyle/>
+          <a:p>
+            <a:pPr algn="ctr"/>
+          </a:p>
+        </p:txBody>
+      </p:sp>
+      <p:sp>
+        <p:nvSpPr>
+          <p:cNvPr id="12" name="TextBox 11"/>
+          <p:cNvSpPr txBox="1"/>
+          <p:nvPr/>
+        </p:nvSpPr>
+        <p:spPr>
+          <a:xfrm>
+            <a:off x="4526280" y="1865376"/>
+            <a:ext cx="3246120" cy="2395728"/>
+          </a:xfrm>
+          <a:prstGeom prst="rect">
+            <a:avLst/>
+          </a:prstGeom>
+          <a:noFill/>
+        </p:spPr>
+        <p:txBody>
+          <a:bodyPr wrap="square" anchor="t">
+            <a:spAutoFit/>
+          </a:bodyPr>
+          <a:lstStyle/>
+          <a:p>
+            <a:pPr>
+              <a:lnSpc>
+                <a:spcPct val="114000"/>
+              </a:lnSpc>
+              <a:spcAft>
+                <a:spcPts val="350"/>
+              </a:spcAft>
+            </a:pPr>
+            <a:r>
+              <a:rPr sz="1350" b="1">
+                <a:solidFill>
+                  <a:srgbClr val="33393F"/>
+                </a:solidFill>
+                <a:latin typeface="맑은 고딕"/>
+                <a:ea typeface="맑은 고딕"/>
+              </a:rPr>
+              <a:t>2단계 · 공급 반영 검정</a:t>
+            </a:r>
+          </a:p>
+          <a:p>
+            <a:pPr marL="160020" indent="-160020">
+              <a:lnSpc>
+                <a:spcPct val="114000"/>
+              </a:lnSpc>
+              <a:spcAft>
+                <a:spcPts val="200"/>
+              </a:spcAft>
+            </a:pPr>
+            <a:r>
+              <a:rPr sz="1100" b="0">
+                <a:solidFill>
+                  <a:srgbClr val="1C1C1E"/>
+                </a:solidFill>
+                <a:latin typeface="맑은 고딕"/>
+                <a:ea typeface="맑은 고딕"/>
+              </a:rPr>
+              <a:t>• 로지스틱 회귀(5-겹 교차검증)로 판정을 예측하고, 공급 변수(전문의 수 등)를 추가했을 때 판별력(AUC)이 개선되는지 본다</a:t>
+            </a:r>
+          </a:p>
+          <a:p>
+            <a:pPr marL="160020" indent="-160020">
+              <a:lnSpc>
+                <a:spcPct val="114000"/>
+              </a:lnSpc>
+              <a:spcAft>
+                <a:spcPts val="200"/>
+              </a:spcAft>
+            </a:pPr>
+            <a:r>
+              <a:rPr sz="1100" b="0">
+                <a:solidFill>
+                  <a:srgbClr val="1C1C1E"/>
+                </a:solidFill>
+                <a:latin typeface="맑은 고딕"/>
+                <a:ea typeface="맑은 고딕"/>
+              </a:rPr>
+              <a:t>• 개선이 없다면 판정이 공급을 보지 않는다는 증거다</a:t>
+            </a:r>
+          </a:p>
+        </p:txBody>
+      </p:sp>
+      <p:sp>
+        <p:nvSpPr>
+          <p:cNvPr id="13" name="Rounded Rectangle 12"/>
+          <p:cNvSpPr/>
+          <p:nvPr/>
+        </p:nvSpPr>
+        <p:spPr>
+          <a:xfrm>
+            <a:off x="8183880" y="1737360"/>
+            <a:ext cx="3611880" cy="2651760"/>
+          </a:xfrm>
+          <a:prstGeom prst="roundRect">
+            <a:avLst>
+              <a:gd name="adj" fmla="val 3103"/>
+            </a:avLst>
+          </a:prstGeom>
+          <a:solidFill>
+            <a:srgbClr val="FFFFFF"/>
+          </a:solidFill>
+          <a:ln w="12700">
+            <a:solidFill>
+              <a:srgbClr val="E4E6E9"/>
+            </a:solidFill>
+          </a:ln>
+          <a:effectLst>
+            <a:outerShdw blurRad="182880" dist="64008" dir="5400000" rotWithShape="0">
+              <a:srgbClr val="000000">
+                <a:alpha val="30000"/>
+              </a:srgbClr>
+            </a:outerShdw>
+          </a:effectLst>
+        </p:spPr>
+        <p:style>
+          <a:lnRef idx="1">
+            <a:schemeClr val="accent1"/>
+          </a:lnRef>
+          <a:fillRef idx="3">
+            <a:schemeClr val="accent1"/>
+          </a:fillRef>
+          <a:effectRef idx="2">
+            <a:schemeClr val="accent1"/>
+          </a:effectRef>
+          <a:fontRef idx="minor">
+            <a:schemeClr val="lt1"/>
+          </a:fontRef>
+        </p:style>
+        <p:txBody>
+          <a:bodyPr rtlCol="0" anchor="ctr"/>
+          <a:lstStyle/>
+          <a:p>
+            <a:pPr algn="ctr"/>
+          </a:p>
+        </p:txBody>
+      </p:sp>
+      <p:sp>
+        <p:nvSpPr>
+          <p:cNvPr id="14" name="TextBox 13"/>
+          <p:cNvSpPr txBox="1"/>
+          <p:nvPr/>
+        </p:nvSpPr>
+        <p:spPr>
+          <a:xfrm>
+            <a:off x="8366760" y="1865376"/>
+            <a:ext cx="3246120" cy="2395728"/>
+          </a:xfrm>
+          <a:prstGeom prst="rect">
+            <a:avLst/>
+          </a:prstGeom>
+          <a:noFill/>
+        </p:spPr>
+        <p:txBody>
+          <a:bodyPr wrap="square" anchor="t">
+            <a:spAutoFit/>
+          </a:bodyPr>
+          <a:lstStyle/>
+          <a:p>
+            <a:pPr>
+              <a:lnSpc>
+                <a:spcPct val="114000"/>
+              </a:lnSpc>
+              <a:spcAft>
+                <a:spcPts val="350"/>
+              </a:spcAft>
+            </a:pPr>
+            <a:r>
+              <a:rPr sz="1350" b="1">
+                <a:solidFill>
+                  <a:srgbClr val="33393F"/>
+                </a:solidFill>
+                <a:latin typeface="맑은 고딕"/>
+                <a:ea typeface="맑은 고딕"/>
+              </a:rPr>
+              <a:t>3단계 · 사각지대 탐지</a:t>
+            </a:r>
+          </a:p>
+          <a:p>
+            <a:pPr marL="160020" indent="-160020">
+              <a:lnSpc>
+                <a:spcPct val="114000"/>
+              </a:lnSpc>
+              <a:spcAft>
+                <a:spcPts val="200"/>
+              </a:spcAft>
+            </a:pPr>
+            <a:r>
+              <a:rPr sz="1100" b="0">
+                <a:solidFill>
+                  <a:srgbClr val="1C1C1E"/>
+                </a:solidFill>
+                <a:latin typeface="맑은 고딕"/>
+                <a:ea typeface="맑은 고딕"/>
+              </a:rPr>
+              <a:t>• "거리 기준 통과 ∧ 관내 공급 공백 ∧ 관내 이용 0"의 3중 기준을 사전 정의하고 해당 지역을 탐지한다</a:t>
+            </a:r>
+          </a:p>
+          <a:p>
+            <a:pPr marL="160020" indent="-160020">
+              <a:lnSpc>
+                <a:spcPct val="114000"/>
+              </a:lnSpc>
+              <a:spcAft>
+                <a:spcPts val="200"/>
+              </a:spcAft>
+            </a:pPr>
+            <a:r>
+              <a:rPr sz="1100" b="0">
+                <a:solidFill>
+                  <a:srgbClr val="1C1C1E"/>
+                </a:solidFill>
+                <a:latin typeface="맑은 고딕"/>
+                <a:ea typeface="맑은 고딕"/>
+              </a:rPr>
+              <a:t>• 중증 이송 반론은 동급 병원 유출 분리로, 선호 원정 반론은 관내 선택지 유무로 통제한다</a:t>
+            </a:r>
+          </a:p>
+        </p:txBody>
+      </p:sp>
+      <p:sp>
+        <p:nvSpPr>
+          <p:cNvPr id="15" name="Rounded Rectangle 14"/>
+          <p:cNvSpPr/>
+          <p:nvPr/>
+        </p:nvSpPr>
+        <p:spPr>
+          <a:xfrm>
+            <a:off x="502920" y="4663440"/>
+            <a:ext cx="11292840" cy="1417320"/>
+          </a:xfrm>
+          <a:prstGeom prst="roundRect">
+            <a:avLst>
+              <a:gd name="adj" fmla="val 5806"/>
+            </a:avLst>
+          </a:prstGeom>
+          <a:solidFill>
+            <a:srgbClr val="FFFFFF"/>
+          </a:solidFill>
+          <a:ln w="12700">
+            <a:solidFill>
+              <a:srgbClr val="E4E6E9"/>
+            </a:solidFill>
+          </a:ln>
+          <a:effectLst>
+            <a:outerShdw blurRad="182880" dist="64008" dir="5400000" rotWithShape="0">
+              <a:srgbClr val="000000">
+                <a:alpha val="30000"/>
+              </a:srgbClr>
+            </a:outerShdw>
+          </a:effectLst>
+        </p:spPr>
+        <p:style>
+          <a:lnRef idx="1">
+            <a:schemeClr val="accent1"/>
+          </a:lnRef>
+          <a:fillRef idx="3">
+            <a:schemeClr val="accent1"/>
+          </a:fillRef>
+          <a:effectRef idx="2">
+            <a:schemeClr val="accent1"/>
+          </a:effectRef>
+          <a:fontRef idx="minor">
+            <a:schemeClr val="lt1"/>
+          </a:fontRef>
+        </p:style>
+        <p:txBody>
+          <a:bodyPr rtlCol="0" anchor="ctr"/>
+          <a:lstStyle/>
+          <a:p>
+            <a:pPr algn="ctr"/>
+          </a:p>
+        </p:txBody>
+      </p:sp>
+      <p:sp>
+        <p:nvSpPr>
+          <p:cNvPr id="16" name="TextBox 15"/>
+          <p:cNvSpPr txBox="1"/>
+          <p:nvPr/>
+        </p:nvSpPr>
+        <p:spPr>
+          <a:xfrm>
+            <a:off x="685800" y="4791455"/>
+            <a:ext cx="10927080" cy="1161288"/>
+          </a:xfrm>
+          <a:prstGeom prst="rect">
+            <a:avLst/>
+          </a:prstGeom>
+          <a:noFill/>
+        </p:spPr>
+        <p:txBody>
+          <a:bodyPr wrap="square" anchor="t">
+            <a:spAutoFit/>
+          </a:bodyPr>
+          <a:lstStyle/>
+          <a:p>
+            <a:pPr>
+              <a:lnSpc>
+                <a:spcPct val="114000"/>
+              </a:lnSpc>
+              <a:spcAft>
+                <a:spcPts val="350"/>
+              </a:spcAft>
+            </a:pPr>
+            <a:r>
+              <a:rPr sz="1300" b="1">
+                <a:solidFill>
+                  <a:srgbClr val="33393F"/>
+                </a:solidFill>
+                <a:latin typeface="맑은 고딕"/>
+                <a:ea typeface="맑은 고딕"/>
+              </a:rPr>
+              <a:t>판단 기준의 사전 명시</a:t>
+            </a:r>
+          </a:p>
+          <a:p>
+            <a:pPr marL="160020" indent="-160020">
+              <a:lnSpc>
+                <a:spcPct val="114000"/>
+              </a:lnSpc>
+              <a:spcAft>
+                <a:spcPts val="200"/>
+              </a:spcAft>
+            </a:pPr>
+            <a:r>
+              <a:rPr sz="1150" b="0">
+                <a:solidFill>
+                  <a:srgbClr val="1C1C1E"/>
+                </a:solidFill>
+                <a:latin typeface="맑은 고딕"/>
+                <a:ea typeface="맑은 고딕"/>
+              </a:rPr>
+              <a:t>• 무엇을 "재현 성공"으로, 무엇을 "사각지대"로 볼지의 기준을 분석 전에 확정해 보고서에 명시한다</a:t>
+            </a:r>
+          </a:p>
+          <a:p>
+            <a:pPr marL="160020" indent="-160020">
+              <a:lnSpc>
+                <a:spcPct val="114000"/>
+              </a:lnSpc>
+              <a:spcAft>
+                <a:spcPts val="200"/>
+              </a:spcAft>
+            </a:pPr>
+            <a:r>
+              <a:rPr sz="1150" b="0">
+                <a:solidFill>
+                  <a:srgbClr val="1C1C1E"/>
+                </a:solidFill>
+                <a:latin typeface="맑은 고딕"/>
+                <a:ea typeface="맑은 고딕"/>
+              </a:rPr>
+              <a:t>• 반대 해석(예: "옆 도시로 가면 되지 않는가")을 본문에서 정면으로 다루는 섹션을 계획에 포함한다</a:t>
+            </a:r>
+          </a:p>
+        </p:txBody>
+      </p:sp>
+    </p:spTree>
+  </p:cSld>
+  <p:clrMapOvr>
+    <a:masterClrMapping/>
+  </p:clrMapOvr>
+</p:sld>
+</file>
+
+<file path=ppt/slides/slide11.xml><?xml version="1.0" encoding="utf-8"?>
+<p:sld xmlns:a="http://schemas.openxmlformats.org/drawingml/2006/main" xmlns:p="http://schemas.openxmlformats.org/presentationml/2006/main" xmlns:r="http://schemas.openxmlformats.org/officeDocument/2006/relationships">
+  <p:cSld>
+    <p:spTree>
+      <p:nvGrpSpPr>
+        <p:cNvPr id="1" name=""/>
+        <p:cNvGrpSpPr/>
+        <p:nvPr/>
+      </p:nvGrpSpPr>
+      <p:grpSpPr/>
+      <p:sp>
+        <p:nvSpPr>
+          <p:cNvPr id="2" name="Rectangle 1"/>
+          <p:cNvSpPr/>
+          <p:nvPr/>
+        </p:nvSpPr>
+        <p:spPr>
+          <a:xfrm>
+            <a:off x="0" y="0"/>
+            <a:ext cx="12191695" cy="6858000"/>
+          </a:xfrm>
+          <a:prstGeom prst="rect">
+            <a:avLst/>
+          </a:prstGeom>
+          <a:solidFill>
+            <a:srgbClr val="FFFFFF"/>
+          </a:solidFill>
+          <a:ln>
+            <a:noFill/>
+          </a:ln>
+          <a:effectLst/>
+        </p:spPr>
+        <p:style>
+          <a:lnRef idx="1">
+            <a:schemeClr val="accent1"/>
+          </a:lnRef>
+          <a:fillRef idx="3">
+            <a:schemeClr val="accent1"/>
+          </a:fillRef>
+          <a:effectRef idx="2">
+            <a:schemeClr val="accent1"/>
+          </a:effectRef>
+          <a:fontRef idx="minor">
+            <a:schemeClr val="lt1"/>
+          </a:fontRef>
+        </p:style>
+        <p:txBody>
+          <a:bodyPr rtlCol="0" anchor="ctr"/>
+          <a:lstStyle/>
+          <a:p>
+            <a:pPr algn="ctr"/>
+          </a:p>
+        </p:txBody>
+      </p:sp>
+      <p:sp>
+        <p:nvSpPr>
+          <p:cNvPr id="3" name="Rounded Rectangle 2"/>
+          <p:cNvSpPr/>
+          <p:nvPr/>
+        </p:nvSpPr>
+        <p:spPr>
+          <a:xfrm>
+            <a:off x="502920" y="475488"/>
+            <a:ext cx="310896" cy="310896"/>
+          </a:xfrm>
+          <a:prstGeom prst="roundRect">
+            <a:avLst>
+              <a:gd name="adj" fmla="val 50000"/>
+            </a:avLst>
+          </a:prstGeom>
+          <a:gradFill rotWithShape="1">
+            <a:gsLst>
+              <a:gs pos="0">
+                <a:srgbClr val="3A3F45"/>
+              </a:gs>
+              <a:gs pos="100000">
+                <a:srgbClr val="73787E"/>
+              </a:gs>
+            </a:gsLst>
+            <a:lin scaled="0" ang="18900000"/>
+          </a:gradFill>
+          <a:ln>
+            <a:noFill/>
+          </a:ln>
+          <a:effectLst>
+            <a:outerShdw blurRad="109728" dist="36576" dir="5400000" rotWithShape="0">
+              <a:srgbClr val="000000">
+                <a:alpha val="35000"/>
+              </a:srgbClr>
+            </a:outerShdw>
+          </a:effectLst>
+        </p:spPr>
+        <p:style>
+          <a:lnRef idx="1">
+            <a:schemeClr val="accent1"/>
+          </a:lnRef>
+          <a:fillRef idx="3">
+            <a:schemeClr val="accent1"/>
+          </a:fillRef>
+          <a:effectRef idx="2">
+            <a:schemeClr val="accent1"/>
+          </a:effectRef>
+          <a:fontRef idx="minor">
+            <a:schemeClr val="lt1"/>
+          </a:fontRef>
+        </p:style>
+        <p:txBody>
+          <a:bodyPr rtlCol="0" anchor="ctr"/>
+          <a:lstStyle/>
+          <a:p>
+            <a:pPr algn="ctr"/>
+          </a:p>
+        </p:txBody>
+      </p:sp>
+      <p:sp>
+        <p:nvSpPr>
+          <p:cNvPr id="4" name="TextBox 3"/>
+          <p:cNvSpPr txBox="1"/>
+          <p:nvPr/>
+        </p:nvSpPr>
+        <p:spPr>
+          <a:xfrm>
+            <a:off x="960120" y="274320"/>
+            <a:ext cx="9692640" cy="685800"/>
+          </a:xfrm>
+          <a:prstGeom prst="rect">
+            <a:avLst/>
+          </a:prstGeom>
+          <a:noFill/>
+        </p:spPr>
+        <p:txBody>
+          <a:bodyPr wrap="square" anchor="ctr">
+            <a:spAutoFit/>
+          </a:bodyPr>
+          <a:lstStyle/>
+          <a:p>
+            <a:pPr>
+              <a:lnSpc>
+                <a:spcPct val="114000"/>
+              </a:lnSpc>
+              <a:spcAft>
+                <a:spcPts val="0"/>
+              </a:spcAft>
+            </a:pPr>
+            <a:r>
+              <a:rPr sz="2150" b="1">
+                <a:solidFill>
+                  <a:srgbClr val="1C1C1E"/>
+                </a:solidFill>
+                <a:latin typeface="맑은 고딕"/>
+                <a:ea typeface="맑은 고딕"/>
+              </a:rPr>
+              <a:t>분석 설계 ② 배분 진단 (RQ3)</a:t>
+            </a:r>
+          </a:p>
+        </p:txBody>
+      </p:sp>
+      <p:sp>
+        <p:nvSpPr>
+          <p:cNvPr id="5" name="Rectangle 4"/>
+          <p:cNvSpPr/>
+          <p:nvPr/>
+        </p:nvSpPr>
+        <p:spPr>
+          <a:xfrm>
+            <a:off x="521207" y="969264"/>
+            <a:ext cx="4206240" cy="27432"/>
+          </a:xfrm>
+          <a:prstGeom prst="rect">
+            <a:avLst/>
+          </a:prstGeom>
+          <a:gradFill rotWithShape="1">
+            <a:gsLst>
+              <a:gs pos="0">
+                <a:srgbClr val="2A2E33"/>
+              </a:gs>
+              <a:gs pos="100000">
+                <a:srgbClr val="FFFFFF"/>
+              </a:gs>
+            </a:gsLst>
+            <a:lin scaled="0" ang="0"/>
+          </a:gradFill>
+          <a:ln>
+            <a:noFill/>
+          </a:ln>
+          <a:effectLst/>
+        </p:spPr>
+        <p:style>
+          <a:lnRef idx="1">
+            <a:schemeClr val="accent1"/>
+          </a:lnRef>
+          <a:fillRef idx="3">
+            <a:schemeClr val="accent1"/>
+          </a:fillRef>
+          <a:effectRef idx="2">
+            <a:schemeClr val="accent1"/>
+          </a:effectRef>
+          <a:fontRef idx="minor">
+            <a:schemeClr val="lt1"/>
+          </a:fontRef>
+        </p:style>
+        <p:txBody>
+          <a:bodyPr rtlCol="0" anchor="ctr"/>
+          <a:lstStyle/>
+          <a:p>
+            <a:pPr algn="ctr"/>
+          </a:p>
+        </p:txBody>
+      </p:sp>
+      <p:sp>
+        <p:nvSpPr>
+          <p:cNvPr id="6" name="TextBox 5"/>
+          <p:cNvSpPr txBox="1"/>
+          <p:nvPr/>
+        </p:nvSpPr>
+        <p:spPr>
+          <a:xfrm>
+            <a:off x="10835640" y="164592"/>
+            <a:ext cx="1188720" cy="777240"/>
+          </a:xfrm>
+          <a:prstGeom prst="rect">
+            <a:avLst/>
+          </a:prstGeom>
+          <a:noFill/>
+        </p:spPr>
+        <p:txBody>
+          <a:bodyPr wrap="square" anchor="t">
+            <a:spAutoFit/>
+          </a:bodyPr>
+          <a:lstStyle/>
+          <a:p>
+            <a:pPr>
+              <a:lnSpc>
+                <a:spcPct val="114000"/>
+              </a:lnSpc>
+              <a:spcAft>
+                <a:spcPts val="0"/>
+              </a:spcAft>
+            </a:pPr>
+            <a:r>
+              <a:rPr sz="3000" b="1">
+                <a:solidFill>
+                  <a:srgbClr val="D8DADD"/>
+                </a:solidFill>
+                <a:latin typeface="맑은 고딕"/>
+                <a:ea typeface="맑은 고딕"/>
+              </a:rPr>
+              <a:t>11</a:t>
             </a:r>
           </a:p>
         </p:txBody>
@@ -4576,7 +5471,7 @@
 </p:sld>
 </file>
 
-<file path=ppt/slides/slide11.xml><?xml version="1.0" encoding="utf-8"?>
+<file path=ppt/slides/slide12.xml><?xml version="1.0" encoding="utf-8"?>
 <p:sld xmlns:a="http://schemas.openxmlformats.org/drawingml/2006/main" xmlns:p="http://schemas.openxmlformats.org/presentationml/2006/main" xmlns:r="http://schemas.openxmlformats.org/officeDocument/2006/relationships">
   <p:cSld>
     <p:spTree>
@@ -4823,7 +5718,7 @@
                 <a:latin typeface="맑은 고딕"/>
                 <a:ea typeface="맑은 고딕"/>
               </a:rPr>
-              <a:t>11</a:t>
+              <a:t>12</a:t>
             </a:r>
           </a:p>
         </p:txBody>
@@ -5393,7 +6288,7 @@
 </p:sld>
 </file>
 
-<file path=ppt/slides/slide12.xml><?xml version="1.0" encoding="utf-8"?>
+<file path=ppt/slides/slide13.xml><?xml version="1.0" encoding="utf-8"?>
 <p:sld xmlns:a="http://schemas.openxmlformats.org/drawingml/2006/main" xmlns:p="http://schemas.openxmlformats.org/presentationml/2006/main" xmlns:r="http://schemas.openxmlformats.org/officeDocument/2006/relationships">
   <p:cSld>
     <p:spTree>
@@ -5640,7 +6535,7 @@
                 <a:latin typeface="맑은 고딕"/>
                 <a:ea typeface="맑은 고딕"/>
               </a:rPr>
-              <a:t>12</a:t>
+              <a:t>13</a:t>
             </a:r>
           </a:p>
         </p:txBody>
@@ -6486,7 +7381,7 @@
 </p:sld>
 </file>
 
-<file path=ppt/slides/slide13.xml><?xml version="1.0" encoding="utf-8"?>
+<file path=ppt/slides/slide14.xml><?xml version="1.0" encoding="utf-8"?>
 <p:sld xmlns:a="http://schemas.openxmlformats.org/drawingml/2006/main" xmlns:p="http://schemas.openxmlformats.org/presentationml/2006/main" xmlns:r="http://schemas.openxmlformats.org/officeDocument/2006/relationships">
   <p:cSld>
     <p:spTree>
@@ -6733,7 +7628,7 @@
                 <a:latin typeface="맑은 고딕"/>
                 <a:ea typeface="맑은 고딕"/>
               </a:rPr>
-              <a:t>13</a:t>
+              <a:t>14</a:t>
             </a:r>
           </a:p>
         </p:txBody>
@@ -7844,7 +8739,7 @@
                 <a:latin typeface="맑은 고딕"/>
                 <a:ea typeface="맑은 고딕"/>
               </a:rPr>
-              <a:t>아이디어의 발단 — 자원 부족은 실재한다. 그런데 원인이 그것뿐인가</a:t>
+              <a:t>목차</a:t>
             </a:r>
           </a:p>
         </p:txBody>
@@ -7909,8 +8804,8 @@
         </p:nvSpPr>
         <p:spPr>
           <a:xfrm>
-            <a:off x="10835640" y="164592"/>
-            <a:ext cx="1188720" cy="777240"/>
+            <a:off x="502920" y="6492240"/>
+            <a:ext cx="11247120" cy="320040"/>
           </a:xfrm>
           <a:prstGeom prst="rect">
             <a:avLst/>
@@ -7932,92 +8827,6 @@
               </a:spcAft>
             </a:pPr>
             <a:r>
-              <a:rPr sz="3000" b="1">
-                <a:solidFill>
-                  <a:srgbClr val="D8DADD"/>
-                </a:solidFill>
-                <a:latin typeface="맑은 고딕"/>
-                <a:ea typeface="맑은 고딕"/>
-              </a:rPr>
-              <a:t>02</a:t>
-            </a:r>
-          </a:p>
-        </p:txBody>
-      </p:sp>
-      <p:sp>
-        <p:nvSpPr>
-          <p:cNvPr id="7" name="TextBox 6"/>
-          <p:cNvSpPr txBox="1"/>
-          <p:nvPr/>
-        </p:nvSpPr>
-        <p:spPr>
-          <a:xfrm>
-            <a:off x="548640" y="1097280"/>
-            <a:ext cx="11155680" cy="384048"/>
-          </a:xfrm>
-          <a:prstGeom prst="rect">
-            <a:avLst/>
-          </a:prstGeom>
-          <a:noFill/>
-        </p:spPr>
-        <p:txBody>
-          <a:bodyPr wrap="square" anchor="t">
-            <a:spAutoFit/>
-          </a:bodyPr>
-          <a:lstStyle/>
-          <a:p>
-            <a:pPr>
-              <a:lnSpc>
-                <a:spcPct val="114000"/>
-              </a:lnSpc>
-              <a:spcAft>
-                <a:spcPts val="0"/>
-              </a:spcAft>
-            </a:pPr>
-            <a:r>
-              <a:rPr sz="1250" b="0">
-                <a:solidFill>
-                  <a:srgbClr val="767A7F"/>
-                </a:solidFill>
-                <a:latin typeface="맑은 고딕"/>
-                <a:ea typeface="맑은 고딕"/>
-              </a:rPr>
-              <a:t>부족(㉠)과 배분(㉡)은 다른 문제이고 해법도 다르다 — 본 계획은 ㉡을 맡는다</a:t>
-            </a:r>
-          </a:p>
-        </p:txBody>
-      </p:sp>
-      <p:sp>
-        <p:nvSpPr>
-          <p:cNvPr id="8" name="TextBox 7"/>
-          <p:cNvSpPr txBox="1"/>
-          <p:nvPr/>
-        </p:nvSpPr>
-        <p:spPr>
-          <a:xfrm>
-            <a:off x="502920" y="6492240"/>
-            <a:ext cx="11247120" cy="320040"/>
-          </a:xfrm>
-          <a:prstGeom prst="rect">
-            <a:avLst/>
-          </a:prstGeom>
-          <a:noFill/>
-        </p:spPr>
-        <p:txBody>
-          <a:bodyPr wrap="square" anchor="t">
-            <a:spAutoFit/>
-          </a:bodyPr>
-          <a:lstStyle/>
-          <a:p>
-            <a:pPr>
-              <a:lnSpc>
-                <a:spcPct val="114000"/>
-              </a:lnSpc>
-              <a:spcAft>
-                <a:spcPts val="0"/>
-              </a:spcAft>
-            </a:pPr>
-            <a:r>
               <a:rPr sz="850" b="0">
                 <a:solidFill>
                   <a:srgbClr val="B2B5B9"/>
@@ -8032,18 +8841,18 @@
       </p:sp>
       <p:sp>
         <p:nvSpPr>
-          <p:cNvPr id="9" name="Rounded Rectangle 8"/>
+          <p:cNvPr id="7" name="Rounded Rectangle 6"/>
           <p:cNvSpPr/>
           <p:nvPr/>
         </p:nvSpPr>
         <p:spPr>
           <a:xfrm>
-            <a:off x="502920" y="1371600"/>
-            <a:ext cx="3611880" cy="1783080"/>
+            <a:off x="502920" y="1325880"/>
+            <a:ext cx="5532120" cy="1499616"/>
           </a:xfrm>
           <a:prstGeom prst="roundRect">
             <a:avLst>
-              <a:gd name="adj" fmla="val 4615"/>
+              <a:gd name="adj" fmla="val 5487"/>
             </a:avLst>
           </a:prstGeom>
           <a:solidFill>
@@ -8086,14 +8895,14 @@
       </p:sp>
       <p:sp>
         <p:nvSpPr>
-          <p:cNvPr id="10" name="TextBox 9"/>
+          <p:cNvPr id="8" name="TextBox 7"/>
           <p:cNvSpPr txBox="1"/>
           <p:nvPr/>
         </p:nvSpPr>
         <p:spPr>
           <a:xfrm>
-            <a:off x="685800" y="1499616"/>
-            <a:ext cx="3246120" cy="1527048"/>
+            <a:off x="685800" y="1444752"/>
+            <a:ext cx="5166360" cy="1261872"/>
           </a:xfrm>
           <a:prstGeom prst="rect">
             <a:avLst/>
@@ -8111,56 +8920,116 @@
                 <a:spcPct val="114000"/>
               </a:lnSpc>
               <a:spcAft>
-                <a:spcPts val="350"/>
-              </a:spcAft>
-            </a:pPr>
-            <a:r>
-              <a:rPr sz="1300" b="1">
+                <a:spcPts val="300"/>
+              </a:spcAft>
+            </a:pPr>
+            <a:r>
+              <a:rPr sz="1350" b="1">
                 <a:solidFill>
                   <a:srgbClr val="33393F"/>
                 </a:solidFill>
                 <a:latin typeface="맑은 고딕"/>
                 <a:ea typeface="맑은 고딕"/>
               </a:rPr>
-              <a:t>① 여전히 존재하는 분만취약지</a:t>
-            </a:r>
-          </a:p>
-          <a:p>
-            <a:pPr marL="160020" indent="-160020">
-              <a:lnSpc>
-                <a:spcPct val="114000"/>
-              </a:lnSpc>
-              <a:spcAft>
-                <a:spcPts val="200"/>
-              </a:spcAft>
-            </a:pPr>
-            <a:r>
-              <a:rPr sz="1100" b="0">
+              <a:t>Ⅰ. 문제 정의</a:t>
+            </a:r>
+          </a:p>
+          <a:p>
+            <a:pPr>
+              <a:lnSpc>
+                <a:spcPct val="114000"/>
+              </a:lnSpc>
+              <a:spcAft>
+                <a:spcPts val="400"/>
+              </a:spcAft>
+            </a:pPr>
+            <a:r>
+              <a:rPr sz="1050" b="0">
+                <a:solidFill>
+                  <a:srgbClr val="767A7F"/>
+                </a:solidFill>
+                <a:latin typeface="맑은 고딕"/>
+                <a:ea typeface="맑은 고딕"/>
+              </a:rPr>
+              <a:t>왜 이 주제이고, 무엇을 물을 것인가</a:t>
+            </a:r>
+          </a:p>
+          <a:p>
+            <a:pPr>
+              <a:lnSpc>
+                <a:spcPct val="114000"/>
+              </a:lnSpc>
+              <a:spcAft>
+                <a:spcPts val="150"/>
+              </a:spcAft>
+            </a:pPr>
+            <a:r>
+              <a:rPr sz="1150" b="0">
                 <a:solidFill>
                   <a:srgbClr val="1C1C1E"/>
                 </a:solidFill>
                 <a:latin typeface="맑은 고딕"/>
                 <a:ea typeface="맑은 고딕"/>
               </a:rPr>
-              <a:t>• "지방에 분만실이 없다" — 해마다 반복되는 기사. 처방도 늘 같다: 의사를 늘리고 병원을 지어라. 그리고 이 처방은 옳다 — 절대량이 모자란 것은 사실이다</a:t>
-            </a:r>
-          </a:p>
-        </p:txBody>
-      </p:sp>
-      <p:sp>
-        <p:nvSpPr>
-          <p:cNvPr id="11" name="Rounded Rectangle 10"/>
+              <a:t>03   아이디어의 발단</a:t>
+            </a:r>
+          </a:p>
+          <a:p>
+            <a:pPr>
+              <a:lnSpc>
+                <a:spcPct val="114000"/>
+              </a:lnSpc>
+              <a:spcAft>
+                <a:spcPts val="150"/>
+              </a:spcAft>
+            </a:pPr>
+            <a:r>
+              <a:rPr sz="1150" b="0">
+                <a:solidFill>
+                  <a:srgbClr val="1C1C1E"/>
+                </a:solidFill>
+                <a:latin typeface="맑은 고딕"/>
+                <a:ea typeface="맑은 고딕"/>
+              </a:rPr>
+              <a:t>04   문제 인식 — 세 단계 파이프라인</a:t>
+            </a:r>
+          </a:p>
+          <a:p>
+            <a:pPr>
+              <a:lnSpc>
+                <a:spcPct val="114000"/>
+              </a:lnSpc>
+              <a:spcAft>
+                <a:spcPts val="150"/>
+              </a:spcAft>
+            </a:pPr>
+            <a:r>
+              <a:rPr sz="1150" b="0">
+                <a:solidFill>
+                  <a:srgbClr val="1C1C1E"/>
+                </a:solidFill>
+                <a:latin typeface="맑은 고딕"/>
+                <a:ea typeface="맑은 고딕"/>
+              </a:rPr>
+              <a:t>05   연구 질문 (RQ 4개)</a:t>
+            </a:r>
+          </a:p>
+        </p:txBody>
+      </p:sp>
+      <p:sp>
+        <p:nvSpPr>
+          <p:cNvPr id="9" name="Rounded Rectangle 8"/>
           <p:cNvSpPr/>
           <p:nvPr/>
         </p:nvSpPr>
         <p:spPr>
           <a:xfrm>
-            <a:off x="4343400" y="1371600"/>
-            <a:ext cx="3611880" cy="1783080"/>
+            <a:off x="502920" y="3026663"/>
+            <a:ext cx="5532120" cy="1225296"/>
           </a:xfrm>
           <a:prstGeom prst="roundRect">
             <a:avLst>
-              <a:gd name="adj" fmla="val 4615"/>
+              <a:gd name="adj" fmla="val 6716"/>
             </a:avLst>
           </a:prstGeom>
           <a:solidFill>
@@ -8203,14 +9072,14 @@
       </p:sp>
       <p:sp>
         <p:nvSpPr>
-          <p:cNvPr id="12" name="TextBox 11"/>
+          <p:cNvPr id="10" name="TextBox 9"/>
           <p:cNvSpPr txBox="1"/>
           <p:nvPr/>
         </p:nvSpPr>
         <p:spPr>
           <a:xfrm>
-            <a:off x="4526280" y="1499616"/>
-            <a:ext cx="3246120" cy="1527048"/>
+            <a:off x="685800" y="3145535"/>
+            <a:ext cx="5166360" cy="987552"/>
           </a:xfrm>
           <a:prstGeom prst="rect">
             <a:avLst/>
@@ -8228,173 +9097,96 @@
                 <a:spcPct val="114000"/>
               </a:lnSpc>
               <a:spcAft>
-                <a:spcPts val="350"/>
-              </a:spcAft>
-            </a:pPr>
-            <a:r>
-              <a:rPr sz="1300" b="1">
+                <a:spcPts val="300"/>
+              </a:spcAft>
+            </a:pPr>
+            <a:r>
+              <a:rPr sz="1350" b="1">
                 <a:solidFill>
                   <a:srgbClr val="33393F"/>
                 </a:solidFill>
                 <a:latin typeface="맑은 고딕"/>
                 <a:ea typeface="맑은 고딕"/>
               </a:rPr>
-              <a:t>② 그런데 원인이 그것뿐인가</a:t>
-            </a:r>
-          </a:p>
-          <a:p>
-            <a:pPr marL="160020" indent="-160020">
-              <a:lnSpc>
-                <a:spcPct val="114000"/>
-              </a:lnSpc>
-              <a:spcAft>
-                <a:spcPts val="200"/>
-              </a:spcAft>
-            </a:pPr>
-            <a:r>
-              <a:rPr sz="1100" b="0">
+              <a:t>Ⅱ. 배경 이해</a:t>
+            </a:r>
+          </a:p>
+          <a:p>
+            <a:pPr>
+              <a:lnSpc>
+                <a:spcPct val="114000"/>
+              </a:lnSpc>
+              <a:spcAft>
+                <a:spcPts val="400"/>
+              </a:spcAft>
+            </a:pPr>
+            <a:r>
+              <a:rPr sz="1050" b="0">
+                <a:solidFill>
+                  <a:srgbClr val="767A7F"/>
+                </a:solidFill>
+                <a:latin typeface="맑은 고딕"/>
+                <a:ea typeface="맑은 고딕"/>
+              </a:rPr>
+              <a:t>분석 전에 확정해야 할 이론과 제도</a:t>
+            </a:r>
+          </a:p>
+          <a:p>
+            <a:pPr>
+              <a:lnSpc>
+                <a:spcPct val="114000"/>
+              </a:lnSpc>
+              <a:spcAft>
+                <a:spcPts val="150"/>
+              </a:spcAft>
+            </a:pPr>
+            <a:r>
+              <a:rPr sz="1150" b="0">
                 <a:solidFill>
                   <a:srgbClr val="1C1C1E"/>
                 </a:solidFill>
                 <a:latin typeface="맑은 고딕"/>
                 <a:ea typeface="맑은 고딕"/>
               </a:rPr>
-              <a:t>• 자원이 모자란 것(㉠)과, 있는 자원이 체계적으로 배분되지 않는 것(㉡)은 다른 문제다. 그리고 둘은 동시에 성립할 수 있다</a:t>
-            </a:r>
-          </a:p>
-        </p:txBody>
-      </p:sp>
-      <p:sp>
-        <p:nvSpPr>
-          <p:cNvPr id="13" name="Rounded Rectangle 12"/>
+              <a:t>06   이론적 고찰 — 접근성의 두 축</a:t>
+            </a:r>
+          </a:p>
+          <a:p>
+            <a:pPr>
+              <a:lnSpc>
+                <a:spcPct val="114000"/>
+              </a:lnSpc>
+              <a:spcAft>
+                <a:spcPts val="150"/>
+              </a:spcAft>
+            </a:pPr>
+            <a:r>
+              <a:rPr sz="1150" b="0">
+                <a:solidFill>
+                  <a:srgbClr val="1C1C1E"/>
+                </a:solidFill>
+                <a:latin typeface="맑은 고딕"/>
+                <a:ea typeface="맑은 고딕"/>
+              </a:rPr>
+              <a:t>07   분석 대상 제도 — 지표·등급·배분</a:t>
+            </a:r>
+          </a:p>
+        </p:txBody>
+      </p:sp>
+      <p:sp>
+        <p:nvSpPr>
+          <p:cNvPr id="11" name="Rounded Rectangle 10"/>
           <p:cNvSpPr/>
           <p:nvPr/>
         </p:nvSpPr>
         <p:spPr>
           <a:xfrm>
-            <a:off x="8183880" y="1371600"/>
-            <a:ext cx="3611880" cy="1783080"/>
+            <a:off x="502920" y="4453127"/>
+            <a:ext cx="5532120" cy="1225296"/>
           </a:xfrm>
           <a:prstGeom prst="roundRect">
             <a:avLst>
-              <a:gd name="adj" fmla="val 4615"/>
-            </a:avLst>
-          </a:prstGeom>
-          <a:solidFill>
-            <a:srgbClr val="F1F2F3"/>
-          </a:solidFill>
-          <a:ln w="15875">
-            <a:solidFill>
-              <a:srgbClr val="9AA0A6"/>
-            </a:solidFill>
-          </a:ln>
-          <a:effectLst>
-            <a:outerShdw blurRad="182880" dist="64008" dir="5400000" rotWithShape="0">
-              <a:srgbClr val="000000">
-                <a:alpha val="32000"/>
-              </a:srgbClr>
-            </a:outerShdw>
-          </a:effectLst>
-        </p:spPr>
-        <p:style>
-          <a:lnRef idx="1">
-            <a:schemeClr val="accent1"/>
-          </a:lnRef>
-          <a:fillRef idx="3">
-            <a:schemeClr val="accent1"/>
-          </a:fillRef>
-          <a:effectRef idx="2">
-            <a:schemeClr val="accent1"/>
-          </a:effectRef>
-          <a:fontRef idx="minor">
-            <a:schemeClr val="lt1"/>
-          </a:fontRef>
-        </p:style>
-        <p:txBody>
-          <a:bodyPr rtlCol="0" anchor="ctr"/>
-          <a:lstStyle/>
-          <a:p>
-            <a:pPr algn="ctr"/>
-          </a:p>
-        </p:txBody>
-      </p:sp>
-      <p:sp>
-        <p:nvSpPr>
-          <p:cNvPr id="14" name="TextBox 13"/>
-          <p:cNvSpPr txBox="1"/>
-          <p:nvPr/>
-        </p:nvSpPr>
-        <p:spPr>
-          <a:xfrm>
-            <a:off x="8366760" y="1499616"/>
-            <a:ext cx="3246120" cy="1527048"/>
-          </a:xfrm>
-          <a:prstGeom prst="rect">
-            <a:avLst/>
-          </a:prstGeom>
-          <a:noFill/>
-        </p:spPr>
-        <p:txBody>
-          <a:bodyPr wrap="square" anchor="t">
-            <a:spAutoFit/>
-          </a:bodyPr>
-          <a:lstStyle/>
-          <a:p>
-            <a:pPr>
-              <a:lnSpc>
-                <a:spcPct val="114000"/>
-              </a:lnSpc>
-              <a:spcAft>
-                <a:spcPts val="350"/>
-              </a:spcAft>
-            </a:pPr>
-            <a:r>
-              <a:rPr sz="1300" b="1">
-                <a:solidFill>
-                  <a:srgbClr val="000000"/>
-                </a:solidFill>
-                <a:latin typeface="맑은 고딕"/>
-                <a:ea typeface="맑은 고딕"/>
-              </a:rPr>
-              <a:t>③ 해결할 수 있는 문제</a:t>
-            </a:r>
-          </a:p>
-          <a:p>
-            <a:pPr marL="160020" indent="-160020">
-              <a:lnSpc>
-                <a:spcPct val="114000"/>
-              </a:lnSpc>
-              <a:spcAft>
-                <a:spcPts val="200"/>
-              </a:spcAft>
-            </a:pPr>
-            <a:r>
-              <a:rPr sz="1100" b="0">
-                <a:solidFill>
-                  <a:srgbClr val="1C1C1E"/>
-                </a:solidFill>
-                <a:latin typeface="맑은 고딕"/>
-                <a:ea typeface="맑은 고딕"/>
-              </a:rPr>
-              <a:t>• ㉠은 예산·인력의 영역이라 데이터가 답할 수 없다. ㉡은 배분 규칙의 문제이므로 데이터로 답할 수 있다 — 그리고 ㉡은 아직 검증된 적이 없다</a:t>
-            </a:r>
-          </a:p>
-        </p:txBody>
-      </p:sp>
-      <p:sp>
-        <p:nvSpPr>
-          <p:cNvPr id="15" name="Rounded Rectangle 14"/>
-          <p:cNvSpPr/>
-          <p:nvPr/>
-        </p:nvSpPr>
-        <p:spPr>
-          <a:xfrm>
-            <a:off x="502920" y="3401568"/>
-            <a:ext cx="11292840" cy="1572768"/>
-          </a:xfrm>
-          <a:prstGeom prst="roundRect">
-            <a:avLst>
-              <a:gd name="adj" fmla="val 5232"/>
+              <a:gd name="adj" fmla="val 6716"/>
             </a:avLst>
           </a:prstGeom>
           <a:solidFill>
@@ -8437,14 +9229,14 @@
       </p:sp>
       <p:sp>
         <p:nvSpPr>
-          <p:cNvPr id="16" name="TextBox 15"/>
+          <p:cNvPr id="12" name="TextBox 11"/>
           <p:cNvSpPr txBox="1"/>
           <p:nvPr/>
         </p:nvSpPr>
         <p:spPr>
           <a:xfrm>
-            <a:off x="685800" y="3529584"/>
-            <a:ext cx="10927080" cy="1316736"/>
+            <a:off x="685800" y="4571999"/>
+            <a:ext cx="5166360" cy="987552"/>
           </a:xfrm>
           <a:prstGeom prst="rect">
             <a:avLst/>
@@ -8462,92 +9254,146 @@
                 <a:spcPct val="114000"/>
               </a:lnSpc>
               <a:spcAft>
-                <a:spcPts val="350"/>
-              </a:spcAft>
-            </a:pPr>
-            <a:r>
-              <a:rPr sz="1300" b="1">
+                <a:spcPts val="300"/>
+              </a:spcAft>
+            </a:pPr>
+            <a:r>
+              <a:rPr sz="1350" b="1">
                 <a:solidFill>
                   <a:srgbClr val="33393F"/>
                 </a:solidFill>
                 <a:latin typeface="맑은 고딕"/>
                 <a:ea typeface="맑은 고딕"/>
               </a:rPr>
-              <a:t>그리고 자원을 공백 지역으로 보내는 제도는 이미 있다 — 「분만취약지 지원사업」(15년째)</a:t>
-            </a:r>
-          </a:p>
-          <a:p>
-            <a:pPr marL="160020" indent="-160020">
-              <a:lnSpc>
-                <a:spcPct val="114000"/>
-              </a:lnSpc>
-              <a:spcAft>
-                <a:spcPts val="200"/>
-              </a:spcAft>
-            </a:pPr>
-            <a:r>
-              <a:rPr sz="1100" b="0">
+              <a:t>Ⅲ. 데이터 계획</a:t>
+            </a:r>
+          </a:p>
+          <a:p>
+            <a:pPr>
+              <a:lnSpc>
+                <a:spcPct val="114000"/>
+              </a:lnSpc>
+              <a:spcAft>
+                <a:spcPts val="400"/>
+              </a:spcAft>
+            </a:pPr>
+            <a:r>
+              <a:rPr sz="1050" b="0">
+                <a:solidFill>
+                  <a:srgbClr val="767A7F"/>
+                </a:solidFill>
+                <a:latin typeface="맑은 고딕"/>
+                <a:ea typeface="맑은 고딕"/>
+              </a:rPr>
+              <a:t>무엇을 어떻게 모으고 검증할 것인가</a:t>
+            </a:r>
+          </a:p>
+          <a:p>
+            <a:pPr>
+              <a:lnSpc>
+                <a:spcPct val="114000"/>
+              </a:lnSpc>
+              <a:spcAft>
+                <a:spcPts val="150"/>
+              </a:spcAft>
+            </a:pPr>
+            <a:r>
+              <a:rPr sz="1150" b="0">
                 <a:solidFill>
                   <a:srgbClr val="1C1C1E"/>
                 </a:solidFill>
                 <a:latin typeface="맑은 고딕"/>
                 <a:ea typeface="맑은 고딕"/>
               </a:rPr>
-              <a:t>• 분만취약지 = 소득·인구가 적은 지역이 아니라, 그 지역 가임기 여성이 ① 분만 가능 기관까지 60분 안에 닿기 어렵고(접근성) ② 실제 출산도 60분 안에 하지 못하는(이용률) 시·군</a:t>
-            </a:r>
-          </a:p>
-          <a:p>
-            <a:pPr marL="160020" indent="-160020">
-              <a:lnSpc>
-                <a:spcPct val="114000"/>
-              </a:lnSpc>
-              <a:spcAft>
-                <a:spcPts val="200"/>
-              </a:spcAft>
-            </a:pPr>
-            <a:r>
-              <a:rPr sz="1100" b="0">
+              <a:t>08   데이터 수집 계획</a:t>
+            </a:r>
+          </a:p>
+          <a:p>
+            <a:pPr>
+              <a:lnSpc>
+                <a:spcPct val="114000"/>
+              </a:lnSpc>
+              <a:spcAft>
+                <a:spcPts val="150"/>
+              </a:spcAft>
+            </a:pPr>
+            <a:r>
+              <a:rPr sz="1150" b="0">
                 <a:solidFill>
                   <a:srgbClr val="1C1C1E"/>
                 </a:solidFill>
                 <a:latin typeface="맑은 고딕"/>
                 <a:ea typeface="맑은 고딕"/>
               </a:rPr>
-              <a:t>• 즉 이 제도에서 "취약"은 처음부터 끝까지 거리와 시간으로 정의된다 — 이 점이 본 연구의 첫 번째 표적이 된다</a:t>
-            </a:r>
-          </a:p>
-          <a:p>
-            <a:pPr marL="160020" indent="-160020">
-              <a:lnSpc>
-                <a:spcPct val="114000"/>
-              </a:lnSpc>
-              <a:spcAft>
-                <a:spcPts val="200"/>
-              </a:spcAft>
-            </a:pPr>
-            <a:r>
-              <a:rPr sz="1100" b="0">
-                <a:solidFill>
-                  <a:srgbClr val="1C1C1E"/>
-                </a:solidFill>
-                <a:latin typeface="맑은 고딕"/>
-                <a:ea typeface="맑은 고딕"/>
-              </a:rPr>
-              <a:t>• 정부는 2년마다 전국을 재어 A·B·C 등급을 매기고, 지정 지역 병원에 분만실 설치비 약 10억 원 + 연 운영비 약 5억 원을 지원 (15년 누적 57개소)</a:t>
-            </a:r>
-          </a:p>
-        </p:txBody>
-      </p:sp>
-      <p:sp>
-        <p:nvSpPr>
-          <p:cNvPr id="17" name="TextBox 16"/>
+              <a:t>09   전처리·품질 관리 계획</a:t>
+            </a:r>
+          </a:p>
+        </p:txBody>
+      </p:sp>
+      <p:sp>
+        <p:nvSpPr>
+          <p:cNvPr id="13" name="Rounded Rectangle 12"/>
+          <p:cNvSpPr/>
+          <p:nvPr/>
+        </p:nvSpPr>
+        <p:spPr>
+          <a:xfrm>
+            <a:off x="6263640" y="1325880"/>
+            <a:ext cx="5532120" cy="1499616"/>
+          </a:xfrm>
+          <a:prstGeom prst="roundRect">
+            <a:avLst>
+              <a:gd name="adj" fmla="val 5487"/>
+            </a:avLst>
+          </a:prstGeom>
+          <a:solidFill>
+            <a:srgbClr val="FFFFFF"/>
+          </a:solidFill>
+          <a:ln w="12700">
+            <a:solidFill>
+              <a:srgbClr val="E4E6E9"/>
+            </a:solidFill>
+          </a:ln>
+          <a:effectLst>
+            <a:outerShdw blurRad="182880" dist="64008" dir="5400000" rotWithShape="0">
+              <a:srgbClr val="000000">
+                <a:alpha val="30000"/>
+              </a:srgbClr>
+            </a:outerShdw>
+          </a:effectLst>
+        </p:spPr>
+        <p:style>
+          <a:lnRef idx="1">
+            <a:schemeClr val="accent1"/>
+          </a:lnRef>
+          <a:fillRef idx="3">
+            <a:schemeClr val="accent1"/>
+          </a:fillRef>
+          <a:effectRef idx="2">
+            <a:schemeClr val="accent1"/>
+          </a:effectRef>
+          <a:fontRef idx="minor">
+            <a:schemeClr val="lt1"/>
+          </a:fontRef>
+        </p:style>
+        <p:txBody>
+          <a:bodyPr rtlCol="0" anchor="ctr"/>
+          <a:lstStyle/>
+          <a:p>
+            <a:pPr algn="ctr"/>
+          </a:p>
+        </p:txBody>
+      </p:sp>
+      <p:sp>
+        <p:nvSpPr>
+          <p:cNvPr id="14" name="TextBox 13"/>
           <p:cNvSpPr txBox="1"/>
           <p:nvPr/>
         </p:nvSpPr>
         <p:spPr>
           <a:xfrm>
-            <a:off x="502920" y="5230368"/>
-            <a:ext cx="11247120" cy="1005840"/>
+            <a:off x="6446520" y="1444752"/>
+            <a:ext cx="5166360" cy="1261872"/>
           </a:xfrm>
           <a:prstGeom prst="rect">
             <a:avLst/>
@@ -8565,18 +9411,58 @@
                 <a:spcPct val="114000"/>
               </a:lnSpc>
               <a:spcAft>
+                <a:spcPts val="300"/>
+              </a:spcAft>
+            </a:pPr>
+            <a:r>
+              <a:rPr sz="1350" b="1">
+                <a:solidFill>
+                  <a:srgbClr val="33393F"/>
+                </a:solidFill>
+                <a:latin typeface="맑은 고딕"/>
+                <a:ea typeface="맑은 고딕"/>
+              </a:rPr>
+              <a:t>Ⅳ. 분석 설계</a:t>
+            </a:r>
+          </a:p>
+          <a:p>
+            <a:pPr>
+              <a:lnSpc>
+                <a:spcPct val="114000"/>
+              </a:lnSpc>
+              <a:spcAft>
                 <a:spcPts val="400"/>
               </a:spcAft>
             </a:pPr>
             <a:r>
-              <a:rPr sz="1500" b="1">
+              <a:rPr sz="1050" b="0">
+                <a:solidFill>
+                  <a:srgbClr val="767A7F"/>
+                </a:solidFill>
+                <a:latin typeface="맑은 고딕"/>
+                <a:ea typeface="맑은 고딕"/>
+              </a:rPr>
+              <a:t>RQ별로 어떤 방법을 쓸 것인가</a:t>
+            </a:r>
+          </a:p>
+          <a:p>
+            <a:pPr>
+              <a:lnSpc>
+                <a:spcPct val="114000"/>
+              </a:lnSpc>
+              <a:spcAft>
+                <a:spcPts val="150"/>
+              </a:spcAft>
+            </a:pPr>
+            <a:r>
+              <a:rPr sz="1150" b="0">
                 <a:solidFill>
                   <a:srgbClr val="1C1C1E"/>
                 </a:solidFill>
                 <a:latin typeface="맑은 고딕"/>
                 <a:ea typeface="맑은 고딕"/>
               </a:rPr>
-              <a:t>자원 부족은 여전히 문제다. 다만 그것과 별개로, 있는 자원이 체계적으로 배분되지 않는 문제가 함께 있다.</a:t>
+              <a:t>10   ① 지정 감사 (RQ1·RQ2)</a:t>
             </a:r>
           </a:p>
           <a:p>
@@ -8585,18 +9471,238 @@
                 <a:spcPct val="114000"/>
               </a:lnSpc>
               <a:spcAft>
+                <a:spcPts val="150"/>
+              </a:spcAft>
+            </a:pPr>
+            <a:r>
+              <a:rPr sz="1150" b="0">
+                <a:solidFill>
+                  <a:srgbClr val="1C1C1E"/>
+                </a:solidFill>
+                <a:latin typeface="맑은 고딕"/>
+                <a:ea typeface="맑은 고딕"/>
+              </a:rPr>
+              <a:t>11   ② 배분 진단 (RQ3)</a:t>
+            </a:r>
+          </a:p>
+          <a:p>
+            <a:pPr>
+              <a:lnSpc>
+                <a:spcPct val="114000"/>
+              </a:lnSpc>
+              <a:spcAft>
+                <a:spcPts val="150"/>
+              </a:spcAft>
+            </a:pPr>
+            <a:r>
+              <a:rPr sz="1150" b="0">
+                <a:solidFill>
+                  <a:srgbClr val="1C1C1E"/>
+                </a:solidFill>
+                <a:latin typeface="맑은 고딕"/>
+                <a:ea typeface="맑은 고딕"/>
+              </a:rPr>
+              <a:t>12   ③ 처방 모형 (RQ4)</a:t>
+            </a:r>
+          </a:p>
+        </p:txBody>
+      </p:sp>
+      <p:sp>
+        <p:nvSpPr>
+          <p:cNvPr id="15" name="Rounded Rectangle 14"/>
+          <p:cNvSpPr/>
+          <p:nvPr/>
+        </p:nvSpPr>
+        <p:spPr>
+          <a:xfrm>
+            <a:off x="6263640" y="3026663"/>
+            <a:ext cx="5532120" cy="1225296"/>
+          </a:xfrm>
+          <a:prstGeom prst="roundRect">
+            <a:avLst>
+              <a:gd name="adj" fmla="val 6716"/>
+            </a:avLst>
+          </a:prstGeom>
+          <a:solidFill>
+            <a:srgbClr val="FFFFFF"/>
+          </a:solidFill>
+          <a:ln w="12700">
+            <a:solidFill>
+              <a:srgbClr val="E4E6E9"/>
+            </a:solidFill>
+          </a:ln>
+          <a:effectLst>
+            <a:outerShdw blurRad="182880" dist="64008" dir="5400000" rotWithShape="0">
+              <a:srgbClr val="000000">
+                <a:alpha val="30000"/>
+              </a:srgbClr>
+            </a:outerShdw>
+          </a:effectLst>
+        </p:spPr>
+        <p:style>
+          <a:lnRef idx="1">
+            <a:schemeClr val="accent1"/>
+          </a:lnRef>
+          <a:fillRef idx="3">
+            <a:schemeClr val="accent1"/>
+          </a:fillRef>
+          <a:effectRef idx="2">
+            <a:schemeClr val="accent1"/>
+          </a:effectRef>
+          <a:fontRef idx="minor">
+            <a:schemeClr val="lt1"/>
+          </a:fontRef>
+        </p:style>
+        <p:txBody>
+          <a:bodyPr rtlCol="0" anchor="ctr"/>
+          <a:lstStyle/>
+          <a:p>
+            <a:pPr algn="ctr"/>
+          </a:p>
+        </p:txBody>
+      </p:sp>
+      <p:sp>
+        <p:nvSpPr>
+          <p:cNvPr id="16" name="TextBox 15"/>
+          <p:cNvSpPr txBox="1"/>
+          <p:nvPr/>
+        </p:nvSpPr>
+        <p:spPr>
+          <a:xfrm>
+            <a:off x="6446520" y="3145535"/>
+            <a:ext cx="5166360" cy="987552"/>
+          </a:xfrm>
+          <a:prstGeom prst="rect">
+            <a:avLst/>
+          </a:prstGeom>
+          <a:noFill/>
+        </p:spPr>
+        <p:txBody>
+          <a:bodyPr wrap="square" anchor="t">
+            <a:spAutoFit/>
+          </a:bodyPr>
+          <a:lstStyle/>
+          <a:p>
+            <a:pPr>
+              <a:lnSpc>
+                <a:spcPct val="114000"/>
+              </a:lnSpc>
+              <a:spcAft>
+                <a:spcPts val="300"/>
+              </a:spcAft>
+            </a:pPr>
+            <a:r>
+              <a:rPr sz="1350" b="1">
+                <a:solidFill>
+                  <a:srgbClr val="33393F"/>
+                </a:solidFill>
+                <a:latin typeface="맑은 고딕"/>
+                <a:ea typeface="맑은 고딕"/>
+              </a:rPr>
+              <a:t>Ⅴ. 산출물과 일정</a:t>
+            </a:r>
+          </a:p>
+          <a:p>
+            <a:pPr>
+              <a:lnSpc>
+                <a:spcPct val="114000"/>
+              </a:lnSpc>
+              <a:spcAft>
+                <a:spcPts val="400"/>
+              </a:spcAft>
+            </a:pPr>
+            <a:r>
+              <a:rPr sz="1050" b="0">
+                <a:solidFill>
+                  <a:srgbClr val="767A7F"/>
+                </a:solidFill>
+                <a:latin typeface="맑은 고딕"/>
+                <a:ea typeface="맑은 고딕"/>
+              </a:rPr>
+              <a:t>무엇을 내놓고, 언제 할 것인가</a:t>
+            </a:r>
+          </a:p>
+          <a:p>
+            <a:pPr>
+              <a:lnSpc>
+                <a:spcPct val="114000"/>
+              </a:lnSpc>
+              <a:spcAft>
+                <a:spcPts val="150"/>
+              </a:spcAft>
+            </a:pPr>
+            <a:r>
+              <a:rPr sz="1150" b="0">
+                <a:solidFill>
+                  <a:srgbClr val="1C1C1E"/>
+                </a:solidFill>
+                <a:latin typeface="맑은 고딕"/>
+                <a:ea typeface="맑은 고딕"/>
+              </a:rPr>
+              <a:t>13   기대 산출물과 활용 계획</a:t>
+            </a:r>
+          </a:p>
+          <a:p>
+            <a:pPr>
+              <a:lnSpc>
+                <a:spcPct val="114000"/>
+              </a:lnSpc>
+              <a:spcAft>
+                <a:spcPts val="150"/>
+              </a:spcAft>
+            </a:pPr>
+            <a:r>
+              <a:rPr sz="1150" b="0">
+                <a:solidFill>
+                  <a:srgbClr val="1C1C1E"/>
+                </a:solidFill>
+                <a:latin typeface="맑은 고딕"/>
+                <a:ea typeface="맑은 고딕"/>
+              </a:rPr>
+              <a:t>14   추진 일정과 역할 분담</a:t>
+            </a:r>
+          </a:p>
+        </p:txBody>
+      </p:sp>
+      <p:sp>
+        <p:nvSpPr>
+          <p:cNvPr id="17" name="TextBox 16"/>
+          <p:cNvSpPr txBox="1"/>
+          <p:nvPr/>
+        </p:nvSpPr>
+        <p:spPr>
+          <a:xfrm>
+            <a:off x="502920" y="6053328"/>
+            <a:ext cx="11247120" cy="384048"/>
+          </a:xfrm>
+          <a:prstGeom prst="rect">
+            <a:avLst/>
+          </a:prstGeom>
+          <a:noFill/>
+        </p:spPr>
+        <p:txBody>
+          <a:bodyPr wrap="square" anchor="t">
+            <a:spAutoFit/>
+          </a:bodyPr>
+          <a:lstStyle/>
+          <a:p>
+            <a:pPr>
+              <a:lnSpc>
+                <a:spcPct val="114000"/>
+              </a:lnSpc>
+              <a:spcAft>
                 <a:spcPts val="0"/>
               </a:spcAft>
             </a:pPr>
             <a:r>
-              <a:rPr sz="1500" b="1">
-                <a:solidFill>
-                  <a:srgbClr val="000000"/>
-                </a:solidFill>
-                <a:latin typeface="맑은 고딕"/>
-                <a:ea typeface="맑은 고딕"/>
-              </a:rPr>
-              <a:t>"지금 있는 것은 체계적으로, 필요한 곳으로 배분되고 있는가" — 이를 데이터로 검증하는 것이 본 계획이다.</a:t>
+              <a:rPr sz="1150" b="1">
+                <a:solidFill>
+                  <a:srgbClr val="1C1C1E"/>
+                </a:solidFill>
+                <a:latin typeface="맑은 고딕"/>
+                <a:ea typeface="맑은 고딕"/>
+              </a:rPr>
+              <a:t>본 계획서는 "왜·어떻게 할 것인가"를 다룬다. 실제 발견과 결과는 결과보고서에서 보고한다.</a:t>
             </a:r>
           </a:p>
         </p:txBody>
@@ -8761,7 +9867,7 @@
                 <a:latin typeface="맑은 고딕"/>
                 <a:ea typeface="맑은 고딕"/>
               </a:rPr>
-              <a:t>문제 인식 — 제도는 세 단계로 자원을 흘려보낸다</a:t>
+              <a:t>아이디어의 발단 — 자원 부족은 실재한다. 그런데 원인이 그것뿐인가</a:t>
             </a:r>
           </a:p>
         </p:txBody>
@@ -8899,7 +10005,7 @@
                 <a:latin typeface="맑은 고딕"/>
                 <a:ea typeface="맑은 고딕"/>
               </a:rPr>
-              <a:t>한 단계라도 막히거나 새면, 앞 단계가 아무리 정확해도 자원은 엉뚱한 곳으로 간다</a:t>
+              <a:t>부족(㉠)과 배분(㉡)은 다른 문제이고 해법도 다르다 — 본 계획은 ㉡을 맡는다</a:t>
             </a:r>
           </a:p>
         </p:txBody>
@@ -8956,11 +10062,11 @@
         <p:spPr>
           <a:xfrm>
             <a:off x="502920" y="1371600"/>
-            <a:ext cx="3291840" cy="1298448"/>
+            <a:ext cx="3611880" cy="1783080"/>
           </a:xfrm>
           <a:prstGeom prst="roundRect">
             <a:avLst>
-              <a:gd name="adj" fmla="val 6338"/>
+              <a:gd name="adj" fmla="val 4615"/>
             </a:avLst>
           </a:prstGeom>
           <a:solidFill>
@@ -9009,8 +10115,8 @@
         </p:nvSpPr>
         <p:spPr>
           <a:xfrm>
-            <a:off x="667512" y="1444752"/>
-            <a:ext cx="3017520" cy="1152144"/>
+            <a:off x="685800" y="1499616"/>
+            <a:ext cx="3246120" cy="1527048"/>
           </a:xfrm>
           <a:prstGeom prst="rect">
             <a:avLst/>
@@ -9028,139 +10134,56 @@
                 <a:spcPct val="114000"/>
               </a:lnSpc>
               <a:spcAft>
-                <a:spcPts val="300"/>
-              </a:spcAft>
-            </a:pPr>
-            <a:r>
-              <a:rPr sz="1500" b="1">
+                <a:spcPts val="350"/>
+              </a:spcAft>
+            </a:pPr>
+            <a:r>
+              <a:rPr sz="1300" b="1">
                 <a:solidFill>
                   <a:srgbClr val="33393F"/>
                 </a:solidFill>
                 <a:latin typeface="맑은 고딕"/>
                 <a:ea typeface="맑은 고딕"/>
               </a:rPr>
-              <a:t>① 측정</a:t>
-            </a:r>
-          </a:p>
-          <a:p>
-            <a:pPr>
-              <a:lnSpc>
-                <a:spcPct val="114000"/>
-              </a:lnSpc>
-              <a:spcAft>
-                <a:spcPts val="0"/>
-              </a:spcAft>
-            </a:pPr>
-            <a:r>
-              <a:rPr sz="1050" b="0">
+              <a:t>① 여전히 존재하는 분만취약지</a:t>
+            </a:r>
+          </a:p>
+          <a:p>
+            <a:pPr marL="160020" indent="-160020">
+              <a:lnSpc>
+                <a:spcPct val="114000"/>
+              </a:lnSpc>
+              <a:spcAft>
+                <a:spcPts val="200"/>
+              </a:spcAft>
+            </a:pPr>
+            <a:r>
+              <a:rPr sz="1100" b="0">
                 <a:solidFill>
                   <a:srgbClr val="1C1C1E"/>
                 </a:solidFill>
                 <a:latin typeface="맑은 고딕"/>
                 <a:ea typeface="맑은 고딕"/>
               </a:rPr>
-              <a:t>2년마다 전국 시·군·구의</a:t>
-            </a:r>
-          </a:p>
-          <a:p>
-            <a:pPr>
-              <a:lnSpc>
-                <a:spcPct val="114000"/>
-              </a:lnSpc>
-              <a:spcAft>
-                <a:spcPts val="0"/>
-              </a:spcAft>
-            </a:pPr>
-            <a:r>
-              <a:rPr sz="1050" b="0">
-                <a:solidFill>
-                  <a:srgbClr val="1C1C1E"/>
-                </a:solidFill>
-                <a:latin typeface="맑은 고딕"/>
-                <a:ea typeface="맑은 고딕"/>
-              </a:rPr>
-              <a:t>분만실 60분 접근성과</a:t>
-            </a:r>
-          </a:p>
-          <a:p>
-            <a:pPr>
-              <a:lnSpc>
-                <a:spcPct val="114000"/>
-              </a:lnSpc>
-              <a:spcAft>
-                <a:spcPts val="0"/>
-              </a:spcAft>
-            </a:pPr>
-            <a:r>
-              <a:rPr sz="1050" b="0">
-                <a:solidFill>
-                  <a:srgbClr val="1C1C1E"/>
-                </a:solidFill>
-                <a:latin typeface="맑은 고딕"/>
-                <a:ea typeface="맑은 고딕"/>
-              </a:rPr>
-              <a:t>실제 분만 이동시간을 산출</a:t>
-            </a:r>
-          </a:p>
-        </p:txBody>
-      </p:sp>
-      <p:sp>
-        <p:nvSpPr>
-          <p:cNvPr id="11" name="TextBox 10"/>
-          <p:cNvSpPr txBox="1"/>
-          <p:nvPr/>
-        </p:nvSpPr>
-        <p:spPr>
-          <a:xfrm>
-            <a:off x="3813048" y="1783080"/>
-            <a:ext cx="685800" cy="548640"/>
-          </a:xfrm>
-          <a:prstGeom prst="rect">
-            <a:avLst/>
-          </a:prstGeom>
-          <a:noFill/>
-        </p:spPr>
-        <p:txBody>
-          <a:bodyPr wrap="square" anchor="t">
-            <a:spAutoFit/>
-          </a:bodyPr>
-          <a:lstStyle/>
-          <a:p>
-            <a:pPr>
-              <a:lnSpc>
-                <a:spcPct val="114000"/>
-              </a:lnSpc>
-              <a:spcAft>
-                <a:spcPts val="0"/>
-              </a:spcAft>
-            </a:pPr>
-            <a:r>
-              <a:rPr sz="2200" b="1">
-                <a:solidFill>
-                  <a:srgbClr val="767A7F"/>
-                </a:solidFill>
-                <a:latin typeface="맑은 고딕"/>
-                <a:ea typeface="맑은 고딕"/>
-              </a:rPr>
-              <a:t>→</a:t>
-            </a:r>
-          </a:p>
-        </p:txBody>
-      </p:sp>
-      <p:sp>
-        <p:nvSpPr>
-          <p:cNvPr id="12" name="Rounded Rectangle 11"/>
+              <a:t>• "지방에 분만실이 없다" — 해마다 반복되는 기사. 처방도 늘 같다: 의사를 늘리고 병원을 지어라. 그리고 이 처방은 옳다 — 절대량이 모자란 것은 사실이다</a:t>
+            </a:r>
+          </a:p>
+        </p:txBody>
+      </p:sp>
+      <p:sp>
+        <p:nvSpPr>
+          <p:cNvPr id="11" name="Rounded Rectangle 10"/>
           <p:cNvSpPr/>
           <p:nvPr/>
         </p:nvSpPr>
         <p:spPr>
           <a:xfrm>
-            <a:off x="4480559" y="1371600"/>
-            <a:ext cx="3291840" cy="1298448"/>
+            <a:off x="4343400" y="1371600"/>
+            <a:ext cx="3611880" cy="1783080"/>
           </a:xfrm>
           <a:prstGeom prst="roundRect">
             <a:avLst>
-              <a:gd name="adj" fmla="val 6338"/>
+              <a:gd name="adj" fmla="val 4615"/>
             </a:avLst>
           </a:prstGeom>
           <a:solidFill>
@@ -9203,14 +10226,14 @@
       </p:sp>
       <p:sp>
         <p:nvSpPr>
-          <p:cNvPr id="13" name="TextBox 12"/>
+          <p:cNvPr id="12" name="TextBox 11"/>
           <p:cNvSpPr txBox="1"/>
           <p:nvPr/>
         </p:nvSpPr>
         <p:spPr>
           <a:xfrm>
-            <a:off x="4645151" y="1444752"/>
-            <a:ext cx="3017520" cy="1152144"/>
+            <a:off x="4526280" y="1499616"/>
+            <a:ext cx="3246120" cy="1527048"/>
           </a:xfrm>
           <a:prstGeom prst="rect">
             <a:avLst/>
@@ -9228,79 +10251,93 @@
                 <a:spcPct val="114000"/>
               </a:lnSpc>
               <a:spcAft>
-                <a:spcPts val="300"/>
-              </a:spcAft>
-            </a:pPr>
-            <a:r>
-              <a:rPr sz="1500" b="1">
+                <a:spcPts val="350"/>
+              </a:spcAft>
+            </a:pPr>
+            <a:r>
+              <a:rPr sz="1300" b="1">
                 <a:solidFill>
                   <a:srgbClr val="33393F"/>
                 </a:solidFill>
                 <a:latin typeface="맑은 고딕"/>
                 <a:ea typeface="맑은 고딕"/>
               </a:rPr>
-              <a:t>② 지정</a:t>
-            </a:r>
-          </a:p>
-          <a:p>
-            <a:pPr>
-              <a:lnSpc>
-                <a:spcPct val="114000"/>
-              </a:lnSpc>
-              <a:spcAft>
-                <a:spcPts val="0"/>
-              </a:spcAft>
-            </a:pPr>
-            <a:r>
-              <a:rPr sz="1050" b="0">
+              <a:t>② 그런데 원인이 그것뿐인가</a:t>
+            </a:r>
+          </a:p>
+          <a:p>
+            <a:pPr marL="160020" indent="-160020">
+              <a:lnSpc>
+                <a:spcPct val="114000"/>
+              </a:lnSpc>
+              <a:spcAft>
+                <a:spcPts val="200"/>
+              </a:spcAft>
+            </a:pPr>
+            <a:r>
+              <a:rPr sz="1100" b="0">
                 <a:solidFill>
                   <a:srgbClr val="1C1C1E"/>
                 </a:solidFill>
                 <a:latin typeface="맑은 고딕"/>
                 <a:ea typeface="맑은 고딕"/>
               </a:rPr>
-              <a:t>그 값을 임계값(30/30)과 대조해</a:t>
-            </a:r>
-          </a:p>
-          <a:p>
-            <a:pPr>
-              <a:lnSpc>
-                <a:spcPct val="114000"/>
-              </a:lnSpc>
-              <a:spcAft>
-                <a:spcPts val="0"/>
-              </a:spcAft>
-            </a:pPr>
-            <a:r>
-              <a:rPr sz="1050" b="0">
-                <a:solidFill>
-                  <a:srgbClr val="1C1C1E"/>
-                </a:solidFill>
-                <a:latin typeface="맑은 고딕"/>
-                <a:ea typeface="맑은 고딕"/>
-              </a:rPr>
-              <a:t>분만취약지를 판정하고</a:t>
-            </a:r>
-          </a:p>
-          <a:p>
-            <a:pPr>
-              <a:lnSpc>
-                <a:spcPct val="114000"/>
-              </a:lnSpc>
-              <a:spcAft>
-                <a:spcPts val="0"/>
-              </a:spcAft>
-            </a:pPr>
-            <a:r>
-              <a:rPr sz="1050" b="0">
-                <a:solidFill>
-                  <a:srgbClr val="1C1C1E"/>
-                </a:solidFill>
-                <a:latin typeface="맑은 고딕"/>
-                <a:ea typeface="맑은 고딕"/>
-              </a:rPr>
-              <a:t>A·B·C 등급 부여</a:t>
-            </a:r>
+              <a:t>• 자원이 모자란 것(㉠)과, 있는 자원이 체계적으로 배분되지 않는 것(㉡)은 다른 문제다. 그리고 둘은 동시에 성립할 수 있다</a:t>
+            </a:r>
+          </a:p>
+        </p:txBody>
+      </p:sp>
+      <p:sp>
+        <p:nvSpPr>
+          <p:cNvPr id="13" name="Rounded Rectangle 12"/>
+          <p:cNvSpPr/>
+          <p:nvPr/>
+        </p:nvSpPr>
+        <p:spPr>
+          <a:xfrm>
+            <a:off x="8183880" y="1371600"/>
+            <a:ext cx="3611880" cy="1783080"/>
+          </a:xfrm>
+          <a:prstGeom prst="roundRect">
+            <a:avLst>
+              <a:gd name="adj" fmla="val 4615"/>
+            </a:avLst>
+          </a:prstGeom>
+          <a:solidFill>
+            <a:srgbClr val="F1F2F3"/>
+          </a:solidFill>
+          <a:ln w="15875">
+            <a:solidFill>
+              <a:srgbClr val="9AA0A6"/>
+            </a:solidFill>
+          </a:ln>
+          <a:effectLst>
+            <a:outerShdw blurRad="182880" dist="64008" dir="5400000" rotWithShape="0">
+              <a:srgbClr val="000000">
+                <a:alpha val="32000"/>
+              </a:srgbClr>
+            </a:outerShdw>
+          </a:effectLst>
+        </p:spPr>
+        <p:style>
+          <a:lnRef idx="1">
+            <a:schemeClr val="accent1"/>
+          </a:lnRef>
+          <a:fillRef idx="3">
+            <a:schemeClr val="accent1"/>
+          </a:fillRef>
+          <a:effectRef idx="2">
+            <a:schemeClr val="accent1"/>
+          </a:effectRef>
+          <a:fontRef idx="minor">
+            <a:schemeClr val="lt1"/>
+          </a:fontRef>
+        </p:style>
+        <p:txBody>
+          <a:bodyPr rtlCol="0" anchor="ctr"/>
+          <a:lstStyle/>
+          <a:p>
+            <a:pPr algn="ctr"/>
           </a:p>
         </p:txBody>
       </p:sp>
@@ -9312,8 +10349,8 @@
         </p:nvSpPr>
         <p:spPr>
           <a:xfrm>
-            <a:off x="7790688" y="1783080"/>
-            <a:ext cx="685800" cy="548640"/>
+            <a:off x="8366760" y="1499616"/>
+            <a:ext cx="3246120" cy="1527048"/>
           </a:xfrm>
           <a:prstGeom prst="rect">
             <a:avLst/>
@@ -9331,18 +10368,38 @@
                 <a:spcPct val="114000"/>
               </a:lnSpc>
               <a:spcAft>
-                <a:spcPts val="0"/>
-              </a:spcAft>
-            </a:pPr>
-            <a:r>
-              <a:rPr sz="2200" b="1">
-                <a:solidFill>
-                  <a:srgbClr val="767A7F"/>
-                </a:solidFill>
-                <a:latin typeface="맑은 고딕"/>
-                <a:ea typeface="맑은 고딕"/>
-              </a:rPr>
-              <a:t>→</a:t>
+                <a:spcPts val="350"/>
+              </a:spcAft>
+            </a:pPr>
+            <a:r>
+              <a:rPr sz="1300" b="1">
+                <a:solidFill>
+                  <a:srgbClr val="000000"/>
+                </a:solidFill>
+                <a:latin typeface="맑은 고딕"/>
+                <a:ea typeface="맑은 고딕"/>
+              </a:rPr>
+              <a:t>③ 해결할 수 있는 문제</a:t>
+            </a:r>
+          </a:p>
+          <a:p>
+            <a:pPr marL="160020" indent="-160020">
+              <a:lnSpc>
+                <a:spcPct val="114000"/>
+              </a:lnSpc>
+              <a:spcAft>
+                <a:spcPts val="200"/>
+              </a:spcAft>
+            </a:pPr>
+            <a:r>
+              <a:rPr sz="1100" b="0">
+                <a:solidFill>
+                  <a:srgbClr val="1C1C1E"/>
+                </a:solidFill>
+                <a:latin typeface="맑은 고딕"/>
+                <a:ea typeface="맑은 고딕"/>
+              </a:rPr>
+              <a:t>• ㉠은 예산·인력의 영역이라 데이터가 답할 수 없다. ㉡은 배분 규칙의 문제이므로 데이터로 답할 수 있다 — 그리고 ㉡은 아직 검증된 적이 없다</a:t>
             </a:r>
           </a:p>
         </p:txBody>
@@ -9355,12 +10412,12 @@
         </p:nvSpPr>
         <p:spPr>
           <a:xfrm>
-            <a:off x="8458200" y="1371600"/>
-            <a:ext cx="3291840" cy="1298448"/>
+            <a:off x="502920" y="3401568"/>
+            <a:ext cx="11292840" cy="1572768"/>
           </a:xfrm>
           <a:prstGeom prst="roundRect">
             <a:avLst>
-              <a:gd name="adj" fmla="val 6338"/>
+              <a:gd name="adj" fmla="val 5232"/>
             </a:avLst>
           </a:prstGeom>
           <a:solidFill>
@@ -9409,8 +10466,8 @@
         </p:nvSpPr>
         <p:spPr>
           <a:xfrm>
-            <a:off x="8622792" y="1444752"/>
-            <a:ext cx="3017520" cy="1152144"/>
+            <a:off x="685800" y="3529584"/>
+            <a:ext cx="10927080" cy="1316736"/>
           </a:xfrm>
           <a:prstGeom prst="rect">
             <a:avLst/>
@@ -9428,146 +10485,92 @@
                 <a:spcPct val="114000"/>
               </a:lnSpc>
               <a:spcAft>
-                <a:spcPts val="300"/>
-              </a:spcAft>
-            </a:pPr>
-            <a:r>
-              <a:rPr sz="1500" b="1">
+                <a:spcPts val="350"/>
+              </a:spcAft>
+            </a:pPr>
+            <a:r>
+              <a:rPr sz="1300" b="1">
                 <a:solidFill>
                   <a:srgbClr val="33393F"/>
                 </a:solidFill>
                 <a:latin typeface="맑은 고딕"/>
                 <a:ea typeface="맑은 고딕"/>
               </a:rPr>
-              <a:t>③ 배분</a:t>
-            </a:r>
-          </a:p>
-          <a:p>
-            <a:pPr>
-              <a:lnSpc>
-                <a:spcPct val="114000"/>
-              </a:lnSpc>
-              <a:spcAft>
-                <a:spcPts val="0"/>
-              </a:spcAft>
-            </a:pPr>
-            <a:r>
-              <a:rPr sz="1050" b="0">
+              <a:t>그리고 자원을 공백 지역으로 보내는 제도는 이미 있다 — 「분만취약지 지원사업」(15년째)</a:t>
+            </a:r>
+          </a:p>
+          <a:p>
+            <a:pPr marL="160020" indent="-160020">
+              <a:lnSpc>
+                <a:spcPct val="114000"/>
+              </a:lnSpc>
+              <a:spcAft>
+                <a:spcPts val="200"/>
+              </a:spcAft>
+            </a:pPr>
+            <a:r>
+              <a:rPr sz="1100" b="0">
                 <a:solidFill>
                   <a:srgbClr val="1C1C1E"/>
                 </a:solidFill>
                 <a:latin typeface="맑은 고딕"/>
                 <a:ea typeface="맑은 고딕"/>
               </a:rPr>
-              <a:t>지정 지역의 병원 한 곳을 골라</a:t>
-            </a:r>
-          </a:p>
-          <a:p>
-            <a:pPr>
-              <a:lnSpc>
-                <a:spcPct val="114000"/>
-              </a:lnSpc>
-              <a:spcAft>
-                <a:spcPts val="0"/>
-              </a:spcAft>
-            </a:pPr>
-            <a:r>
-              <a:rPr sz="1050" b="0">
+              <a:t>• 분만취약지 = 소득·인구가 적은 지역이 아니라, 그 지역 가임기 여성이 ① 분만 가능 기관까지 60분 안에 닿기 어렵고(접근성) ② 실제 출산도 60분 안에 하지 못하는(이용률) 시·군</a:t>
+            </a:r>
+          </a:p>
+          <a:p>
+            <a:pPr marL="160020" indent="-160020">
+              <a:lnSpc>
+                <a:spcPct val="114000"/>
+              </a:lnSpc>
+              <a:spcAft>
+                <a:spcPts val="200"/>
+              </a:spcAft>
+            </a:pPr>
+            <a:r>
+              <a:rPr sz="1100" b="0">
                 <a:solidFill>
                   <a:srgbClr val="1C1C1E"/>
                 </a:solidFill>
                 <a:latin typeface="맑은 고딕"/>
                 <a:ea typeface="맑은 고딕"/>
               </a:rPr>
-              <a:t>분만실 설치비·운영비 지급</a:t>
-            </a:r>
-          </a:p>
-          <a:p>
-            <a:pPr>
-              <a:lnSpc>
-                <a:spcPct val="114000"/>
-              </a:lnSpc>
-              <a:spcAft>
-                <a:spcPts val="0"/>
-              </a:spcAft>
-            </a:pPr>
-            <a:r>
-              <a:rPr sz="1050" b="0">
+              <a:t>• 즉 이 제도에서 "취약"은 처음부터 끝까지 거리와 시간으로 정의된다 — 이 점이 본 연구의 첫 번째 표적이 된다</a:t>
+            </a:r>
+          </a:p>
+          <a:p>
+            <a:pPr marL="160020" indent="-160020">
+              <a:lnSpc>
+                <a:spcPct val="114000"/>
+              </a:lnSpc>
+              <a:spcAft>
+                <a:spcPts val="200"/>
+              </a:spcAft>
+            </a:pPr>
+            <a:r>
+              <a:rPr sz="1100" b="0">
                 <a:solidFill>
                   <a:srgbClr val="1C1C1E"/>
                 </a:solidFill>
                 <a:latin typeface="맑은 고딕"/>
                 <a:ea typeface="맑은 고딕"/>
               </a:rPr>
-              <a:t>(설치 약 10억 + 연 5억)</a:t>
-            </a:r>
-          </a:p>
-        </p:txBody>
-      </p:sp>
-      <p:sp>
-        <p:nvSpPr>
-          <p:cNvPr id="17" name="Rounded Rectangle 16"/>
-          <p:cNvSpPr/>
-          <p:nvPr/>
-        </p:nvSpPr>
-        <p:spPr>
-          <a:xfrm>
-            <a:off x="502920" y="2926080"/>
-            <a:ext cx="5532120" cy="1783080"/>
-          </a:xfrm>
-          <a:prstGeom prst="roundRect">
-            <a:avLst>
-              <a:gd name="adj" fmla="val 4615"/>
-            </a:avLst>
-          </a:prstGeom>
-          <a:solidFill>
-            <a:srgbClr val="F1F2F3"/>
-          </a:solidFill>
-          <a:ln w="15875">
-            <a:solidFill>
-              <a:srgbClr val="9AA0A6"/>
-            </a:solidFill>
-          </a:ln>
-          <a:effectLst>
-            <a:outerShdw blurRad="182880" dist="64008" dir="5400000" rotWithShape="0">
-              <a:srgbClr val="000000">
-                <a:alpha val="32000"/>
-              </a:srgbClr>
-            </a:outerShdw>
-          </a:effectLst>
-        </p:spPr>
-        <p:style>
-          <a:lnRef idx="1">
-            <a:schemeClr val="accent1"/>
-          </a:lnRef>
-          <a:fillRef idx="3">
-            <a:schemeClr val="accent1"/>
-          </a:fillRef>
-          <a:effectRef idx="2">
-            <a:schemeClr val="accent1"/>
-          </a:effectRef>
-          <a:fontRef idx="minor">
-            <a:schemeClr val="lt1"/>
-          </a:fontRef>
-        </p:style>
-        <p:txBody>
-          <a:bodyPr rtlCol="0" anchor="ctr"/>
-          <a:lstStyle/>
-          <a:p>
-            <a:pPr algn="ctr"/>
-          </a:p>
-        </p:txBody>
-      </p:sp>
-      <p:sp>
-        <p:nvSpPr>
-          <p:cNvPr id="18" name="TextBox 17"/>
+              <a:t>• 정부는 2년마다 전국을 재어 A·B·C 등급을 매기고, 지정 지역 병원에 분만실 설치비 약 10억 원 + 연 운영비 약 5억 원을 지원 (15년 누적 57개소)</a:t>
+            </a:r>
+          </a:p>
+        </p:txBody>
+      </p:sp>
+      <p:sp>
+        <p:nvSpPr>
+          <p:cNvPr id="17" name="TextBox 16"/>
           <p:cNvSpPr txBox="1"/>
           <p:nvPr/>
         </p:nvSpPr>
         <p:spPr>
           <a:xfrm>
-            <a:off x="685800" y="3054096"/>
-            <a:ext cx="5166359" cy="1527048"/>
+            <a:off x="502920" y="5230368"/>
+            <a:ext cx="11247120" cy="1005840"/>
           </a:xfrm>
           <a:prstGeom prst="rect">
             <a:avLst/>
@@ -9585,392 +10588,38 @@
                 <a:spcPct val="114000"/>
               </a:lnSpc>
               <a:spcAft>
-                <a:spcPts val="350"/>
-              </a:spcAft>
-            </a:pPr>
-            <a:r>
-              <a:rPr sz="1300" b="1">
+                <a:spcPts val="400"/>
+              </a:spcAft>
+            </a:pPr>
+            <a:r>
+              <a:rPr sz="1500" b="1">
+                <a:solidFill>
+                  <a:srgbClr val="1C1C1E"/>
+                </a:solidFill>
+                <a:latin typeface="맑은 고딕"/>
+                <a:ea typeface="맑은 고딕"/>
+              </a:rPr>
+              <a:t>자원 부족은 여전히 문제다. 다만 그것과 별개로, 있는 자원이 체계적으로 배분되지 않는 문제가 함께 있다.</a:t>
+            </a:r>
+          </a:p>
+          <a:p>
+            <a:pPr>
+              <a:lnSpc>
+                <a:spcPct val="114000"/>
+              </a:lnSpc>
+              <a:spcAft>
+                <a:spcPts val="0"/>
+              </a:spcAft>
+            </a:pPr>
+            <a:r>
+              <a:rPr sz="1500" b="1">
                 <a:solidFill>
                   <a:srgbClr val="000000"/>
                 </a:solidFill>
                 <a:latin typeface="맑은 고딕"/>
                 <a:ea typeface="맑은 고딕"/>
               </a:rPr>
-              <a:t>의심 1 — 지정 단계</a:t>
-            </a:r>
-          </a:p>
-          <a:p>
-            <a:pPr marL="160020" indent="-160020">
-              <a:lnSpc>
-                <a:spcPct val="114000"/>
-              </a:lnSpc>
-              <a:spcAft>
-                <a:spcPts val="200"/>
-              </a:spcAft>
-            </a:pPr>
-            <a:r>
-              <a:rPr sz="1150" b="0">
-                <a:solidFill>
-                  <a:srgbClr val="1C1C1E"/>
-                </a:solidFill>
-                <a:latin typeface="맑은 고딕"/>
-                <a:ea typeface="맑은 고딕"/>
-              </a:rPr>
-              <a:t>• 판정 기준은 이동시간 파생 지표뿐이다</a:t>
-            </a:r>
-          </a:p>
-          <a:p>
-            <a:pPr marL="160020" indent="-160020">
-              <a:lnSpc>
-                <a:spcPct val="114000"/>
-              </a:lnSpc>
-              <a:spcAft>
-                <a:spcPts val="200"/>
-              </a:spcAft>
-            </a:pPr>
-            <a:r>
-              <a:rPr sz="1150" b="0">
-                <a:solidFill>
-                  <a:srgbClr val="1C1C1E"/>
-                </a:solidFill>
-                <a:latin typeface="맑은 고딕"/>
-                <a:ea typeface="맑은 고딕"/>
-              </a:rPr>
-              <a:t>• 관내 분만 인프라가 소멸해도 "옆 도시로 60분 안에 갈 수 있으면" 취약지가 아니게 되는 구조 아닌가?</a:t>
-            </a:r>
-          </a:p>
-          <a:p>
-            <a:pPr>
-              <a:lnSpc>
-                <a:spcPct val="114000"/>
-              </a:lnSpc>
-              <a:spcAft>
-                <a:spcPts val="200"/>
-              </a:spcAft>
-            </a:pPr>
-            <a:r>
-              <a:rPr sz="1150" b="0">
-                <a:solidFill>
-                  <a:srgbClr val="1C1C1E"/>
-                </a:solidFill>
-                <a:latin typeface="맑은 고딕"/>
-                <a:ea typeface="맑은 고딕"/>
-              </a:rPr>
-              <a:t>→ 기준이 구조적으로 놓치는 지역이 있는지 검증한다</a:t>
-            </a:r>
-          </a:p>
-        </p:txBody>
-      </p:sp>
-      <p:sp>
-        <p:nvSpPr>
-          <p:cNvPr id="19" name="Rounded Rectangle 18"/>
-          <p:cNvSpPr/>
-          <p:nvPr/>
-        </p:nvSpPr>
-        <p:spPr>
-          <a:xfrm>
-            <a:off x="6263640" y="2926080"/>
-            <a:ext cx="5532120" cy="1783080"/>
-          </a:xfrm>
-          <a:prstGeom prst="roundRect">
-            <a:avLst>
-              <a:gd name="adj" fmla="val 4615"/>
-            </a:avLst>
-          </a:prstGeom>
-          <a:solidFill>
-            <a:srgbClr val="F1F2F3"/>
-          </a:solidFill>
-          <a:ln w="15875">
-            <a:solidFill>
-              <a:srgbClr val="9AA0A6"/>
-            </a:solidFill>
-          </a:ln>
-          <a:effectLst>
-            <a:outerShdw blurRad="182880" dist="64008" dir="5400000" rotWithShape="0">
-              <a:srgbClr val="000000">
-                <a:alpha val="32000"/>
-              </a:srgbClr>
-            </a:outerShdw>
-          </a:effectLst>
-        </p:spPr>
-        <p:style>
-          <a:lnRef idx="1">
-            <a:schemeClr val="accent1"/>
-          </a:lnRef>
-          <a:fillRef idx="3">
-            <a:schemeClr val="accent1"/>
-          </a:fillRef>
-          <a:effectRef idx="2">
-            <a:schemeClr val="accent1"/>
-          </a:effectRef>
-          <a:fontRef idx="minor">
-            <a:schemeClr val="lt1"/>
-          </a:fontRef>
-        </p:style>
-        <p:txBody>
-          <a:bodyPr rtlCol="0" anchor="ctr"/>
-          <a:lstStyle/>
-          <a:p>
-            <a:pPr algn="ctr"/>
-          </a:p>
-        </p:txBody>
-      </p:sp>
-      <p:sp>
-        <p:nvSpPr>
-          <p:cNvPr id="20" name="TextBox 19"/>
-          <p:cNvSpPr txBox="1"/>
-          <p:nvPr/>
-        </p:nvSpPr>
-        <p:spPr>
-          <a:xfrm>
-            <a:off x="6446520" y="3054096"/>
-            <a:ext cx="5166359" cy="1527048"/>
-          </a:xfrm>
-          <a:prstGeom prst="rect">
-            <a:avLst/>
-          </a:prstGeom>
-          <a:noFill/>
-        </p:spPr>
-        <p:txBody>
-          <a:bodyPr wrap="square" anchor="t">
-            <a:spAutoFit/>
-          </a:bodyPr>
-          <a:lstStyle/>
-          <a:p>
-            <a:pPr>
-              <a:lnSpc>
-                <a:spcPct val="114000"/>
-              </a:lnSpc>
-              <a:spcAft>
-                <a:spcPts val="350"/>
-              </a:spcAft>
-            </a:pPr>
-            <a:r>
-              <a:rPr sz="1300" b="1">
-                <a:solidFill>
-                  <a:srgbClr val="000000"/>
-                </a:solidFill>
-                <a:latin typeface="맑은 고딕"/>
-                <a:ea typeface="맑은 고딕"/>
-              </a:rPr>
-              <a:t>의심 2 — 배분 단계</a:t>
-            </a:r>
-          </a:p>
-          <a:p>
-            <a:pPr marL="160020" indent="-160020">
-              <a:lnSpc>
-                <a:spcPct val="114000"/>
-              </a:lnSpc>
-              <a:spcAft>
-                <a:spcPts val="200"/>
-              </a:spcAft>
-            </a:pPr>
-            <a:r>
-              <a:rPr sz="1150" b="0">
-                <a:solidFill>
-                  <a:srgbClr val="1C1C1E"/>
-                </a:solidFill>
-                <a:latin typeface="맑은 고딕"/>
-                <a:ea typeface="맑은 고딕"/>
-              </a:rPr>
-              <a:t>• 지원 심사 배점 100점 중 취약도 항목은 0점</a:t>
-            </a:r>
-          </a:p>
-          <a:p>
-            <a:pPr marL="160020" indent="-160020">
-              <a:lnSpc>
-                <a:spcPct val="114000"/>
-              </a:lnSpc>
-              <a:spcAft>
-                <a:spcPts val="200"/>
-              </a:spcAft>
-            </a:pPr>
-            <a:r>
-              <a:rPr sz="1150" b="0">
-                <a:solidFill>
-                  <a:srgbClr val="1C1C1E"/>
-                </a:solidFill>
-                <a:latin typeface="맑은 고딕"/>
-                <a:ea typeface="맑은 고딕"/>
-              </a:rPr>
-              <a:t>• 시·도 선별 기준은 "예산 규모, 의료 취약성 등 고려"가 전부 — 누구를 먼저 지원할지의 규칙이 있는가?</a:t>
-            </a:r>
-          </a:p>
-          <a:p>
-            <a:pPr>
-              <a:lnSpc>
-                <a:spcPct val="114000"/>
-              </a:lnSpc>
-              <a:spcAft>
-                <a:spcPts val="200"/>
-              </a:spcAft>
-            </a:pPr>
-            <a:r>
-              <a:rPr sz="1150" b="0">
-                <a:solidFill>
-                  <a:srgbClr val="1C1C1E"/>
-                </a:solidFill>
-                <a:latin typeface="맑은 고딕"/>
-                <a:ea typeface="맑은 고딕"/>
-              </a:rPr>
-              <a:t>→ 현행 배분이 무엇으로 설명되는지 진단한다</a:t>
-            </a:r>
-          </a:p>
-        </p:txBody>
-      </p:sp>
-      <p:sp>
-        <p:nvSpPr>
-          <p:cNvPr id="21" name="Rounded Rectangle 20"/>
-          <p:cNvSpPr/>
-          <p:nvPr/>
-        </p:nvSpPr>
-        <p:spPr>
-          <a:xfrm>
-            <a:off x="502920" y="4892040"/>
-            <a:ext cx="11292840" cy="1371600"/>
-          </a:xfrm>
-          <a:prstGeom prst="roundRect">
-            <a:avLst>
-              <a:gd name="adj" fmla="val 6000"/>
-            </a:avLst>
-          </a:prstGeom>
-          <a:solidFill>
-            <a:srgbClr val="FFFFFF"/>
-          </a:solidFill>
-          <a:ln w="12700">
-            <a:solidFill>
-              <a:srgbClr val="E4E6E9"/>
-            </a:solidFill>
-          </a:ln>
-          <a:effectLst>
-            <a:outerShdw blurRad="182880" dist="64008" dir="5400000" rotWithShape="0">
-              <a:srgbClr val="000000">
-                <a:alpha val="30000"/>
-              </a:srgbClr>
-            </a:outerShdw>
-          </a:effectLst>
-        </p:spPr>
-        <p:style>
-          <a:lnRef idx="1">
-            <a:schemeClr val="accent1"/>
-          </a:lnRef>
-          <a:fillRef idx="3">
-            <a:schemeClr val="accent1"/>
-          </a:fillRef>
-          <a:effectRef idx="2">
-            <a:schemeClr val="accent1"/>
-          </a:effectRef>
-          <a:fontRef idx="minor">
-            <a:schemeClr val="lt1"/>
-          </a:fontRef>
-        </p:style>
-        <p:txBody>
-          <a:bodyPr rtlCol="0" anchor="ctr"/>
-          <a:lstStyle/>
-          <a:p>
-            <a:pPr algn="ctr"/>
-          </a:p>
-        </p:txBody>
-      </p:sp>
-      <p:sp>
-        <p:nvSpPr>
-          <p:cNvPr id="22" name="TextBox 21"/>
-          <p:cNvSpPr txBox="1"/>
-          <p:nvPr/>
-        </p:nvSpPr>
-        <p:spPr>
-          <a:xfrm>
-            <a:off x="685800" y="5020055"/>
-            <a:ext cx="10927080" cy="1115568"/>
-          </a:xfrm>
-          <a:prstGeom prst="rect">
-            <a:avLst/>
-          </a:prstGeom>
-          <a:noFill/>
-        </p:spPr>
-        <p:txBody>
-          <a:bodyPr wrap="square" anchor="t">
-            <a:spAutoFit/>
-          </a:bodyPr>
-          <a:lstStyle/>
-          <a:p>
-            <a:pPr>
-              <a:lnSpc>
-                <a:spcPct val="114000"/>
-              </a:lnSpc>
-              <a:spcAft>
-                <a:spcPts val="350"/>
-              </a:spcAft>
-            </a:pPr>
-            <a:r>
-              <a:rPr sz="1300" b="1">
-                <a:solidFill>
-                  <a:srgbClr val="33393F"/>
-                </a:solidFill>
-                <a:latin typeface="맑은 고딕"/>
-                <a:ea typeface="맑은 고딕"/>
-              </a:rPr>
-              <a:t>왜 지금, 왜 데이터인가</a:t>
-            </a:r>
-          </a:p>
-          <a:p>
-            <a:pPr marL="160020" indent="-160020">
-              <a:lnSpc>
-                <a:spcPct val="114000"/>
-              </a:lnSpc>
-              <a:spcAft>
-                <a:spcPts val="200"/>
-              </a:spcAft>
-            </a:pPr>
-            <a:r>
-              <a:rPr sz="1150" b="0">
-                <a:solidFill>
-                  <a:srgbClr val="1C1C1E"/>
-                </a:solidFill>
-                <a:latin typeface="맑은 고딕"/>
-                <a:ea typeface="맑은 고딕"/>
-              </a:rPr>
-              <a:t>• 분만 인프라 공백은 언론·국회에서 반복 지적되어 왔으나, 전국 단위 공개 데이터로 정량 검증된 적이 없다</a:t>
-            </a:r>
-          </a:p>
-          <a:p>
-            <a:pPr marL="160020" indent="-160020">
-              <a:lnSpc>
-                <a:spcPct val="114000"/>
-              </a:lnSpc>
-              <a:spcAft>
-                <a:spcPts val="200"/>
-              </a:spcAft>
-            </a:pPr>
-            <a:r>
-              <a:rPr sz="1150" b="0">
-                <a:solidFill>
-                  <a:srgbClr val="1C1C1E"/>
-                </a:solidFill>
-                <a:latin typeface="맑은 고딕"/>
-                <a:ea typeface="맑은 고딕"/>
-              </a:rPr>
-              <a:t>• 분석 대상은 취약지라는 현상이 아니라, 취약지를 판정하고 지원하는 제도 그 자체다 (제도 감사 프레임)</a:t>
-            </a:r>
-          </a:p>
-          <a:p>
-            <a:pPr marL="160020" indent="-160020">
-              <a:lnSpc>
-                <a:spcPct val="114000"/>
-              </a:lnSpc>
-              <a:spcAft>
-                <a:spcPts val="200"/>
-              </a:spcAft>
-            </a:pPr>
-            <a:r>
-              <a:rPr sz="1150" b="0">
-                <a:solidFill>
-                  <a:srgbClr val="1C1C1E"/>
-                </a:solidFill>
-                <a:latin typeface="맑은 고딕"/>
-                <a:ea typeface="맑은 고딕"/>
-              </a:rPr>
-              <a:t>• 모든 판단 기준과 임계값은 정부 자신의 문서·데이터에서 가져와 실현 가능성을 확보할 계획이다</a:t>
+              <a:t>"지금 있는 것은 체계적으로, 필요한 곳으로 배분되고 있는가" — 이를 데이터로 검증하는 것이 본 계획이다.</a:t>
             </a:r>
           </a:p>
         </p:txBody>
@@ -10135,7 +10784,7 @@
                 <a:latin typeface="맑은 고딕"/>
                 <a:ea typeface="맑은 고딕"/>
               </a:rPr>
-              <a:t>연구 질문 (RQ) — 감사의 네 가지 물음</a:t>
+              <a:t>문제 인식 — 제도는 세 단계로 자원을 흘려보낸다</a:t>
             </a:r>
           </a:p>
         </p:txBody>
@@ -10243,8 +10892,8 @@
         </p:nvSpPr>
         <p:spPr>
           <a:xfrm>
-            <a:off x="502920" y="6492240"/>
-            <a:ext cx="11247120" cy="320040"/>
+            <a:off x="548640" y="1097280"/>
+            <a:ext cx="11155680" cy="384048"/>
           </a:xfrm>
           <a:prstGeom prst="rect">
             <a:avLst/>
@@ -10266,6 +10915,49 @@
               </a:spcAft>
             </a:pPr>
             <a:r>
+              <a:rPr sz="1250" b="0">
+                <a:solidFill>
+                  <a:srgbClr val="767A7F"/>
+                </a:solidFill>
+                <a:latin typeface="맑은 고딕"/>
+                <a:ea typeface="맑은 고딕"/>
+              </a:rPr>
+              <a:t>한 단계라도 막히거나 새면, 앞 단계가 아무리 정확해도 자원은 엉뚱한 곳으로 간다</a:t>
+            </a:r>
+          </a:p>
+        </p:txBody>
+      </p:sp>
+      <p:sp>
+        <p:nvSpPr>
+          <p:cNvPr id="8" name="TextBox 7"/>
+          <p:cNvSpPr txBox="1"/>
+          <p:nvPr/>
+        </p:nvSpPr>
+        <p:spPr>
+          <a:xfrm>
+            <a:off x="502920" y="6492240"/>
+            <a:ext cx="11247120" cy="320040"/>
+          </a:xfrm>
+          <a:prstGeom prst="rect">
+            <a:avLst/>
+          </a:prstGeom>
+          <a:noFill/>
+        </p:spPr>
+        <p:txBody>
+          <a:bodyPr wrap="square" anchor="t">
+            <a:spAutoFit/>
+          </a:bodyPr>
+          <a:lstStyle/>
+          <a:p>
+            <a:pPr>
+              <a:lnSpc>
+                <a:spcPct val="114000"/>
+              </a:lnSpc>
+              <a:spcAft>
+                <a:spcPts val="0"/>
+              </a:spcAft>
+            </a:pPr>
+            <a:r>
               <a:rPr sz="850" b="0">
                 <a:solidFill>
                   <a:srgbClr val="B2B5B9"/>
@@ -10280,18 +10972,18 @@
       </p:sp>
       <p:sp>
         <p:nvSpPr>
-          <p:cNvPr id="8" name="Rounded Rectangle 7"/>
+          <p:cNvPr id="9" name="Rounded Rectangle 8"/>
           <p:cNvSpPr/>
           <p:nvPr/>
         </p:nvSpPr>
         <p:spPr>
           <a:xfrm>
             <a:off x="502920" y="1371600"/>
-            <a:ext cx="5532120" cy="1737360"/>
+            <a:ext cx="3291840" cy="1298448"/>
           </a:xfrm>
           <a:prstGeom prst="roundRect">
             <a:avLst>
-              <a:gd name="adj" fmla="val 4736"/>
+              <a:gd name="adj" fmla="val 6338"/>
             </a:avLst>
           </a:prstGeom>
           <a:solidFill>
@@ -10334,14 +11026,1050 @@
       </p:sp>
       <p:sp>
         <p:nvSpPr>
-          <p:cNvPr id="9" name="Rounded Rectangle 8"/>
+          <p:cNvPr id="10" name="TextBox 9"/>
+          <p:cNvSpPr txBox="1"/>
+          <p:nvPr/>
+        </p:nvSpPr>
+        <p:spPr>
+          <a:xfrm>
+            <a:off x="667512" y="1444752"/>
+            <a:ext cx="3017520" cy="1152144"/>
+          </a:xfrm>
+          <a:prstGeom prst="rect">
+            <a:avLst/>
+          </a:prstGeom>
+          <a:noFill/>
+        </p:spPr>
+        <p:txBody>
+          <a:bodyPr wrap="square" anchor="t">
+            <a:spAutoFit/>
+          </a:bodyPr>
+          <a:lstStyle/>
+          <a:p>
+            <a:pPr>
+              <a:lnSpc>
+                <a:spcPct val="114000"/>
+              </a:lnSpc>
+              <a:spcAft>
+                <a:spcPts val="300"/>
+              </a:spcAft>
+            </a:pPr>
+            <a:r>
+              <a:rPr sz="1500" b="1">
+                <a:solidFill>
+                  <a:srgbClr val="33393F"/>
+                </a:solidFill>
+                <a:latin typeface="맑은 고딕"/>
+                <a:ea typeface="맑은 고딕"/>
+              </a:rPr>
+              <a:t>① 측정</a:t>
+            </a:r>
+          </a:p>
+          <a:p>
+            <a:pPr>
+              <a:lnSpc>
+                <a:spcPct val="114000"/>
+              </a:lnSpc>
+              <a:spcAft>
+                <a:spcPts val="0"/>
+              </a:spcAft>
+            </a:pPr>
+            <a:r>
+              <a:rPr sz="1050" b="0">
+                <a:solidFill>
+                  <a:srgbClr val="1C1C1E"/>
+                </a:solidFill>
+                <a:latin typeface="맑은 고딕"/>
+                <a:ea typeface="맑은 고딕"/>
+              </a:rPr>
+              <a:t>2년마다 전국 시·군·구의</a:t>
+            </a:r>
+          </a:p>
+          <a:p>
+            <a:pPr>
+              <a:lnSpc>
+                <a:spcPct val="114000"/>
+              </a:lnSpc>
+              <a:spcAft>
+                <a:spcPts val="0"/>
+              </a:spcAft>
+            </a:pPr>
+            <a:r>
+              <a:rPr sz="1050" b="0">
+                <a:solidFill>
+                  <a:srgbClr val="1C1C1E"/>
+                </a:solidFill>
+                <a:latin typeface="맑은 고딕"/>
+                <a:ea typeface="맑은 고딕"/>
+              </a:rPr>
+              <a:t>분만실 60분 접근성과</a:t>
+            </a:r>
+          </a:p>
+          <a:p>
+            <a:pPr>
+              <a:lnSpc>
+                <a:spcPct val="114000"/>
+              </a:lnSpc>
+              <a:spcAft>
+                <a:spcPts val="0"/>
+              </a:spcAft>
+            </a:pPr>
+            <a:r>
+              <a:rPr sz="1050" b="0">
+                <a:solidFill>
+                  <a:srgbClr val="1C1C1E"/>
+                </a:solidFill>
+                <a:latin typeface="맑은 고딕"/>
+                <a:ea typeface="맑은 고딕"/>
+              </a:rPr>
+              <a:t>실제 분만 이동시간을 산출</a:t>
+            </a:r>
+          </a:p>
+        </p:txBody>
+      </p:sp>
+      <p:sp>
+        <p:nvSpPr>
+          <p:cNvPr id="11" name="TextBox 10"/>
+          <p:cNvSpPr txBox="1"/>
+          <p:nvPr/>
+        </p:nvSpPr>
+        <p:spPr>
+          <a:xfrm>
+            <a:off x="3813048" y="1783080"/>
+            <a:ext cx="685800" cy="548640"/>
+          </a:xfrm>
+          <a:prstGeom prst="rect">
+            <a:avLst/>
+          </a:prstGeom>
+          <a:noFill/>
+        </p:spPr>
+        <p:txBody>
+          <a:bodyPr wrap="square" anchor="t">
+            <a:spAutoFit/>
+          </a:bodyPr>
+          <a:lstStyle/>
+          <a:p>
+            <a:pPr>
+              <a:lnSpc>
+                <a:spcPct val="114000"/>
+              </a:lnSpc>
+              <a:spcAft>
+                <a:spcPts val="0"/>
+              </a:spcAft>
+            </a:pPr>
+            <a:r>
+              <a:rPr sz="2200" b="1">
+                <a:solidFill>
+                  <a:srgbClr val="767A7F"/>
+                </a:solidFill>
+                <a:latin typeface="맑은 고딕"/>
+                <a:ea typeface="맑은 고딕"/>
+              </a:rPr>
+              <a:t>→</a:t>
+            </a:r>
+          </a:p>
+        </p:txBody>
+      </p:sp>
+      <p:sp>
+        <p:nvSpPr>
+          <p:cNvPr id="12" name="Rounded Rectangle 11"/>
           <p:cNvSpPr/>
           <p:nvPr/>
         </p:nvSpPr>
         <p:spPr>
           <a:xfrm>
-            <a:off x="521208" y="1600200"/>
-            <a:ext cx="82296" cy="1280160"/>
+            <a:off x="4480559" y="1371600"/>
+            <a:ext cx="3291840" cy="1298448"/>
+          </a:xfrm>
+          <a:prstGeom prst="roundRect">
+            <a:avLst>
+              <a:gd name="adj" fmla="val 6338"/>
+            </a:avLst>
+          </a:prstGeom>
+          <a:solidFill>
+            <a:srgbClr val="FFFFFF"/>
+          </a:solidFill>
+          <a:ln w="12700">
+            <a:solidFill>
+              <a:srgbClr val="E4E6E9"/>
+            </a:solidFill>
+          </a:ln>
+          <a:effectLst>
+            <a:outerShdw blurRad="182880" dist="64008" dir="5400000" rotWithShape="0">
+              <a:srgbClr val="000000">
+                <a:alpha val="30000"/>
+              </a:srgbClr>
+            </a:outerShdw>
+          </a:effectLst>
+        </p:spPr>
+        <p:style>
+          <a:lnRef idx="1">
+            <a:schemeClr val="accent1"/>
+          </a:lnRef>
+          <a:fillRef idx="3">
+            <a:schemeClr val="accent1"/>
+          </a:fillRef>
+          <a:effectRef idx="2">
+            <a:schemeClr val="accent1"/>
+          </a:effectRef>
+          <a:fontRef idx="minor">
+            <a:schemeClr val="lt1"/>
+          </a:fontRef>
+        </p:style>
+        <p:txBody>
+          <a:bodyPr rtlCol="0" anchor="ctr"/>
+          <a:lstStyle/>
+          <a:p>
+            <a:pPr algn="ctr"/>
+          </a:p>
+        </p:txBody>
+      </p:sp>
+      <p:sp>
+        <p:nvSpPr>
+          <p:cNvPr id="13" name="TextBox 12"/>
+          <p:cNvSpPr txBox="1"/>
+          <p:nvPr/>
+        </p:nvSpPr>
+        <p:spPr>
+          <a:xfrm>
+            <a:off x="4645151" y="1444752"/>
+            <a:ext cx="3017520" cy="1152144"/>
+          </a:xfrm>
+          <a:prstGeom prst="rect">
+            <a:avLst/>
+          </a:prstGeom>
+          <a:noFill/>
+        </p:spPr>
+        <p:txBody>
+          <a:bodyPr wrap="square" anchor="t">
+            <a:spAutoFit/>
+          </a:bodyPr>
+          <a:lstStyle/>
+          <a:p>
+            <a:pPr>
+              <a:lnSpc>
+                <a:spcPct val="114000"/>
+              </a:lnSpc>
+              <a:spcAft>
+                <a:spcPts val="300"/>
+              </a:spcAft>
+            </a:pPr>
+            <a:r>
+              <a:rPr sz="1500" b="1">
+                <a:solidFill>
+                  <a:srgbClr val="33393F"/>
+                </a:solidFill>
+                <a:latin typeface="맑은 고딕"/>
+                <a:ea typeface="맑은 고딕"/>
+              </a:rPr>
+              <a:t>② 지정</a:t>
+            </a:r>
+          </a:p>
+          <a:p>
+            <a:pPr>
+              <a:lnSpc>
+                <a:spcPct val="114000"/>
+              </a:lnSpc>
+              <a:spcAft>
+                <a:spcPts val="0"/>
+              </a:spcAft>
+            </a:pPr>
+            <a:r>
+              <a:rPr sz="1050" b="0">
+                <a:solidFill>
+                  <a:srgbClr val="1C1C1E"/>
+                </a:solidFill>
+                <a:latin typeface="맑은 고딕"/>
+                <a:ea typeface="맑은 고딕"/>
+              </a:rPr>
+              <a:t>그 값을 임계값(30/30)과 대조해</a:t>
+            </a:r>
+          </a:p>
+          <a:p>
+            <a:pPr>
+              <a:lnSpc>
+                <a:spcPct val="114000"/>
+              </a:lnSpc>
+              <a:spcAft>
+                <a:spcPts val="0"/>
+              </a:spcAft>
+            </a:pPr>
+            <a:r>
+              <a:rPr sz="1050" b="0">
+                <a:solidFill>
+                  <a:srgbClr val="1C1C1E"/>
+                </a:solidFill>
+                <a:latin typeface="맑은 고딕"/>
+                <a:ea typeface="맑은 고딕"/>
+              </a:rPr>
+              <a:t>분만취약지를 판정하고</a:t>
+            </a:r>
+          </a:p>
+          <a:p>
+            <a:pPr>
+              <a:lnSpc>
+                <a:spcPct val="114000"/>
+              </a:lnSpc>
+              <a:spcAft>
+                <a:spcPts val="0"/>
+              </a:spcAft>
+            </a:pPr>
+            <a:r>
+              <a:rPr sz="1050" b="0">
+                <a:solidFill>
+                  <a:srgbClr val="1C1C1E"/>
+                </a:solidFill>
+                <a:latin typeface="맑은 고딕"/>
+                <a:ea typeface="맑은 고딕"/>
+              </a:rPr>
+              <a:t>A·B·C 등급 부여</a:t>
+            </a:r>
+          </a:p>
+        </p:txBody>
+      </p:sp>
+      <p:sp>
+        <p:nvSpPr>
+          <p:cNvPr id="14" name="TextBox 13"/>
+          <p:cNvSpPr txBox="1"/>
+          <p:nvPr/>
+        </p:nvSpPr>
+        <p:spPr>
+          <a:xfrm>
+            <a:off x="7790688" y="1783080"/>
+            <a:ext cx="685800" cy="548640"/>
+          </a:xfrm>
+          <a:prstGeom prst="rect">
+            <a:avLst/>
+          </a:prstGeom>
+          <a:noFill/>
+        </p:spPr>
+        <p:txBody>
+          <a:bodyPr wrap="square" anchor="t">
+            <a:spAutoFit/>
+          </a:bodyPr>
+          <a:lstStyle/>
+          <a:p>
+            <a:pPr>
+              <a:lnSpc>
+                <a:spcPct val="114000"/>
+              </a:lnSpc>
+              <a:spcAft>
+                <a:spcPts val="0"/>
+              </a:spcAft>
+            </a:pPr>
+            <a:r>
+              <a:rPr sz="2200" b="1">
+                <a:solidFill>
+                  <a:srgbClr val="767A7F"/>
+                </a:solidFill>
+                <a:latin typeface="맑은 고딕"/>
+                <a:ea typeface="맑은 고딕"/>
+              </a:rPr>
+              <a:t>→</a:t>
+            </a:r>
+          </a:p>
+        </p:txBody>
+      </p:sp>
+      <p:sp>
+        <p:nvSpPr>
+          <p:cNvPr id="15" name="Rounded Rectangle 14"/>
+          <p:cNvSpPr/>
+          <p:nvPr/>
+        </p:nvSpPr>
+        <p:spPr>
+          <a:xfrm>
+            <a:off x="8458200" y="1371600"/>
+            <a:ext cx="3291840" cy="1298448"/>
+          </a:xfrm>
+          <a:prstGeom prst="roundRect">
+            <a:avLst>
+              <a:gd name="adj" fmla="val 6338"/>
+            </a:avLst>
+          </a:prstGeom>
+          <a:solidFill>
+            <a:srgbClr val="FFFFFF"/>
+          </a:solidFill>
+          <a:ln w="12700">
+            <a:solidFill>
+              <a:srgbClr val="E4E6E9"/>
+            </a:solidFill>
+          </a:ln>
+          <a:effectLst>
+            <a:outerShdw blurRad="182880" dist="64008" dir="5400000" rotWithShape="0">
+              <a:srgbClr val="000000">
+                <a:alpha val="30000"/>
+              </a:srgbClr>
+            </a:outerShdw>
+          </a:effectLst>
+        </p:spPr>
+        <p:style>
+          <a:lnRef idx="1">
+            <a:schemeClr val="accent1"/>
+          </a:lnRef>
+          <a:fillRef idx="3">
+            <a:schemeClr val="accent1"/>
+          </a:fillRef>
+          <a:effectRef idx="2">
+            <a:schemeClr val="accent1"/>
+          </a:effectRef>
+          <a:fontRef idx="minor">
+            <a:schemeClr val="lt1"/>
+          </a:fontRef>
+        </p:style>
+        <p:txBody>
+          <a:bodyPr rtlCol="0" anchor="ctr"/>
+          <a:lstStyle/>
+          <a:p>
+            <a:pPr algn="ctr"/>
+          </a:p>
+        </p:txBody>
+      </p:sp>
+      <p:sp>
+        <p:nvSpPr>
+          <p:cNvPr id="16" name="TextBox 15"/>
+          <p:cNvSpPr txBox="1"/>
+          <p:nvPr/>
+        </p:nvSpPr>
+        <p:spPr>
+          <a:xfrm>
+            <a:off x="8622792" y="1444752"/>
+            <a:ext cx="3017520" cy="1152144"/>
+          </a:xfrm>
+          <a:prstGeom prst="rect">
+            <a:avLst/>
+          </a:prstGeom>
+          <a:noFill/>
+        </p:spPr>
+        <p:txBody>
+          <a:bodyPr wrap="square" anchor="t">
+            <a:spAutoFit/>
+          </a:bodyPr>
+          <a:lstStyle/>
+          <a:p>
+            <a:pPr>
+              <a:lnSpc>
+                <a:spcPct val="114000"/>
+              </a:lnSpc>
+              <a:spcAft>
+                <a:spcPts val="300"/>
+              </a:spcAft>
+            </a:pPr>
+            <a:r>
+              <a:rPr sz="1500" b="1">
+                <a:solidFill>
+                  <a:srgbClr val="33393F"/>
+                </a:solidFill>
+                <a:latin typeface="맑은 고딕"/>
+                <a:ea typeface="맑은 고딕"/>
+              </a:rPr>
+              <a:t>③ 배분</a:t>
+            </a:r>
+          </a:p>
+          <a:p>
+            <a:pPr>
+              <a:lnSpc>
+                <a:spcPct val="114000"/>
+              </a:lnSpc>
+              <a:spcAft>
+                <a:spcPts val="0"/>
+              </a:spcAft>
+            </a:pPr>
+            <a:r>
+              <a:rPr sz="1050" b="0">
+                <a:solidFill>
+                  <a:srgbClr val="1C1C1E"/>
+                </a:solidFill>
+                <a:latin typeface="맑은 고딕"/>
+                <a:ea typeface="맑은 고딕"/>
+              </a:rPr>
+              <a:t>지정 지역의 병원 한 곳을 골라</a:t>
+            </a:r>
+          </a:p>
+          <a:p>
+            <a:pPr>
+              <a:lnSpc>
+                <a:spcPct val="114000"/>
+              </a:lnSpc>
+              <a:spcAft>
+                <a:spcPts val="0"/>
+              </a:spcAft>
+            </a:pPr>
+            <a:r>
+              <a:rPr sz="1050" b="0">
+                <a:solidFill>
+                  <a:srgbClr val="1C1C1E"/>
+                </a:solidFill>
+                <a:latin typeface="맑은 고딕"/>
+                <a:ea typeface="맑은 고딕"/>
+              </a:rPr>
+              <a:t>분만실 설치비·운영비 지급</a:t>
+            </a:r>
+          </a:p>
+          <a:p>
+            <a:pPr>
+              <a:lnSpc>
+                <a:spcPct val="114000"/>
+              </a:lnSpc>
+              <a:spcAft>
+                <a:spcPts val="0"/>
+              </a:spcAft>
+            </a:pPr>
+            <a:r>
+              <a:rPr sz="1050" b="0">
+                <a:solidFill>
+                  <a:srgbClr val="1C1C1E"/>
+                </a:solidFill>
+                <a:latin typeface="맑은 고딕"/>
+                <a:ea typeface="맑은 고딕"/>
+              </a:rPr>
+              <a:t>(설치 약 10억 + 연 5억)</a:t>
+            </a:r>
+          </a:p>
+        </p:txBody>
+      </p:sp>
+      <p:sp>
+        <p:nvSpPr>
+          <p:cNvPr id="17" name="Rounded Rectangle 16"/>
+          <p:cNvSpPr/>
+          <p:nvPr/>
+        </p:nvSpPr>
+        <p:spPr>
+          <a:xfrm>
+            <a:off x="502920" y="2926080"/>
+            <a:ext cx="5532120" cy="1783080"/>
+          </a:xfrm>
+          <a:prstGeom prst="roundRect">
+            <a:avLst>
+              <a:gd name="adj" fmla="val 4615"/>
+            </a:avLst>
+          </a:prstGeom>
+          <a:solidFill>
+            <a:srgbClr val="F1F2F3"/>
+          </a:solidFill>
+          <a:ln w="15875">
+            <a:solidFill>
+              <a:srgbClr val="9AA0A6"/>
+            </a:solidFill>
+          </a:ln>
+          <a:effectLst>
+            <a:outerShdw blurRad="182880" dist="64008" dir="5400000" rotWithShape="0">
+              <a:srgbClr val="000000">
+                <a:alpha val="32000"/>
+              </a:srgbClr>
+            </a:outerShdw>
+          </a:effectLst>
+        </p:spPr>
+        <p:style>
+          <a:lnRef idx="1">
+            <a:schemeClr val="accent1"/>
+          </a:lnRef>
+          <a:fillRef idx="3">
+            <a:schemeClr val="accent1"/>
+          </a:fillRef>
+          <a:effectRef idx="2">
+            <a:schemeClr val="accent1"/>
+          </a:effectRef>
+          <a:fontRef idx="minor">
+            <a:schemeClr val="lt1"/>
+          </a:fontRef>
+        </p:style>
+        <p:txBody>
+          <a:bodyPr rtlCol="0" anchor="ctr"/>
+          <a:lstStyle/>
+          <a:p>
+            <a:pPr algn="ctr"/>
+          </a:p>
+        </p:txBody>
+      </p:sp>
+      <p:sp>
+        <p:nvSpPr>
+          <p:cNvPr id="18" name="TextBox 17"/>
+          <p:cNvSpPr txBox="1"/>
+          <p:nvPr/>
+        </p:nvSpPr>
+        <p:spPr>
+          <a:xfrm>
+            <a:off x="685800" y="3054096"/>
+            <a:ext cx="5166359" cy="1527048"/>
+          </a:xfrm>
+          <a:prstGeom prst="rect">
+            <a:avLst/>
+          </a:prstGeom>
+          <a:noFill/>
+        </p:spPr>
+        <p:txBody>
+          <a:bodyPr wrap="square" anchor="t">
+            <a:spAutoFit/>
+          </a:bodyPr>
+          <a:lstStyle/>
+          <a:p>
+            <a:pPr>
+              <a:lnSpc>
+                <a:spcPct val="114000"/>
+              </a:lnSpc>
+              <a:spcAft>
+                <a:spcPts val="350"/>
+              </a:spcAft>
+            </a:pPr>
+            <a:r>
+              <a:rPr sz="1300" b="1">
+                <a:solidFill>
+                  <a:srgbClr val="000000"/>
+                </a:solidFill>
+                <a:latin typeface="맑은 고딕"/>
+                <a:ea typeface="맑은 고딕"/>
+              </a:rPr>
+              <a:t>의심 1 — 지정 단계</a:t>
+            </a:r>
+          </a:p>
+          <a:p>
+            <a:pPr marL="160020" indent="-160020">
+              <a:lnSpc>
+                <a:spcPct val="114000"/>
+              </a:lnSpc>
+              <a:spcAft>
+                <a:spcPts val="200"/>
+              </a:spcAft>
+            </a:pPr>
+            <a:r>
+              <a:rPr sz="1150" b="0">
+                <a:solidFill>
+                  <a:srgbClr val="1C1C1E"/>
+                </a:solidFill>
+                <a:latin typeface="맑은 고딕"/>
+                <a:ea typeface="맑은 고딕"/>
+              </a:rPr>
+              <a:t>• 판정 기준은 이동시간 파생 지표뿐이다</a:t>
+            </a:r>
+          </a:p>
+          <a:p>
+            <a:pPr marL="160020" indent="-160020">
+              <a:lnSpc>
+                <a:spcPct val="114000"/>
+              </a:lnSpc>
+              <a:spcAft>
+                <a:spcPts val="200"/>
+              </a:spcAft>
+            </a:pPr>
+            <a:r>
+              <a:rPr sz="1150" b="0">
+                <a:solidFill>
+                  <a:srgbClr val="1C1C1E"/>
+                </a:solidFill>
+                <a:latin typeface="맑은 고딕"/>
+                <a:ea typeface="맑은 고딕"/>
+              </a:rPr>
+              <a:t>• 관내 분만 인프라가 소멸해도 "옆 도시로 60분 안에 갈 수 있으면" 취약지가 아니게 되는 구조 아닌가?</a:t>
+            </a:r>
+          </a:p>
+          <a:p>
+            <a:pPr>
+              <a:lnSpc>
+                <a:spcPct val="114000"/>
+              </a:lnSpc>
+              <a:spcAft>
+                <a:spcPts val="200"/>
+              </a:spcAft>
+            </a:pPr>
+            <a:r>
+              <a:rPr sz="1150" b="0">
+                <a:solidFill>
+                  <a:srgbClr val="1C1C1E"/>
+                </a:solidFill>
+                <a:latin typeface="맑은 고딕"/>
+                <a:ea typeface="맑은 고딕"/>
+              </a:rPr>
+              <a:t>→ 기준이 구조적으로 놓치는 지역이 있는지 검증한다</a:t>
+            </a:r>
+          </a:p>
+        </p:txBody>
+      </p:sp>
+      <p:sp>
+        <p:nvSpPr>
+          <p:cNvPr id="19" name="Rounded Rectangle 18"/>
+          <p:cNvSpPr/>
+          <p:nvPr/>
+        </p:nvSpPr>
+        <p:spPr>
+          <a:xfrm>
+            <a:off x="6263640" y="2926080"/>
+            <a:ext cx="5532120" cy="1783080"/>
+          </a:xfrm>
+          <a:prstGeom prst="roundRect">
+            <a:avLst>
+              <a:gd name="adj" fmla="val 4615"/>
+            </a:avLst>
+          </a:prstGeom>
+          <a:solidFill>
+            <a:srgbClr val="F1F2F3"/>
+          </a:solidFill>
+          <a:ln w="15875">
+            <a:solidFill>
+              <a:srgbClr val="9AA0A6"/>
+            </a:solidFill>
+          </a:ln>
+          <a:effectLst>
+            <a:outerShdw blurRad="182880" dist="64008" dir="5400000" rotWithShape="0">
+              <a:srgbClr val="000000">
+                <a:alpha val="32000"/>
+              </a:srgbClr>
+            </a:outerShdw>
+          </a:effectLst>
+        </p:spPr>
+        <p:style>
+          <a:lnRef idx="1">
+            <a:schemeClr val="accent1"/>
+          </a:lnRef>
+          <a:fillRef idx="3">
+            <a:schemeClr val="accent1"/>
+          </a:fillRef>
+          <a:effectRef idx="2">
+            <a:schemeClr val="accent1"/>
+          </a:effectRef>
+          <a:fontRef idx="minor">
+            <a:schemeClr val="lt1"/>
+          </a:fontRef>
+        </p:style>
+        <p:txBody>
+          <a:bodyPr rtlCol="0" anchor="ctr"/>
+          <a:lstStyle/>
+          <a:p>
+            <a:pPr algn="ctr"/>
+          </a:p>
+        </p:txBody>
+      </p:sp>
+      <p:sp>
+        <p:nvSpPr>
+          <p:cNvPr id="20" name="TextBox 19"/>
+          <p:cNvSpPr txBox="1"/>
+          <p:nvPr/>
+        </p:nvSpPr>
+        <p:spPr>
+          <a:xfrm>
+            <a:off x="6446520" y="3054096"/>
+            <a:ext cx="5166359" cy="1527048"/>
+          </a:xfrm>
+          <a:prstGeom prst="rect">
+            <a:avLst/>
+          </a:prstGeom>
+          <a:noFill/>
+        </p:spPr>
+        <p:txBody>
+          <a:bodyPr wrap="square" anchor="t">
+            <a:spAutoFit/>
+          </a:bodyPr>
+          <a:lstStyle/>
+          <a:p>
+            <a:pPr>
+              <a:lnSpc>
+                <a:spcPct val="114000"/>
+              </a:lnSpc>
+              <a:spcAft>
+                <a:spcPts val="350"/>
+              </a:spcAft>
+            </a:pPr>
+            <a:r>
+              <a:rPr sz="1300" b="1">
+                <a:solidFill>
+                  <a:srgbClr val="000000"/>
+                </a:solidFill>
+                <a:latin typeface="맑은 고딕"/>
+                <a:ea typeface="맑은 고딕"/>
+              </a:rPr>
+              <a:t>의심 2 — 배분 단계</a:t>
+            </a:r>
+          </a:p>
+          <a:p>
+            <a:pPr marL="160020" indent="-160020">
+              <a:lnSpc>
+                <a:spcPct val="114000"/>
+              </a:lnSpc>
+              <a:spcAft>
+                <a:spcPts val="200"/>
+              </a:spcAft>
+            </a:pPr>
+            <a:r>
+              <a:rPr sz="1150" b="0">
+                <a:solidFill>
+                  <a:srgbClr val="1C1C1E"/>
+                </a:solidFill>
+                <a:latin typeface="맑은 고딕"/>
+                <a:ea typeface="맑은 고딕"/>
+              </a:rPr>
+              <a:t>• 지원 심사 배점 100점 중 취약도 항목은 0점</a:t>
+            </a:r>
+          </a:p>
+          <a:p>
+            <a:pPr marL="160020" indent="-160020">
+              <a:lnSpc>
+                <a:spcPct val="114000"/>
+              </a:lnSpc>
+              <a:spcAft>
+                <a:spcPts val="200"/>
+              </a:spcAft>
+            </a:pPr>
+            <a:r>
+              <a:rPr sz="1150" b="0">
+                <a:solidFill>
+                  <a:srgbClr val="1C1C1E"/>
+                </a:solidFill>
+                <a:latin typeface="맑은 고딕"/>
+                <a:ea typeface="맑은 고딕"/>
+              </a:rPr>
+              <a:t>• 시·도 선별 기준은 "예산 규모, 의료 취약성 등 고려"가 전부 — 누구를 먼저 지원할지의 규칙이 있는가?</a:t>
+            </a:r>
+          </a:p>
+          <a:p>
+            <a:pPr>
+              <a:lnSpc>
+                <a:spcPct val="114000"/>
+              </a:lnSpc>
+              <a:spcAft>
+                <a:spcPts val="200"/>
+              </a:spcAft>
+            </a:pPr>
+            <a:r>
+              <a:rPr sz="1150" b="0">
+                <a:solidFill>
+                  <a:srgbClr val="1C1C1E"/>
+                </a:solidFill>
+                <a:latin typeface="맑은 고딕"/>
+                <a:ea typeface="맑은 고딕"/>
+              </a:rPr>
+              <a:t>→ 현행 배분이 무엇으로 설명되는지 진단한다</a:t>
+            </a:r>
+          </a:p>
+        </p:txBody>
+      </p:sp>
+      <p:sp>
+        <p:nvSpPr>
+          <p:cNvPr id="21" name="Rounded Rectangle 20"/>
+          <p:cNvSpPr/>
+          <p:nvPr/>
+        </p:nvSpPr>
+        <p:spPr>
+          <a:xfrm>
+            <a:off x="502920" y="4892040"/>
+            <a:ext cx="11292840" cy="1371600"/>
+          </a:xfrm>
+          <a:prstGeom prst="roundRect">
+            <a:avLst>
+              <a:gd name="adj" fmla="val 6000"/>
+            </a:avLst>
+          </a:prstGeom>
+          <a:solidFill>
+            <a:srgbClr val="FFFFFF"/>
+          </a:solidFill>
+          <a:ln w="12700">
+            <a:solidFill>
+              <a:srgbClr val="E4E6E9"/>
+            </a:solidFill>
+          </a:ln>
+          <a:effectLst>
+            <a:outerShdw blurRad="182880" dist="64008" dir="5400000" rotWithShape="0">
+              <a:srgbClr val="000000">
+                <a:alpha val="30000"/>
+              </a:srgbClr>
+            </a:outerShdw>
+          </a:effectLst>
+        </p:spPr>
+        <p:style>
+          <a:lnRef idx="1">
+            <a:schemeClr val="accent1"/>
+          </a:lnRef>
+          <a:fillRef idx="3">
+            <a:schemeClr val="accent1"/>
+          </a:fillRef>
+          <a:effectRef idx="2">
+            <a:schemeClr val="accent1"/>
+          </a:effectRef>
+          <a:fontRef idx="minor">
+            <a:schemeClr val="lt1"/>
+          </a:fontRef>
+        </p:style>
+        <p:txBody>
+          <a:bodyPr rtlCol="0" anchor="ctr"/>
+          <a:lstStyle/>
+          <a:p>
+            <a:pPr algn="ctr"/>
+          </a:p>
+        </p:txBody>
+      </p:sp>
+      <p:sp>
+        <p:nvSpPr>
+          <p:cNvPr id="22" name="TextBox 21"/>
+          <p:cNvSpPr txBox="1"/>
+          <p:nvPr/>
+        </p:nvSpPr>
+        <p:spPr>
+          <a:xfrm>
+            <a:off x="685800" y="5020055"/>
+            <a:ext cx="10927080" cy="1115568"/>
+          </a:xfrm>
+          <a:prstGeom prst="rect">
+            <a:avLst/>
+          </a:prstGeom>
+          <a:noFill/>
+        </p:spPr>
+        <p:txBody>
+          <a:bodyPr wrap="square" anchor="t">
+            <a:spAutoFit/>
+          </a:bodyPr>
+          <a:lstStyle/>
+          <a:p>
+            <a:pPr>
+              <a:lnSpc>
+                <a:spcPct val="114000"/>
+              </a:lnSpc>
+              <a:spcAft>
+                <a:spcPts val="350"/>
+              </a:spcAft>
+            </a:pPr>
+            <a:r>
+              <a:rPr sz="1300" b="1">
+                <a:solidFill>
+                  <a:srgbClr val="33393F"/>
+                </a:solidFill>
+                <a:latin typeface="맑은 고딕"/>
+                <a:ea typeface="맑은 고딕"/>
+              </a:rPr>
+              <a:t>왜 지금, 왜 데이터인가</a:t>
+            </a:r>
+          </a:p>
+          <a:p>
+            <a:pPr marL="160020" indent="-160020">
+              <a:lnSpc>
+                <a:spcPct val="114000"/>
+              </a:lnSpc>
+              <a:spcAft>
+                <a:spcPts val="200"/>
+              </a:spcAft>
+            </a:pPr>
+            <a:r>
+              <a:rPr sz="1150" b="0">
+                <a:solidFill>
+                  <a:srgbClr val="1C1C1E"/>
+                </a:solidFill>
+                <a:latin typeface="맑은 고딕"/>
+                <a:ea typeface="맑은 고딕"/>
+              </a:rPr>
+              <a:t>• 분만 인프라 공백은 언론·국회에서 반복 지적되어 왔으나, 전국 단위 공개 데이터로 정량 검증된 적이 없다</a:t>
+            </a:r>
+          </a:p>
+          <a:p>
+            <a:pPr marL="160020" indent="-160020">
+              <a:lnSpc>
+                <a:spcPct val="114000"/>
+              </a:lnSpc>
+              <a:spcAft>
+                <a:spcPts val="200"/>
+              </a:spcAft>
+            </a:pPr>
+            <a:r>
+              <a:rPr sz="1150" b="0">
+                <a:solidFill>
+                  <a:srgbClr val="1C1C1E"/>
+                </a:solidFill>
+                <a:latin typeface="맑은 고딕"/>
+                <a:ea typeface="맑은 고딕"/>
+              </a:rPr>
+              <a:t>• 분석 대상은 취약지라는 현상이 아니라, 취약지를 판정하고 지원하는 제도 그 자체다 (제도 감사 프레임)</a:t>
+            </a:r>
+          </a:p>
+          <a:p>
+            <a:pPr marL="160020" indent="-160020">
+              <a:lnSpc>
+                <a:spcPct val="114000"/>
+              </a:lnSpc>
+              <a:spcAft>
+                <a:spcPts val="200"/>
+              </a:spcAft>
+            </a:pPr>
+            <a:r>
+              <a:rPr sz="1150" b="0">
+                <a:solidFill>
+                  <a:srgbClr val="1C1C1E"/>
+                </a:solidFill>
+                <a:latin typeface="맑은 고딕"/>
+                <a:ea typeface="맑은 고딕"/>
+              </a:rPr>
+              <a:t>• 모든 판단 기준과 임계값은 정부 자신의 문서·데이터에서 가져와 실현 가능성을 확보할 계획이다</a:t>
+            </a:r>
+          </a:p>
+        </p:txBody>
+      </p:sp>
+    </p:spTree>
+  </p:cSld>
+  <p:clrMapOvr>
+    <a:masterClrMapping/>
+  </p:clrMapOvr>
+</p:sld>
+</file>
+
+<file path=ppt/slides/slide5.xml><?xml version="1.0" encoding="utf-8"?>
+<p:sld xmlns:a="http://schemas.openxmlformats.org/drawingml/2006/main" xmlns:p="http://schemas.openxmlformats.org/presentationml/2006/main" xmlns:r="http://schemas.openxmlformats.org/officeDocument/2006/relationships">
+  <p:cSld>
+    <p:spTree>
+      <p:nvGrpSpPr>
+        <p:cNvPr id="1" name=""/>
+        <p:cNvGrpSpPr/>
+        <p:nvPr/>
+      </p:nvGrpSpPr>
+      <p:grpSpPr/>
+      <p:sp>
+        <p:nvSpPr>
+          <p:cNvPr id="2" name="Rectangle 1"/>
+          <p:cNvSpPr/>
+          <p:nvPr/>
+        </p:nvSpPr>
+        <p:spPr>
+          <a:xfrm>
+            <a:off x="0" y="0"/>
+            <a:ext cx="12191695" cy="6858000"/>
+          </a:xfrm>
+          <a:prstGeom prst="rect">
+            <a:avLst/>
+          </a:prstGeom>
+          <a:solidFill>
+            <a:srgbClr val="FFFFFF"/>
+          </a:solidFill>
+          <a:ln>
+            <a:noFill/>
+          </a:ln>
+          <a:effectLst/>
+        </p:spPr>
+        <p:style>
+          <a:lnRef idx="1">
+            <a:schemeClr val="accent1"/>
+          </a:lnRef>
+          <a:fillRef idx="3">
+            <a:schemeClr val="accent1"/>
+          </a:fillRef>
+          <a:effectRef idx="2">
+            <a:schemeClr val="accent1"/>
+          </a:effectRef>
+          <a:fontRef idx="minor">
+            <a:schemeClr val="lt1"/>
+          </a:fontRef>
+        </p:style>
+        <p:txBody>
+          <a:bodyPr rtlCol="0" anchor="ctr"/>
+          <a:lstStyle/>
+          <a:p>
+            <a:pPr algn="ctr"/>
+          </a:p>
+        </p:txBody>
+      </p:sp>
+      <p:sp>
+        <p:nvSpPr>
+          <p:cNvPr id="3" name="Rounded Rectangle 2"/>
+          <p:cNvSpPr/>
+          <p:nvPr/>
+        </p:nvSpPr>
+        <p:spPr>
+          <a:xfrm>
+            <a:off x="502920" y="475488"/>
+            <a:ext cx="310896" cy="310896"/>
           </a:xfrm>
           <a:prstGeom prst="roundRect">
             <a:avLst>
@@ -10394,14 +12122,109 @@
       </p:sp>
       <p:sp>
         <p:nvSpPr>
-          <p:cNvPr id="10" name="TextBox 9"/>
+          <p:cNvPr id="4" name="TextBox 3"/>
           <p:cNvSpPr txBox="1"/>
           <p:nvPr/>
         </p:nvSpPr>
         <p:spPr>
           <a:xfrm>
-            <a:off x="822960" y="1536192"/>
-            <a:ext cx="5074920" cy="1463040"/>
+            <a:off x="960120" y="274320"/>
+            <a:ext cx="9692640" cy="685800"/>
+          </a:xfrm>
+          <a:prstGeom prst="rect">
+            <a:avLst/>
+          </a:prstGeom>
+          <a:noFill/>
+        </p:spPr>
+        <p:txBody>
+          <a:bodyPr wrap="square" anchor="ctr">
+            <a:spAutoFit/>
+          </a:bodyPr>
+          <a:lstStyle/>
+          <a:p>
+            <a:pPr>
+              <a:lnSpc>
+                <a:spcPct val="114000"/>
+              </a:lnSpc>
+              <a:spcAft>
+                <a:spcPts val="0"/>
+              </a:spcAft>
+            </a:pPr>
+            <a:r>
+              <a:rPr sz="2150" b="1">
+                <a:solidFill>
+                  <a:srgbClr val="1C1C1E"/>
+                </a:solidFill>
+                <a:latin typeface="맑은 고딕"/>
+                <a:ea typeface="맑은 고딕"/>
+              </a:rPr>
+              <a:t>연구 질문 (RQ) — 감사의 네 가지 물음</a:t>
+            </a:r>
+          </a:p>
+        </p:txBody>
+      </p:sp>
+      <p:sp>
+        <p:nvSpPr>
+          <p:cNvPr id="5" name="Rectangle 4"/>
+          <p:cNvSpPr/>
+          <p:nvPr/>
+        </p:nvSpPr>
+        <p:spPr>
+          <a:xfrm>
+            <a:off x="521207" y="969264"/>
+            <a:ext cx="4206240" cy="27432"/>
+          </a:xfrm>
+          <a:prstGeom prst="rect">
+            <a:avLst/>
+          </a:prstGeom>
+          <a:gradFill rotWithShape="1">
+            <a:gsLst>
+              <a:gs pos="0">
+                <a:srgbClr val="2A2E33"/>
+              </a:gs>
+              <a:gs pos="100000">
+                <a:srgbClr val="FFFFFF"/>
+              </a:gs>
+            </a:gsLst>
+            <a:lin scaled="0" ang="0"/>
+          </a:gradFill>
+          <a:ln>
+            <a:noFill/>
+          </a:ln>
+          <a:effectLst/>
+        </p:spPr>
+        <p:style>
+          <a:lnRef idx="1">
+            <a:schemeClr val="accent1"/>
+          </a:lnRef>
+          <a:fillRef idx="3">
+            <a:schemeClr val="accent1"/>
+          </a:fillRef>
+          <a:effectRef idx="2">
+            <a:schemeClr val="accent1"/>
+          </a:effectRef>
+          <a:fontRef idx="minor">
+            <a:schemeClr val="lt1"/>
+          </a:fontRef>
+        </p:style>
+        <p:txBody>
+          <a:bodyPr rtlCol="0" anchor="ctr"/>
+          <a:lstStyle/>
+          <a:p>
+            <a:pPr algn="ctr"/>
+          </a:p>
+        </p:txBody>
+      </p:sp>
+      <p:sp>
+        <p:nvSpPr>
+          <p:cNvPr id="6" name="TextBox 5"/>
+          <p:cNvSpPr txBox="1"/>
+          <p:nvPr/>
+        </p:nvSpPr>
+        <p:spPr>
+          <a:xfrm>
+            <a:off x="10835640" y="164592"/>
+            <a:ext cx="1188720" cy="777240"/>
           </a:xfrm>
           <a:prstGeom prst="rect">
             <a:avLst/>
@@ -10419,71 +12242,74 @@
                 <a:spcPct val="114000"/>
               </a:lnSpc>
               <a:spcAft>
-                <a:spcPts val="500"/>
-              </a:spcAft>
-            </a:pPr>
-            <a:r>
-              <a:rPr sz="1500" b="1">
-                <a:solidFill>
-                  <a:srgbClr val="33393F"/>
-                </a:solidFill>
-                <a:latin typeface="맑은 고딕"/>
-                <a:ea typeface="맑은 고딕"/>
-              </a:rPr>
-              <a:t>RQ1 · 지정의 검증</a:t>
-            </a:r>
-          </a:p>
+                <a:spcPts val="0"/>
+              </a:spcAft>
+            </a:pPr>
+            <a:r>
+              <a:rPr sz="3000" b="1">
+                <a:solidFill>
+                  <a:srgbClr val="D8DADD"/>
+                </a:solidFill>
+                <a:latin typeface="맑은 고딕"/>
+                <a:ea typeface="맑은 고딕"/>
+              </a:rPr>
+              <a:t>05</a:t>
+            </a:r>
+          </a:p>
+        </p:txBody>
+      </p:sp>
+      <p:sp>
+        <p:nvSpPr>
+          <p:cNvPr id="7" name="TextBox 6"/>
+          <p:cNvSpPr txBox="1"/>
+          <p:nvPr/>
+        </p:nvSpPr>
+        <p:spPr>
+          <a:xfrm>
+            <a:off x="502920" y="6492240"/>
+            <a:ext cx="11247120" cy="320040"/>
+          </a:xfrm>
+          <a:prstGeom prst="rect">
+            <a:avLst/>
+          </a:prstGeom>
+          <a:noFill/>
+        </p:spPr>
+        <p:txBody>
+          <a:bodyPr wrap="square" anchor="t">
+            <a:spAutoFit/>
+          </a:bodyPr>
+          <a:lstStyle/>
           <a:p>
             <a:pPr>
               <a:lnSpc>
                 <a:spcPct val="114000"/>
               </a:lnSpc>
               <a:spcAft>
-                <a:spcPts val="200"/>
-              </a:spcAft>
-            </a:pPr>
-            <a:r>
-              <a:rPr sz="1200" b="0">
-                <a:solidFill>
-                  <a:srgbClr val="1C1C1E"/>
-                </a:solidFill>
-                <a:latin typeface="맑은 고딕"/>
-                <a:ea typeface="맑은 고딕"/>
-              </a:rPr>
-              <a:t>현행 지정은 공표된 판정식대로 실제 작동하는가?</a:t>
-            </a:r>
-          </a:p>
-          <a:p>
-            <a:pPr>
-              <a:lnSpc>
-                <a:spcPct val="114000"/>
-              </a:lnSpc>
-              <a:spcAft>
-                <a:spcPts val="200"/>
-              </a:spcAft>
-            </a:pPr>
-            <a:r>
-              <a:rPr sz="1200" b="0">
-                <a:solidFill>
-                  <a:srgbClr val="1C1C1E"/>
-                </a:solidFill>
-                <a:latin typeface="맑은 고딕"/>
-                <a:ea typeface="맑은 고딕"/>
-              </a:rPr>
-              <a:t>공급(관내 인프라) 변수는 판정에 반영되는가?</a:t>
-            </a:r>
-          </a:p>
-        </p:txBody>
-      </p:sp>
-      <p:sp>
-        <p:nvSpPr>
-          <p:cNvPr id="11" name="Rounded Rectangle 10"/>
+                <a:spcPts val="0"/>
+              </a:spcAft>
+            </a:pPr>
+            <a:r>
+              <a:rPr sz="850" b="0">
+                <a:solidFill>
+                  <a:srgbClr val="B2B5B9"/>
+                </a:solidFill>
+                <a:latin typeface="맑은 고딕"/>
+                <a:ea typeface="맑은 고딕"/>
+              </a:rPr>
+              <a:t>2026 명지대학교 창의적 SW프로그램 경진대회 · 빅데이터 분석 — 데이터 분석 계획서</a:t>
+            </a:r>
+          </a:p>
+        </p:txBody>
+      </p:sp>
+      <p:sp>
+        <p:nvSpPr>
+          <p:cNvPr id="8" name="Rounded Rectangle 7"/>
           <p:cNvSpPr/>
           <p:nvPr/>
         </p:nvSpPr>
         <p:spPr>
           <a:xfrm>
-            <a:off x="6263640" y="1371600"/>
+            <a:off x="502920" y="1371600"/>
             <a:ext cx="5532120" cy="1737360"/>
           </a:xfrm>
           <a:prstGeom prst="roundRect">
@@ -10531,13 +12357,13 @@
       </p:sp>
       <p:sp>
         <p:nvSpPr>
-          <p:cNvPr id="12" name="Rounded Rectangle 11"/>
+          <p:cNvPr id="9" name="Rounded Rectangle 8"/>
           <p:cNvSpPr/>
           <p:nvPr/>
         </p:nvSpPr>
         <p:spPr>
           <a:xfrm>
-            <a:off x="6281927" y="1600200"/>
+            <a:off x="521208" y="1600200"/>
             <a:ext cx="82296" cy="1280160"/>
           </a:xfrm>
           <a:prstGeom prst="roundRect">
@@ -10591,13 +12417,13 @@
       </p:sp>
       <p:sp>
         <p:nvSpPr>
-          <p:cNvPr id="13" name="TextBox 12"/>
+          <p:cNvPr id="10" name="TextBox 9"/>
           <p:cNvSpPr txBox="1"/>
           <p:nvPr/>
         </p:nvSpPr>
         <p:spPr>
           <a:xfrm>
-            <a:off x="6583679" y="1536192"/>
+            <a:off x="822960" y="1536192"/>
             <a:ext cx="5074920" cy="1463040"/>
           </a:xfrm>
           <a:prstGeom prst="rect">
@@ -10627,7 +12453,7 @@
                 <a:latin typeface="맑은 고딕"/>
                 <a:ea typeface="맑은 고딕"/>
               </a:rPr>
-              <a:t>RQ2 · 사각지대 탐지</a:t>
+              <a:t>RQ1 · 지정의 검증</a:t>
             </a:r>
           </a:p>
           <a:p>
@@ -10647,7 +12473,7 @@
                 <a:latin typeface="맑은 고딕"/>
                 <a:ea typeface="맑은 고딕"/>
               </a:rPr>
-              <a:t>판정식이 구조적으로 놓치는 지역이 실재하는가?</a:t>
+              <a:t>현행 지정은 공표된 판정식대로 실제 작동하는가?</a:t>
             </a:r>
           </a:p>
           <a:p>
@@ -10667,20 +12493,20 @@
                 <a:latin typeface="맑은 고딕"/>
                 <a:ea typeface="맑은 고딕"/>
               </a:rPr>
-              <a:t>(거리 기준은 통과하지만 관내 공급이 소멸한 지역)</a:t>
-            </a:r>
-          </a:p>
-        </p:txBody>
-      </p:sp>
-      <p:sp>
-        <p:nvSpPr>
-          <p:cNvPr id="14" name="Rounded Rectangle 13"/>
+              <a:t>공급(관내 인프라) 변수는 판정에 반영되는가?</a:t>
+            </a:r>
+          </a:p>
+        </p:txBody>
+      </p:sp>
+      <p:sp>
+        <p:nvSpPr>
+          <p:cNvPr id="11" name="Rounded Rectangle 10"/>
           <p:cNvSpPr/>
           <p:nvPr/>
         </p:nvSpPr>
         <p:spPr>
           <a:xfrm>
-            <a:off x="502920" y="3337560"/>
+            <a:off x="6263640" y="1371600"/>
             <a:ext cx="5532120" cy="1737360"/>
           </a:xfrm>
           <a:prstGeom prst="roundRect">
@@ -10728,13 +12554,13 @@
       </p:sp>
       <p:sp>
         <p:nvSpPr>
-          <p:cNvPr id="15" name="Rounded Rectangle 14"/>
+          <p:cNvPr id="12" name="Rounded Rectangle 11"/>
           <p:cNvSpPr/>
           <p:nvPr/>
         </p:nvSpPr>
         <p:spPr>
           <a:xfrm>
-            <a:off x="521208" y="3566160"/>
+            <a:off x="6281927" y="1600200"/>
             <a:ext cx="82296" cy="1280160"/>
           </a:xfrm>
           <a:prstGeom prst="roundRect">
@@ -10788,13 +12614,13 @@
       </p:sp>
       <p:sp>
         <p:nvSpPr>
-          <p:cNvPr id="16" name="TextBox 15"/>
+          <p:cNvPr id="13" name="TextBox 12"/>
           <p:cNvSpPr txBox="1"/>
           <p:nvPr/>
         </p:nvSpPr>
         <p:spPr>
           <a:xfrm>
-            <a:off x="822960" y="3502152"/>
+            <a:off x="6583679" y="1536192"/>
             <a:ext cx="5074920" cy="1463040"/>
           </a:xfrm>
           <a:prstGeom prst="rect">
@@ -10824,7 +12650,7 @@
                 <a:latin typeface="맑은 고딕"/>
                 <a:ea typeface="맑은 고딕"/>
               </a:rPr>
-              <a:t>RQ3 · 배분의 진단</a:t>
+              <a:t>RQ2 · 사각지대 탐지</a:t>
             </a:r>
           </a:p>
           <a:p>
@@ -10844,7 +12670,7 @@
                 <a:latin typeface="맑은 고딕"/>
                 <a:ea typeface="맑은 고딕"/>
               </a:rPr>
-              <a:t>지정 이후의 지원 배분은 공개 지표로 설명되는가?</a:t>
+              <a:t>판정식이 구조적으로 놓치는 지역이 실재하는가?</a:t>
             </a:r>
           </a:p>
           <a:p>
@@ -10864,20 +12690,20 @@
                 <a:latin typeface="맑은 고딕"/>
                 <a:ea typeface="맑은 고딕"/>
               </a:rPr>
-              <a:t>등급·취약도·수요 중 무엇이 선정을 갈랐는가?</a:t>
-            </a:r>
-          </a:p>
-        </p:txBody>
-      </p:sp>
-      <p:sp>
-        <p:nvSpPr>
-          <p:cNvPr id="17" name="Rounded Rectangle 16"/>
+              <a:t>(거리 기준은 통과하지만 관내 공급이 소멸한 지역)</a:t>
+            </a:r>
+          </a:p>
+        </p:txBody>
+      </p:sp>
+      <p:sp>
+        <p:nvSpPr>
+          <p:cNvPr id="14" name="Rounded Rectangle 13"/>
           <p:cNvSpPr/>
           <p:nvPr/>
         </p:nvSpPr>
         <p:spPr>
           <a:xfrm>
-            <a:off x="6263640" y="3337560"/>
+            <a:off x="502920" y="3337560"/>
             <a:ext cx="5532120" cy="1737360"/>
           </a:xfrm>
           <a:prstGeom prst="roundRect">
@@ -10925,13 +12751,13 @@
       </p:sp>
       <p:sp>
         <p:nvSpPr>
-          <p:cNvPr id="18" name="Rounded Rectangle 17"/>
+          <p:cNvPr id="15" name="Rounded Rectangle 14"/>
           <p:cNvSpPr/>
           <p:nvPr/>
         </p:nvSpPr>
         <p:spPr>
           <a:xfrm>
-            <a:off x="6281927" y="3566160"/>
+            <a:off x="521208" y="3566160"/>
             <a:ext cx="82296" cy="1280160"/>
           </a:xfrm>
           <a:prstGeom prst="roundRect">
@@ -10985,13 +12811,13 @@
       </p:sp>
       <p:sp>
         <p:nvSpPr>
-          <p:cNvPr id="19" name="TextBox 18"/>
+          <p:cNvPr id="16" name="TextBox 15"/>
           <p:cNvSpPr txBox="1"/>
           <p:nvPr/>
         </p:nvSpPr>
         <p:spPr>
           <a:xfrm>
-            <a:off x="6583679" y="3502152"/>
+            <a:off x="822960" y="3502152"/>
             <a:ext cx="5074920" cy="1463040"/>
           </a:xfrm>
           <a:prstGeom prst="rect">
@@ -11021,7 +12847,7 @@
                 <a:latin typeface="맑은 고딕"/>
                 <a:ea typeface="맑은 고딕"/>
               </a:rPr>
-              <a:t>RQ4 · 처방과 대조</a:t>
+              <a:t>RQ3 · 배분의 진단</a:t>
             </a:r>
           </a:p>
           <a:p>
@@ -11041,7 +12867,7 @@
                 <a:latin typeface="맑은 고딕"/>
                 <a:ea typeface="맑은 고딕"/>
               </a:rPr>
-              <a:t>정부가 이미 정한 기준만 조합해 배분 규칙을 만들면</a:t>
+              <a:t>지정 이후의 지원 배분은 공개 지표로 설명되는가?</a:t>
             </a:r>
           </a:p>
           <a:p>
@@ -11061,113 +12887,42 @@
                 <a:latin typeface="맑은 고딕"/>
                 <a:ea typeface="맑은 고딕"/>
               </a:rPr>
-              <a:t>현행 배분과 어디가 어긋나는가?</a:t>
-            </a:r>
-          </a:p>
-        </p:txBody>
-      </p:sp>
-      <p:sp>
-        <p:nvSpPr>
-          <p:cNvPr id="20" name="TextBox 19"/>
-          <p:cNvSpPr txBox="1"/>
-          <p:nvPr/>
-        </p:nvSpPr>
-        <p:spPr>
-          <a:xfrm>
-            <a:off x="502920" y="5440680"/>
-            <a:ext cx="11247120" cy="822960"/>
-          </a:xfrm>
-          <a:prstGeom prst="rect">
-            <a:avLst/>
-          </a:prstGeom>
-          <a:noFill/>
-        </p:spPr>
-        <p:txBody>
-          <a:bodyPr wrap="square" anchor="t">
-            <a:spAutoFit/>
-          </a:bodyPr>
-          <a:lstStyle/>
-          <a:p>
-            <a:pPr>
-              <a:lnSpc>
-                <a:spcPct val="114000"/>
-              </a:lnSpc>
-              <a:spcAft>
-                <a:spcPts val="300"/>
-              </a:spcAft>
-            </a:pPr>
-            <a:r>
-              <a:rPr sz="1250" b="1">
-                <a:solidFill>
-                  <a:srgbClr val="1C1C1E"/>
-                </a:solidFill>
-                <a:latin typeface="맑은 고딕"/>
-                <a:ea typeface="맑은 고딕"/>
-              </a:rPr>
-              <a:t>RQ1·2는 지정을, RQ3·4는 배분을 본다. 앞의 둘로 "규칙이 무엇을 보는가"를 확정해야 뒤의 둘에서 "그 규칙대로 나눠지고 있는가"를 물을 수 있다.</a:t>
-            </a:r>
-          </a:p>
-          <a:p>
-            <a:pPr>
-              <a:lnSpc>
-                <a:spcPct val="114000"/>
-              </a:lnSpc>
-              <a:spcAft>
-                <a:spcPts val="0"/>
-              </a:spcAft>
-            </a:pPr>
-            <a:r>
-              <a:rPr sz="1200" b="0">
-                <a:solidFill>
-                  <a:srgbClr val="767A7F"/>
-                </a:solidFill>
-                <a:latin typeface="맑은 고딕"/>
-                <a:ea typeface="맑은 고딕"/>
-              </a:rPr>
-              <a:t>무엇을 "재현 성공"으로 볼지, 무엇을 "사각지대"로 볼지는 분석을 시작하기 전에 정해 둔다 — 결과를 보고 기준을 맞추지 않기 위해서다.</a:t>
-            </a:r>
-          </a:p>
-        </p:txBody>
-      </p:sp>
-    </p:spTree>
-  </p:cSld>
-  <p:clrMapOvr>
-    <a:masterClrMapping/>
-  </p:clrMapOvr>
-</p:sld>
-</file>
-
-<file path=ppt/slides/slide5.xml><?xml version="1.0" encoding="utf-8"?>
-<p:sld xmlns:a="http://schemas.openxmlformats.org/drawingml/2006/main" xmlns:p="http://schemas.openxmlformats.org/presentationml/2006/main" xmlns:r="http://schemas.openxmlformats.org/officeDocument/2006/relationships">
-  <p:cSld>
-    <p:spTree>
-      <p:nvGrpSpPr>
-        <p:cNvPr id="1" name=""/>
-        <p:cNvGrpSpPr/>
-        <p:nvPr/>
-      </p:nvGrpSpPr>
-      <p:grpSpPr/>
-      <p:sp>
-        <p:nvSpPr>
-          <p:cNvPr id="2" name="Rectangle 1"/>
+              <a:t>등급·취약도·수요 중 무엇이 선정을 갈랐는가?</a:t>
+            </a:r>
+          </a:p>
+        </p:txBody>
+      </p:sp>
+      <p:sp>
+        <p:nvSpPr>
+          <p:cNvPr id="17" name="Rounded Rectangle 16"/>
           <p:cNvSpPr/>
           <p:nvPr/>
         </p:nvSpPr>
         <p:spPr>
           <a:xfrm>
-            <a:off x="0" y="0"/>
-            <a:ext cx="12191695" cy="6858000"/>
-          </a:xfrm>
-          <a:prstGeom prst="rect">
-            <a:avLst/>
+            <a:off x="6263640" y="3337560"/>
+            <a:ext cx="5532120" cy="1737360"/>
+          </a:xfrm>
+          <a:prstGeom prst="roundRect">
+            <a:avLst>
+              <a:gd name="adj" fmla="val 4736"/>
+            </a:avLst>
           </a:prstGeom>
           <a:solidFill>
             <a:srgbClr val="FFFFFF"/>
           </a:solidFill>
-          <a:ln>
-            <a:noFill/>
+          <a:ln w="12700">
+            <a:solidFill>
+              <a:srgbClr val="E4E6E9"/>
+            </a:solidFill>
           </a:ln>
-          <a:effectLst/>
+          <a:effectLst>
+            <a:outerShdw blurRad="182880" dist="64008" dir="5400000" rotWithShape="0">
+              <a:srgbClr val="000000">
+                <a:alpha val="30000"/>
+              </a:srgbClr>
+            </a:outerShdw>
+          </a:effectLst>
         </p:spPr>
         <p:style>
           <a:lnRef idx="1">
@@ -11193,14 +12948,14 @@
       </p:sp>
       <p:sp>
         <p:nvSpPr>
-          <p:cNvPr id="3" name="Rounded Rectangle 2"/>
+          <p:cNvPr id="18" name="Rounded Rectangle 17"/>
           <p:cNvSpPr/>
           <p:nvPr/>
         </p:nvSpPr>
         <p:spPr>
           <a:xfrm>
-            <a:off x="502920" y="475488"/>
-            <a:ext cx="310896" cy="310896"/>
+            <a:off x="6281927" y="3566160"/>
+            <a:ext cx="82296" cy="1280160"/>
           </a:xfrm>
           <a:prstGeom prst="roundRect">
             <a:avLst>
@@ -11253,6 +13008,274 @@
       </p:sp>
       <p:sp>
         <p:nvSpPr>
+          <p:cNvPr id="19" name="TextBox 18"/>
+          <p:cNvSpPr txBox="1"/>
+          <p:nvPr/>
+        </p:nvSpPr>
+        <p:spPr>
+          <a:xfrm>
+            <a:off x="6583679" y="3502152"/>
+            <a:ext cx="5074920" cy="1463040"/>
+          </a:xfrm>
+          <a:prstGeom prst="rect">
+            <a:avLst/>
+          </a:prstGeom>
+          <a:noFill/>
+        </p:spPr>
+        <p:txBody>
+          <a:bodyPr wrap="square" anchor="t">
+            <a:spAutoFit/>
+          </a:bodyPr>
+          <a:lstStyle/>
+          <a:p>
+            <a:pPr>
+              <a:lnSpc>
+                <a:spcPct val="114000"/>
+              </a:lnSpc>
+              <a:spcAft>
+                <a:spcPts val="500"/>
+              </a:spcAft>
+            </a:pPr>
+            <a:r>
+              <a:rPr sz="1500" b="1">
+                <a:solidFill>
+                  <a:srgbClr val="33393F"/>
+                </a:solidFill>
+                <a:latin typeface="맑은 고딕"/>
+                <a:ea typeface="맑은 고딕"/>
+              </a:rPr>
+              <a:t>RQ4 · 처방과 대조</a:t>
+            </a:r>
+          </a:p>
+          <a:p>
+            <a:pPr>
+              <a:lnSpc>
+                <a:spcPct val="114000"/>
+              </a:lnSpc>
+              <a:spcAft>
+                <a:spcPts val="200"/>
+              </a:spcAft>
+            </a:pPr>
+            <a:r>
+              <a:rPr sz="1200" b="0">
+                <a:solidFill>
+                  <a:srgbClr val="1C1C1E"/>
+                </a:solidFill>
+                <a:latin typeface="맑은 고딕"/>
+                <a:ea typeface="맑은 고딕"/>
+              </a:rPr>
+              <a:t>정부가 이미 정한 기준만 조합해 배분 규칙을 만들면</a:t>
+            </a:r>
+          </a:p>
+          <a:p>
+            <a:pPr>
+              <a:lnSpc>
+                <a:spcPct val="114000"/>
+              </a:lnSpc>
+              <a:spcAft>
+                <a:spcPts val="200"/>
+              </a:spcAft>
+            </a:pPr>
+            <a:r>
+              <a:rPr sz="1200" b="0">
+                <a:solidFill>
+                  <a:srgbClr val="1C1C1E"/>
+                </a:solidFill>
+                <a:latin typeface="맑은 고딕"/>
+                <a:ea typeface="맑은 고딕"/>
+              </a:rPr>
+              <a:t>현행 배분과 어디가 어긋나는가?</a:t>
+            </a:r>
+          </a:p>
+        </p:txBody>
+      </p:sp>
+      <p:sp>
+        <p:nvSpPr>
+          <p:cNvPr id="20" name="TextBox 19"/>
+          <p:cNvSpPr txBox="1"/>
+          <p:nvPr/>
+        </p:nvSpPr>
+        <p:spPr>
+          <a:xfrm>
+            <a:off x="502920" y="5440680"/>
+            <a:ext cx="11247120" cy="822960"/>
+          </a:xfrm>
+          <a:prstGeom prst="rect">
+            <a:avLst/>
+          </a:prstGeom>
+          <a:noFill/>
+        </p:spPr>
+        <p:txBody>
+          <a:bodyPr wrap="square" anchor="t">
+            <a:spAutoFit/>
+          </a:bodyPr>
+          <a:lstStyle/>
+          <a:p>
+            <a:pPr>
+              <a:lnSpc>
+                <a:spcPct val="114000"/>
+              </a:lnSpc>
+              <a:spcAft>
+                <a:spcPts val="300"/>
+              </a:spcAft>
+            </a:pPr>
+            <a:r>
+              <a:rPr sz="1250" b="1">
+                <a:solidFill>
+                  <a:srgbClr val="1C1C1E"/>
+                </a:solidFill>
+                <a:latin typeface="맑은 고딕"/>
+                <a:ea typeface="맑은 고딕"/>
+              </a:rPr>
+              <a:t>RQ1·2는 지정을, RQ3·4는 배분을 본다. 앞의 둘로 "규칙이 무엇을 보는가"를 확정해야 뒤의 둘에서 "그 규칙대로 나눠지고 있는가"를 물을 수 있다.</a:t>
+            </a:r>
+          </a:p>
+          <a:p>
+            <a:pPr>
+              <a:lnSpc>
+                <a:spcPct val="114000"/>
+              </a:lnSpc>
+              <a:spcAft>
+                <a:spcPts val="0"/>
+              </a:spcAft>
+            </a:pPr>
+            <a:r>
+              <a:rPr sz="1200" b="0">
+                <a:solidFill>
+                  <a:srgbClr val="767A7F"/>
+                </a:solidFill>
+                <a:latin typeface="맑은 고딕"/>
+                <a:ea typeface="맑은 고딕"/>
+              </a:rPr>
+              <a:t>무엇을 "재현 성공"으로 볼지, 무엇을 "사각지대"로 볼지는 분석을 시작하기 전에 정해 둔다 — 결과를 보고 기준을 맞추지 않기 위해서다.</a:t>
+            </a:r>
+          </a:p>
+        </p:txBody>
+      </p:sp>
+    </p:spTree>
+  </p:cSld>
+  <p:clrMapOvr>
+    <a:masterClrMapping/>
+  </p:clrMapOvr>
+</p:sld>
+</file>
+
+<file path=ppt/slides/slide6.xml><?xml version="1.0" encoding="utf-8"?>
+<p:sld xmlns:a="http://schemas.openxmlformats.org/drawingml/2006/main" xmlns:p="http://schemas.openxmlformats.org/presentationml/2006/main" xmlns:r="http://schemas.openxmlformats.org/officeDocument/2006/relationships">
+  <p:cSld>
+    <p:spTree>
+      <p:nvGrpSpPr>
+        <p:cNvPr id="1" name=""/>
+        <p:cNvGrpSpPr/>
+        <p:nvPr/>
+      </p:nvGrpSpPr>
+      <p:grpSpPr/>
+      <p:sp>
+        <p:nvSpPr>
+          <p:cNvPr id="2" name="Rectangle 1"/>
+          <p:cNvSpPr/>
+          <p:nvPr/>
+        </p:nvSpPr>
+        <p:spPr>
+          <a:xfrm>
+            <a:off x="0" y="0"/>
+            <a:ext cx="12191695" cy="6858000"/>
+          </a:xfrm>
+          <a:prstGeom prst="rect">
+            <a:avLst/>
+          </a:prstGeom>
+          <a:solidFill>
+            <a:srgbClr val="FFFFFF"/>
+          </a:solidFill>
+          <a:ln>
+            <a:noFill/>
+          </a:ln>
+          <a:effectLst/>
+        </p:spPr>
+        <p:style>
+          <a:lnRef idx="1">
+            <a:schemeClr val="accent1"/>
+          </a:lnRef>
+          <a:fillRef idx="3">
+            <a:schemeClr val="accent1"/>
+          </a:fillRef>
+          <a:effectRef idx="2">
+            <a:schemeClr val="accent1"/>
+          </a:effectRef>
+          <a:fontRef idx="minor">
+            <a:schemeClr val="lt1"/>
+          </a:fontRef>
+        </p:style>
+        <p:txBody>
+          <a:bodyPr rtlCol="0" anchor="ctr"/>
+          <a:lstStyle/>
+          <a:p>
+            <a:pPr algn="ctr"/>
+          </a:p>
+        </p:txBody>
+      </p:sp>
+      <p:sp>
+        <p:nvSpPr>
+          <p:cNvPr id="3" name="Rounded Rectangle 2"/>
+          <p:cNvSpPr/>
+          <p:nvPr/>
+        </p:nvSpPr>
+        <p:spPr>
+          <a:xfrm>
+            <a:off x="502920" y="475488"/>
+            <a:ext cx="310896" cy="310896"/>
+          </a:xfrm>
+          <a:prstGeom prst="roundRect">
+            <a:avLst>
+              <a:gd name="adj" fmla="val 50000"/>
+            </a:avLst>
+          </a:prstGeom>
+          <a:gradFill rotWithShape="1">
+            <a:gsLst>
+              <a:gs pos="0">
+                <a:srgbClr val="3A3F45"/>
+              </a:gs>
+              <a:gs pos="100000">
+                <a:srgbClr val="73787E"/>
+              </a:gs>
+            </a:gsLst>
+            <a:lin scaled="0" ang="18900000"/>
+          </a:gradFill>
+          <a:ln>
+            <a:noFill/>
+          </a:ln>
+          <a:effectLst>
+            <a:outerShdw blurRad="109728" dist="36576" dir="5400000" rotWithShape="0">
+              <a:srgbClr val="000000">
+                <a:alpha val="35000"/>
+              </a:srgbClr>
+            </a:outerShdw>
+          </a:effectLst>
+        </p:spPr>
+        <p:style>
+          <a:lnRef idx="1">
+            <a:schemeClr val="accent1"/>
+          </a:lnRef>
+          <a:fillRef idx="3">
+            <a:schemeClr val="accent1"/>
+          </a:fillRef>
+          <a:effectRef idx="2">
+            <a:schemeClr val="accent1"/>
+          </a:effectRef>
+          <a:fontRef idx="minor">
+            <a:schemeClr val="lt1"/>
+          </a:fontRef>
+        </p:style>
+        <p:txBody>
+          <a:bodyPr rtlCol="0" anchor="ctr"/>
+          <a:lstStyle/>
+          <a:p>
+            <a:pPr algn="ctr"/>
+          </a:p>
+        </p:txBody>
+      </p:sp>
+      <p:sp>
+        <p:nvSpPr>
           <p:cNvPr id="4" name="TextBox 3"/>
           <p:cNvSpPr txBox="1"/>
           <p:nvPr/>
@@ -11384,7 +13407,7 @@
                 <a:latin typeface="맑은 고딕"/>
                 <a:ea typeface="맑은 고딕"/>
               </a:rPr>
-              <a:t>05</a:t>
+              <a:t>06</a:t>
             </a:r>
           </a:p>
         </p:txBody>
@@ -12075,7 +14098,7 @@
 </p:sld>
 </file>
 
-<file path=ppt/slides/slide6.xml><?xml version="1.0" encoding="utf-8"?>
+<file path=ppt/slides/slide7.xml><?xml version="1.0" encoding="utf-8"?>
 <p:sld xmlns:a="http://schemas.openxmlformats.org/drawingml/2006/main" xmlns:p="http://schemas.openxmlformats.org/presentationml/2006/main" xmlns:r="http://schemas.openxmlformats.org/officeDocument/2006/relationships">
   <p:cSld>
     <p:spTree>
@@ -12322,7 +14345,7 @@
                 <a:latin typeface="맑은 고딕"/>
                 <a:ea typeface="맑은 고딕"/>
               </a:rPr>
-              <a:t>06</a:t>
+              <a:t>07</a:t>
             </a:r>
           </a:p>
         </p:txBody>
@@ -13126,7 +15149,7 @@
 </p:sld>
 </file>
 
-<file path=ppt/slides/slide7.xml><?xml version="1.0" encoding="utf-8"?>
+<file path=ppt/slides/slide8.xml><?xml version="1.0" encoding="utf-8"?>
 <p:sld xmlns:a="http://schemas.openxmlformats.org/drawingml/2006/main" xmlns:p="http://schemas.openxmlformats.org/presentationml/2006/main" xmlns:r="http://schemas.openxmlformats.org/officeDocument/2006/relationships">
   <p:cSld>
     <p:spTree>
@@ -13373,7 +15396,7 @@
                 <a:latin typeface="맑은 고딕"/>
                 <a:ea typeface="맑은 고딕"/>
               </a:rPr>
-              <a:t>07</a:t>
+              <a:t>08</a:t>
             </a:r>
           </a:p>
         </p:txBody>
@@ -14237,7 +16260,7 @@
 </p:sld>
 </file>
 
-<file path=ppt/slides/slide8.xml><?xml version="1.0" encoding="utf-8"?>
+<file path=ppt/slides/slide9.xml><?xml version="1.0" encoding="utf-8"?>
 <p:sld xmlns:a="http://schemas.openxmlformats.org/drawingml/2006/main" xmlns:p="http://schemas.openxmlformats.org/presentationml/2006/main" xmlns:r="http://schemas.openxmlformats.org/officeDocument/2006/relationships">
   <p:cSld>
     <p:spTree>
@@ -14484,7 +16507,7 @@
                 <a:latin typeface="맑은 고딕"/>
                 <a:ea typeface="맑은 고딕"/>
               </a:rPr>
-              <a:t>08</a:t>
+              <a:t>09</a:t>
             </a:r>
           </a:p>
         </p:txBody>
@@ -15071,900 +17094,6 @@
 </p:sld>
 </file>
 
-<file path=ppt/slides/slide9.xml><?xml version="1.0" encoding="utf-8"?>
-<p:sld xmlns:a="http://schemas.openxmlformats.org/drawingml/2006/main" xmlns:p="http://schemas.openxmlformats.org/presentationml/2006/main" xmlns:r="http://schemas.openxmlformats.org/officeDocument/2006/relationships">
-  <p:cSld>
-    <p:spTree>
-      <p:nvGrpSpPr>
-        <p:cNvPr id="1" name=""/>
-        <p:cNvGrpSpPr/>
-        <p:nvPr/>
-      </p:nvGrpSpPr>
-      <p:grpSpPr/>
-      <p:sp>
-        <p:nvSpPr>
-          <p:cNvPr id="2" name="Rectangle 1"/>
-          <p:cNvSpPr/>
-          <p:nvPr/>
-        </p:nvSpPr>
-        <p:spPr>
-          <a:xfrm>
-            <a:off x="0" y="0"/>
-            <a:ext cx="12191695" cy="6858000"/>
-          </a:xfrm>
-          <a:prstGeom prst="rect">
-            <a:avLst/>
-          </a:prstGeom>
-          <a:solidFill>
-            <a:srgbClr val="FFFFFF"/>
-          </a:solidFill>
-          <a:ln>
-            <a:noFill/>
-          </a:ln>
-          <a:effectLst/>
-        </p:spPr>
-        <p:style>
-          <a:lnRef idx="1">
-            <a:schemeClr val="accent1"/>
-          </a:lnRef>
-          <a:fillRef idx="3">
-            <a:schemeClr val="accent1"/>
-          </a:fillRef>
-          <a:effectRef idx="2">
-            <a:schemeClr val="accent1"/>
-          </a:effectRef>
-          <a:fontRef idx="minor">
-            <a:schemeClr val="lt1"/>
-          </a:fontRef>
-        </p:style>
-        <p:txBody>
-          <a:bodyPr rtlCol="0" anchor="ctr"/>
-          <a:lstStyle/>
-          <a:p>
-            <a:pPr algn="ctr"/>
-          </a:p>
-        </p:txBody>
-      </p:sp>
-      <p:sp>
-        <p:nvSpPr>
-          <p:cNvPr id="3" name="Rounded Rectangle 2"/>
-          <p:cNvSpPr/>
-          <p:nvPr/>
-        </p:nvSpPr>
-        <p:spPr>
-          <a:xfrm>
-            <a:off x="502920" y="475488"/>
-            <a:ext cx="310896" cy="310896"/>
-          </a:xfrm>
-          <a:prstGeom prst="roundRect">
-            <a:avLst>
-              <a:gd name="adj" fmla="val 50000"/>
-            </a:avLst>
-          </a:prstGeom>
-          <a:gradFill rotWithShape="1">
-            <a:gsLst>
-              <a:gs pos="0">
-                <a:srgbClr val="3A3F45"/>
-              </a:gs>
-              <a:gs pos="100000">
-                <a:srgbClr val="73787E"/>
-              </a:gs>
-            </a:gsLst>
-            <a:lin scaled="0" ang="18900000"/>
-          </a:gradFill>
-          <a:ln>
-            <a:noFill/>
-          </a:ln>
-          <a:effectLst>
-            <a:outerShdw blurRad="109728" dist="36576" dir="5400000" rotWithShape="0">
-              <a:srgbClr val="000000">
-                <a:alpha val="35000"/>
-              </a:srgbClr>
-            </a:outerShdw>
-          </a:effectLst>
-        </p:spPr>
-        <p:style>
-          <a:lnRef idx="1">
-            <a:schemeClr val="accent1"/>
-          </a:lnRef>
-          <a:fillRef idx="3">
-            <a:schemeClr val="accent1"/>
-          </a:fillRef>
-          <a:effectRef idx="2">
-            <a:schemeClr val="accent1"/>
-          </a:effectRef>
-          <a:fontRef idx="minor">
-            <a:schemeClr val="lt1"/>
-          </a:fontRef>
-        </p:style>
-        <p:txBody>
-          <a:bodyPr rtlCol="0" anchor="ctr"/>
-          <a:lstStyle/>
-          <a:p>
-            <a:pPr algn="ctr"/>
-          </a:p>
-        </p:txBody>
-      </p:sp>
-      <p:sp>
-        <p:nvSpPr>
-          <p:cNvPr id="4" name="TextBox 3"/>
-          <p:cNvSpPr txBox="1"/>
-          <p:nvPr/>
-        </p:nvSpPr>
-        <p:spPr>
-          <a:xfrm>
-            <a:off x="960120" y="274320"/>
-            <a:ext cx="9692640" cy="685800"/>
-          </a:xfrm>
-          <a:prstGeom prst="rect">
-            <a:avLst/>
-          </a:prstGeom>
-          <a:noFill/>
-        </p:spPr>
-        <p:txBody>
-          <a:bodyPr wrap="square" anchor="ctr">
-            <a:spAutoFit/>
-          </a:bodyPr>
-          <a:lstStyle/>
-          <a:p>
-            <a:pPr>
-              <a:lnSpc>
-                <a:spcPct val="114000"/>
-              </a:lnSpc>
-              <a:spcAft>
-                <a:spcPts val="0"/>
-              </a:spcAft>
-            </a:pPr>
-            <a:r>
-              <a:rPr sz="2150" b="1">
-                <a:solidFill>
-                  <a:srgbClr val="1C1C1E"/>
-                </a:solidFill>
-                <a:latin typeface="맑은 고딕"/>
-                <a:ea typeface="맑은 고딕"/>
-              </a:rPr>
-              <a:t>분석 설계 ① 지정 감사 (RQ1·RQ2)</a:t>
-            </a:r>
-          </a:p>
-        </p:txBody>
-      </p:sp>
-      <p:sp>
-        <p:nvSpPr>
-          <p:cNvPr id="5" name="Rectangle 4"/>
-          <p:cNvSpPr/>
-          <p:nvPr/>
-        </p:nvSpPr>
-        <p:spPr>
-          <a:xfrm>
-            <a:off x="521207" y="969264"/>
-            <a:ext cx="4206240" cy="27432"/>
-          </a:xfrm>
-          <a:prstGeom prst="rect">
-            <a:avLst/>
-          </a:prstGeom>
-          <a:gradFill rotWithShape="1">
-            <a:gsLst>
-              <a:gs pos="0">
-                <a:srgbClr val="2A2E33"/>
-              </a:gs>
-              <a:gs pos="100000">
-                <a:srgbClr val="FFFFFF"/>
-              </a:gs>
-            </a:gsLst>
-            <a:lin scaled="0" ang="0"/>
-          </a:gradFill>
-          <a:ln>
-            <a:noFill/>
-          </a:ln>
-          <a:effectLst/>
-        </p:spPr>
-        <p:style>
-          <a:lnRef idx="1">
-            <a:schemeClr val="accent1"/>
-          </a:lnRef>
-          <a:fillRef idx="3">
-            <a:schemeClr val="accent1"/>
-          </a:fillRef>
-          <a:effectRef idx="2">
-            <a:schemeClr val="accent1"/>
-          </a:effectRef>
-          <a:fontRef idx="minor">
-            <a:schemeClr val="lt1"/>
-          </a:fontRef>
-        </p:style>
-        <p:txBody>
-          <a:bodyPr rtlCol="0" anchor="ctr"/>
-          <a:lstStyle/>
-          <a:p>
-            <a:pPr algn="ctr"/>
-          </a:p>
-        </p:txBody>
-      </p:sp>
-      <p:sp>
-        <p:nvSpPr>
-          <p:cNvPr id="6" name="TextBox 5"/>
-          <p:cNvSpPr txBox="1"/>
-          <p:nvPr/>
-        </p:nvSpPr>
-        <p:spPr>
-          <a:xfrm>
-            <a:off x="10835640" y="164592"/>
-            <a:ext cx="1188720" cy="777240"/>
-          </a:xfrm>
-          <a:prstGeom prst="rect">
-            <a:avLst/>
-          </a:prstGeom>
-          <a:noFill/>
-        </p:spPr>
-        <p:txBody>
-          <a:bodyPr wrap="square" anchor="t">
-            <a:spAutoFit/>
-          </a:bodyPr>
-          <a:lstStyle/>
-          <a:p>
-            <a:pPr>
-              <a:lnSpc>
-                <a:spcPct val="114000"/>
-              </a:lnSpc>
-              <a:spcAft>
-                <a:spcPts val="0"/>
-              </a:spcAft>
-            </a:pPr>
-            <a:r>
-              <a:rPr sz="3000" b="1">
-                <a:solidFill>
-                  <a:srgbClr val="D8DADD"/>
-                </a:solidFill>
-                <a:latin typeface="맑은 고딕"/>
-                <a:ea typeface="맑은 고딕"/>
-              </a:rPr>
-              <a:t>09</a:t>
-            </a:r>
-          </a:p>
-        </p:txBody>
-      </p:sp>
-      <p:sp>
-        <p:nvSpPr>
-          <p:cNvPr id="7" name="TextBox 6"/>
-          <p:cNvSpPr txBox="1"/>
-          <p:nvPr/>
-        </p:nvSpPr>
-        <p:spPr>
-          <a:xfrm>
-            <a:off x="548640" y="1097280"/>
-            <a:ext cx="11155680" cy="384048"/>
-          </a:xfrm>
-          <a:prstGeom prst="rect">
-            <a:avLst/>
-          </a:prstGeom>
-          <a:noFill/>
-        </p:spPr>
-        <p:txBody>
-          <a:bodyPr wrap="square" anchor="t">
-            <a:spAutoFit/>
-          </a:bodyPr>
-          <a:lstStyle/>
-          <a:p>
-            <a:pPr>
-              <a:lnSpc>
-                <a:spcPct val="114000"/>
-              </a:lnSpc>
-              <a:spcAft>
-                <a:spcPts val="0"/>
-              </a:spcAft>
-            </a:pPr>
-            <a:r>
-              <a:rPr sz="1250" b="0">
-                <a:solidFill>
-                  <a:srgbClr val="767A7F"/>
-                </a:solidFill>
-                <a:latin typeface="맑은 고딕"/>
-                <a:ea typeface="맑은 고딕"/>
-              </a:rPr>
-              <a:t>공표된 규칙을 그대로 재계산해 실제와 대조한다</a:t>
-            </a:r>
-          </a:p>
-        </p:txBody>
-      </p:sp>
-      <p:sp>
-        <p:nvSpPr>
-          <p:cNvPr id="8" name="TextBox 7"/>
-          <p:cNvSpPr txBox="1"/>
-          <p:nvPr/>
-        </p:nvSpPr>
-        <p:spPr>
-          <a:xfrm>
-            <a:off x="502920" y="6492240"/>
-            <a:ext cx="11247120" cy="320040"/>
-          </a:xfrm>
-          <a:prstGeom prst="rect">
-            <a:avLst/>
-          </a:prstGeom>
-          <a:noFill/>
-        </p:spPr>
-        <p:txBody>
-          <a:bodyPr wrap="square" anchor="t">
-            <a:spAutoFit/>
-          </a:bodyPr>
-          <a:lstStyle/>
-          <a:p>
-            <a:pPr>
-              <a:lnSpc>
-                <a:spcPct val="114000"/>
-              </a:lnSpc>
-              <a:spcAft>
-                <a:spcPts val="0"/>
-              </a:spcAft>
-            </a:pPr>
-            <a:r>
-              <a:rPr sz="850" b="0">
-                <a:solidFill>
-                  <a:srgbClr val="B2B5B9"/>
-                </a:solidFill>
-                <a:latin typeface="맑은 고딕"/>
-                <a:ea typeface="맑은 고딕"/>
-              </a:rPr>
-              <a:t>2026 명지대학교 창의적 SW프로그램 경진대회 · 빅데이터 분석 — 데이터 분석 계획서</a:t>
-            </a:r>
-          </a:p>
-        </p:txBody>
-      </p:sp>
-      <p:sp>
-        <p:nvSpPr>
-          <p:cNvPr id="9" name="Rounded Rectangle 8"/>
-          <p:cNvSpPr/>
-          <p:nvPr/>
-        </p:nvSpPr>
-        <p:spPr>
-          <a:xfrm>
-            <a:off x="502920" y="1737360"/>
-            <a:ext cx="3611880" cy="2651760"/>
-          </a:xfrm>
-          <a:prstGeom prst="roundRect">
-            <a:avLst>
-              <a:gd name="adj" fmla="val 3103"/>
-            </a:avLst>
-          </a:prstGeom>
-          <a:solidFill>
-            <a:srgbClr val="FFFFFF"/>
-          </a:solidFill>
-          <a:ln w="12700">
-            <a:solidFill>
-              <a:srgbClr val="E4E6E9"/>
-            </a:solidFill>
-          </a:ln>
-          <a:effectLst>
-            <a:outerShdw blurRad="182880" dist="64008" dir="5400000" rotWithShape="0">
-              <a:srgbClr val="000000">
-                <a:alpha val="30000"/>
-              </a:srgbClr>
-            </a:outerShdw>
-          </a:effectLst>
-        </p:spPr>
-        <p:style>
-          <a:lnRef idx="1">
-            <a:schemeClr val="accent1"/>
-          </a:lnRef>
-          <a:fillRef idx="3">
-            <a:schemeClr val="accent1"/>
-          </a:fillRef>
-          <a:effectRef idx="2">
-            <a:schemeClr val="accent1"/>
-          </a:effectRef>
-          <a:fontRef idx="minor">
-            <a:schemeClr val="lt1"/>
-          </a:fontRef>
-        </p:style>
-        <p:txBody>
-          <a:bodyPr rtlCol="0" anchor="ctr"/>
-          <a:lstStyle/>
-          <a:p>
-            <a:pPr algn="ctr"/>
-          </a:p>
-        </p:txBody>
-      </p:sp>
-      <p:sp>
-        <p:nvSpPr>
-          <p:cNvPr id="10" name="TextBox 9"/>
-          <p:cNvSpPr txBox="1"/>
-          <p:nvPr/>
-        </p:nvSpPr>
-        <p:spPr>
-          <a:xfrm>
-            <a:off x="685800" y="1865376"/>
-            <a:ext cx="3246120" cy="2395728"/>
-          </a:xfrm>
-          <a:prstGeom prst="rect">
-            <a:avLst/>
-          </a:prstGeom>
-          <a:noFill/>
-        </p:spPr>
-        <p:txBody>
-          <a:bodyPr wrap="square" anchor="t">
-            <a:spAutoFit/>
-          </a:bodyPr>
-          <a:lstStyle/>
-          <a:p>
-            <a:pPr>
-              <a:lnSpc>
-                <a:spcPct val="114000"/>
-              </a:lnSpc>
-              <a:spcAft>
-                <a:spcPts val="350"/>
-              </a:spcAft>
-            </a:pPr>
-            <a:r>
-              <a:rPr sz="1350" b="1">
-                <a:solidFill>
-                  <a:srgbClr val="33393F"/>
-                </a:solidFill>
-                <a:latin typeface="맑은 고딕"/>
-                <a:ea typeface="맑은 고딕"/>
-              </a:rPr>
-              <a:t>1단계 · 판정식 검증</a:t>
-            </a:r>
-          </a:p>
-          <a:p>
-            <a:pPr marL="160020" indent="-160020">
-              <a:lnSpc>
-                <a:spcPct val="114000"/>
-              </a:lnSpc>
-              <a:spcAft>
-                <a:spcPts val="200"/>
-              </a:spcAft>
-            </a:pPr>
-            <a:r>
-              <a:rPr sz="1100" b="0">
-                <a:solidFill>
-                  <a:srgbClr val="1C1C1E"/>
-                </a:solidFill>
-                <a:latin typeface="맑은 고딕"/>
-                <a:ea typeface="맑은 고딕"/>
-              </a:rPr>
-              <a:t>• 공표 임계값(접근성·TRI 30/30 등)으로 전 지역을 재판정하고 실제 지정 결과와 대조한다</a:t>
-            </a:r>
-          </a:p>
-          <a:p>
-            <a:pPr marL="160020" indent="-160020">
-              <a:lnSpc>
-                <a:spcPct val="114000"/>
-              </a:lnSpc>
-              <a:spcAft>
-                <a:spcPts val="200"/>
-              </a:spcAft>
-            </a:pPr>
-            <a:r>
-              <a:rPr sz="1100" b="0">
-                <a:solidFill>
-                  <a:srgbClr val="1C1C1E"/>
-                </a:solidFill>
-                <a:latin typeface="맑은 고딕"/>
-                <a:ea typeface="맑은 고딕"/>
-              </a:rPr>
-              <a:t>• 일치율과 불일치 사례를 모두 보고한다 — 불일치는 오류가 아니라 행정 층의 증거로 해석할 계획</a:t>
-            </a:r>
-          </a:p>
-        </p:txBody>
-      </p:sp>
-      <p:sp>
-        <p:nvSpPr>
-          <p:cNvPr id="11" name="Rounded Rectangle 10"/>
-          <p:cNvSpPr/>
-          <p:nvPr/>
-        </p:nvSpPr>
-        <p:spPr>
-          <a:xfrm>
-            <a:off x="4343400" y="1737360"/>
-            <a:ext cx="3611880" cy="2651760"/>
-          </a:xfrm>
-          <a:prstGeom prst="roundRect">
-            <a:avLst>
-              <a:gd name="adj" fmla="val 3103"/>
-            </a:avLst>
-          </a:prstGeom>
-          <a:solidFill>
-            <a:srgbClr val="FFFFFF"/>
-          </a:solidFill>
-          <a:ln w="12700">
-            <a:solidFill>
-              <a:srgbClr val="E4E6E9"/>
-            </a:solidFill>
-          </a:ln>
-          <a:effectLst>
-            <a:outerShdw blurRad="182880" dist="64008" dir="5400000" rotWithShape="0">
-              <a:srgbClr val="000000">
-                <a:alpha val="30000"/>
-              </a:srgbClr>
-            </a:outerShdw>
-          </a:effectLst>
-        </p:spPr>
-        <p:style>
-          <a:lnRef idx="1">
-            <a:schemeClr val="accent1"/>
-          </a:lnRef>
-          <a:fillRef idx="3">
-            <a:schemeClr val="accent1"/>
-          </a:fillRef>
-          <a:effectRef idx="2">
-            <a:schemeClr val="accent1"/>
-          </a:effectRef>
-          <a:fontRef idx="minor">
-            <a:schemeClr val="lt1"/>
-          </a:fontRef>
-        </p:style>
-        <p:txBody>
-          <a:bodyPr rtlCol="0" anchor="ctr"/>
-          <a:lstStyle/>
-          <a:p>
-            <a:pPr algn="ctr"/>
-          </a:p>
-        </p:txBody>
-      </p:sp>
-      <p:sp>
-        <p:nvSpPr>
-          <p:cNvPr id="12" name="TextBox 11"/>
-          <p:cNvSpPr txBox="1"/>
-          <p:nvPr/>
-        </p:nvSpPr>
-        <p:spPr>
-          <a:xfrm>
-            <a:off x="4526280" y="1865376"/>
-            <a:ext cx="3246120" cy="2395728"/>
-          </a:xfrm>
-          <a:prstGeom prst="rect">
-            <a:avLst/>
-          </a:prstGeom>
-          <a:noFill/>
-        </p:spPr>
-        <p:txBody>
-          <a:bodyPr wrap="square" anchor="t">
-            <a:spAutoFit/>
-          </a:bodyPr>
-          <a:lstStyle/>
-          <a:p>
-            <a:pPr>
-              <a:lnSpc>
-                <a:spcPct val="114000"/>
-              </a:lnSpc>
-              <a:spcAft>
-                <a:spcPts val="350"/>
-              </a:spcAft>
-            </a:pPr>
-            <a:r>
-              <a:rPr sz="1350" b="1">
-                <a:solidFill>
-                  <a:srgbClr val="33393F"/>
-                </a:solidFill>
-                <a:latin typeface="맑은 고딕"/>
-                <a:ea typeface="맑은 고딕"/>
-              </a:rPr>
-              <a:t>2단계 · 공급 반영 검정</a:t>
-            </a:r>
-          </a:p>
-          <a:p>
-            <a:pPr marL="160020" indent="-160020">
-              <a:lnSpc>
-                <a:spcPct val="114000"/>
-              </a:lnSpc>
-              <a:spcAft>
-                <a:spcPts val="200"/>
-              </a:spcAft>
-            </a:pPr>
-            <a:r>
-              <a:rPr sz="1100" b="0">
-                <a:solidFill>
-                  <a:srgbClr val="1C1C1E"/>
-                </a:solidFill>
-                <a:latin typeface="맑은 고딕"/>
-                <a:ea typeface="맑은 고딕"/>
-              </a:rPr>
-              <a:t>• 로지스틱 회귀(5-겹 교차검증)로 판정을 예측하고, 공급 변수(전문의 수 등)를 추가했을 때 판별력(AUC)이 개선되는지 본다</a:t>
-            </a:r>
-          </a:p>
-          <a:p>
-            <a:pPr marL="160020" indent="-160020">
-              <a:lnSpc>
-                <a:spcPct val="114000"/>
-              </a:lnSpc>
-              <a:spcAft>
-                <a:spcPts val="200"/>
-              </a:spcAft>
-            </a:pPr>
-            <a:r>
-              <a:rPr sz="1100" b="0">
-                <a:solidFill>
-                  <a:srgbClr val="1C1C1E"/>
-                </a:solidFill>
-                <a:latin typeface="맑은 고딕"/>
-                <a:ea typeface="맑은 고딕"/>
-              </a:rPr>
-              <a:t>• 개선이 없다면 판정이 공급을 보지 않는다는 증거다</a:t>
-            </a:r>
-          </a:p>
-        </p:txBody>
-      </p:sp>
-      <p:sp>
-        <p:nvSpPr>
-          <p:cNvPr id="13" name="Rounded Rectangle 12"/>
-          <p:cNvSpPr/>
-          <p:nvPr/>
-        </p:nvSpPr>
-        <p:spPr>
-          <a:xfrm>
-            <a:off x="8183880" y="1737360"/>
-            <a:ext cx="3611880" cy="2651760"/>
-          </a:xfrm>
-          <a:prstGeom prst="roundRect">
-            <a:avLst>
-              <a:gd name="adj" fmla="val 3103"/>
-            </a:avLst>
-          </a:prstGeom>
-          <a:solidFill>
-            <a:srgbClr val="FFFFFF"/>
-          </a:solidFill>
-          <a:ln w="12700">
-            <a:solidFill>
-              <a:srgbClr val="E4E6E9"/>
-            </a:solidFill>
-          </a:ln>
-          <a:effectLst>
-            <a:outerShdw blurRad="182880" dist="64008" dir="5400000" rotWithShape="0">
-              <a:srgbClr val="000000">
-                <a:alpha val="30000"/>
-              </a:srgbClr>
-            </a:outerShdw>
-          </a:effectLst>
-        </p:spPr>
-        <p:style>
-          <a:lnRef idx="1">
-            <a:schemeClr val="accent1"/>
-          </a:lnRef>
-          <a:fillRef idx="3">
-            <a:schemeClr val="accent1"/>
-          </a:fillRef>
-          <a:effectRef idx="2">
-            <a:schemeClr val="accent1"/>
-          </a:effectRef>
-          <a:fontRef idx="minor">
-            <a:schemeClr val="lt1"/>
-          </a:fontRef>
-        </p:style>
-        <p:txBody>
-          <a:bodyPr rtlCol="0" anchor="ctr"/>
-          <a:lstStyle/>
-          <a:p>
-            <a:pPr algn="ctr"/>
-          </a:p>
-        </p:txBody>
-      </p:sp>
-      <p:sp>
-        <p:nvSpPr>
-          <p:cNvPr id="14" name="TextBox 13"/>
-          <p:cNvSpPr txBox="1"/>
-          <p:nvPr/>
-        </p:nvSpPr>
-        <p:spPr>
-          <a:xfrm>
-            <a:off x="8366760" y="1865376"/>
-            <a:ext cx="3246120" cy="2395728"/>
-          </a:xfrm>
-          <a:prstGeom prst="rect">
-            <a:avLst/>
-          </a:prstGeom>
-          <a:noFill/>
-        </p:spPr>
-        <p:txBody>
-          <a:bodyPr wrap="square" anchor="t">
-            <a:spAutoFit/>
-          </a:bodyPr>
-          <a:lstStyle/>
-          <a:p>
-            <a:pPr>
-              <a:lnSpc>
-                <a:spcPct val="114000"/>
-              </a:lnSpc>
-              <a:spcAft>
-                <a:spcPts val="350"/>
-              </a:spcAft>
-            </a:pPr>
-            <a:r>
-              <a:rPr sz="1350" b="1">
-                <a:solidFill>
-                  <a:srgbClr val="33393F"/>
-                </a:solidFill>
-                <a:latin typeface="맑은 고딕"/>
-                <a:ea typeface="맑은 고딕"/>
-              </a:rPr>
-              <a:t>3단계 · 사각지대 탐지</a:t>
-            </a:r>
-          </a:p>
-          <a:p>
-            <a:pPr marL="160020" indent="-160020">
-              <a:lnSpc>
-                <a:spcPct val="114000"/>
-              </a:lnSpc>
-              <a:spcAft>
-                <a:spcPts val="200"/>
-              </a:spcAft>
-            </a:pPr>
-            <a:r>
-              <a:rPr sz="1100" b="0">
-                <a:solidFill>
-                  <a:srgbClr val="1C1C1E"/>
-                </a:solidFill>
-                <a:latin typeface="맑은 고딕"/>
-                <a:ea typeface="맑은 고딕"/>
-              </a:rPr>
-              <a:t>• "거리 기준 통과 ∧ 관내 공급 공백 ∧ 관내 이용 0"의 3중 기준을 사전 정의하고 해당 지역을 탐지한다</a:t>
-            </a:r>
-          </a:p>
-          <a:p>
-            <a:pPr marL="160020" indent="-160020">
-              <a:lnSpc>
-                <a:spcPct val="114000"/>
-              </a:lnSpc>
-              <a:spcAft>
-                <a:spcPts val="200"/>
-              </a:spcAft>
-            </a:pPr>
-            <a:r>
-              <a:rPr sz="1100" b="0">
-                <a:solidFill>
-                  <a:srgbClr val="1C1C1E"/>
-                </a:solidFill>
-                <a:latin typeface="맑은 고딕"/>
-                <a:ea typeface="맑은 고딕"/>
-              </a:rPr>
-              <a:t>• 중증 이송 반론은 동급 병원 유출 분리로, 선호 원정 반론은 관내 선택지 유무로 통제한다</a:t>
-            </a:r>
-          </a:p>
-        </p:txBody>
-      </p:sp>
-      <p:sp>
-        <p:nvSpPr>
-          <p:cNvPr id="15" name="Rounded Rectangle 14"/>
-          <p:cNvSpPr/>
-          <p:nvPr/>
-        </p:nvSpPr>
-        <p:spPr>
-          <a:xfrm>
-            <a:off x="502920" y="4663440"/>
-            <a:ext cx="11292840" cy="1417320"/>
-          </a:xfrm>
-          <a:prstGeom prst="roundRect">
-            <a:avLst>
-              <a:gd name="adj" fmla="val 5806"/>
-            </a:avLst>
-          </a:prstGeom>
-          <a:solidFill>
-            <a:srgbClr val="FFFFFF"/>
-          </a:solidFill>
-          <a:ln w="12700">
-            <a:solidFill>
-              <a:srgbClr val="E4E6E9"/>
-            </a:solidFill>
-          </a:ln>
-          <a:effectLst>
-            <a:outerShdw blurRad="182880" dist="64008" dir="5400000" rotWithShape="0">
-              <a:srgbClr val="000000">
-                <a:alpha val="30000"/>
-              </a:srgbClr>
-            </a:outerShdw>
-          </a:effectLst>
-        </p:spPr>
-        <p:style>
-          <a:lnRef idx="1">
-            <a:schemeClr val="accent1"/>
-          </a:lnRef>
-          <a:fillRef idx="3">
-            <a:schemeClr val="accent1"/>
-          </a:fillRef>
-          <a:effectRef idx="2">
-            <a:schemeClr val="accent1"/>
-          </a:effectRef>
-          <a:fontRef idx="minor">
-            <a:schemeClr val="lt1"/>
-          </a:fontRef>
-        </p:style>
-        <p:txBody>
-          <a:bodyPr rtlCol="0" anchor="ctr"/>
-          <a:lstStyle/>
-          <a:p>
-            <a:pPr algn="ctr"/>
-          </a:p>
-        </p:txBody>
-      </p:sp>
-      <p:sp>
-        <p:nvSpPr>
-          <p:cNvPr id="16" name="TextBox 15"/>
-          <p:cNvSpPr txBox="1"/>
-          <p:nvPr/>
-        </p:nvSpPr>
-        <p:spPr>
-          <a:xfrm>
-            <a:off x="685800" y="4791455"/>
-            <a:ext cx="10927080" cy="1161288"/>
-          </a:xfrm>
-          <a:prstGeom prst="rect">
-            <a:avLst/>
-          </a:prstGeom>
-          <a:noFill/>
-        </p:spPr>
-        <p:txBody>
-          <a:bodyPr wrap="square" anchor="t">
-            <a:spAutoFit/>
-          </a:bodyPr>
-          <a:lstStyle/>
-          <a:p>
-            <a:pPr>
-              <a:lnSpc>
-                <a:spcPct val="114000"/>
-              </a:lnSpc>
-              <a:spcAft>
-                <a:spcPts val="350"/>
-              </a:spcAft>
-            </a:pPr>
-            <a:r>
-              <a:rPr sz="1300" b="1">
-                <a:solidFill>
-                  <a:srgbClr val="33393F"/>
-                </a:solidFill>
-                <a:latin typeface="맑은 고딕"/>
-                <a:ea typeface="맑은 고딕"/>
-              </a:rPr>
-              <a:t>판단 기준의 사전 명시</a:t>
-            </a:r>
-          </a:p>
-          <a:p>
-            <a:pPr marL="160020" indent="-160020">
-              <a:lnSpc>
-                <a:spcPct val="114000"/>
-              </a:lnSpc>
-              <a:spcAft>
-                <a:spcPts val="200"/>
-              </a:spcAft>
-            </a:pPr>
-            <a:r>
-              <a:rPr sz="1150" b="0">
-                <a:solidFill>
-                  <a:srgbClr val="1C1C1E"/>
-                </a:solidFill>
-                <a:latin typeface="맑은 고딕"/>
-                <a:ea typeface="맑은 고딕"/>
-              </a:rPr>
-              <a:t>• 무엇을 "재현 성공"으로, 무엇을 "사각지대"로 볼지의 기준을 분석 전에 확정해 보고서에 명시한다</a:t>
-            </a:r>
-          </a:p>
-          <a:p>
-            <a:pPr marL="160020" indent="-160020">
-              <a:lnSpc>
-                <a:spcPct val="114000"/>
-              </a:lnSpc>
-              <a:spcAft>
-                <a:spcPts val="200"/>
-              </a:spcAft>
-            </a:pPr>
-            <a:r>
-              <a:rPr sz="1150" b="0">
-                <a:solidFill>
-                  <a:srgbClr val="1C1C1E"/>
-                </a:solidFill>
-                <a:latin typeface="맑은 고딕"/>
-                <a:ea typeface="맑은 고딕"/>
-              </a:rPr>
-              <a:t>• 반대 해석(예: "옆 도시로 가면 되지 않는가")을 본문에서 정면으로 다루는 섹션을 계획에 포함한다</a:t>
-            </a:r>
-          </a:p>
-        </p:txBody>
-      </p:sp>
-    </p:spTree>
-  </p:cSld>
-  <p:clrMapOvr>
-    <a:masterClrMapping/>
-  </p:clrMapOvr>
-</p:sld>
-</file>
-
 <file path=ppt/theme/theme1.xml><?xml version="1.0" encoding="utf-8"?>
 <a:theme xmlns:a="http://schemas.openxmlformats.org/drawingml/2006/main" name="Office Theme">
   <a:themeElements>

--- a/05_작업자료/_PPT생성본/데이터분석_계획서.pptx
+++ b/05_작업자료/_PPT생성본/데이터분석_계획서.pptx
@@ -3349,7 +3349,7 @@
         <p:spPr>
           <a:xfrm>
             <a:off x="914400" y="4663440"/>
-            <a:ext cx="6949440" cy="1554480"/>
+            <a:ext cx="6949440" cy="310896"/>
           </a:xfrm>
           <a:prstGeom prst="rect">
             <a:avLst/>
@@ -3367,7 +3367,7 @@
                 <a:spcPct val="114000"/>
               </a:lnSpc>
               <a:spcAft>
-                <a:spcPts val="600"/>
+                <a:spcPts val="0"/>
               </a:spcAft>
             </a:pPr>
             <a:r>
@@ -3379,46 +3379,6 @@
                 <a:ea typeface="맑은 고딕"/>
               </a:rPr>
               <a:t>2026 제5회 명지대학교 창의적 SW프로그램 경진대회 · 빅데이터 분석 부문</a:t>
-            </a:r>
-          </a:p>
-          <a:p>
-            <a:pPr>
-              <a:lnSpc>
-                <a:spcPct val="114000"/>
-              </a:lnSpc>
-              <a:spcAft>
-                <a:spcPts val="200"/>
-              </a:spcAft>
-            </a:pPr>
-            <a:r>
-              <a:rPr sz="1250" b="0">
-                <a:solidFill>
-                  <a:srgbClr val="767A7F"/>
-                </a:solidFill>
-                <a:latin typeface="맑은 고딕"/>
-                <a:ea typeface="맑은 고딕"/>
-              </a:rPr>
-              <a:t>정부는 취약지를 정밀하게 측정한다. 지정 규칙과 배분 규칙은 그 측정을 따르는가 —</a:t>
-            </a:r>
-          </a:p>
-          <a:p>
-            <a:pPr>
-              <a:lnSpc>
-                <a:spcPct val="114000"/>
-              </a:lnSpc>
-              <a:spcAft>
-                <a:spcPts val="0"/>
-              </a:spcAft>
-            </a:pPr>
-            <a:r>
-              <a:rPr sz="1250" b="0">
-                <a:solidFill>
-                  <a:srgbClr val="767A7F"/>
-                </a:solidFill>
-                <a:latin typeface="맑은 고딕"/>
-                <a:ea typeface="맑은 고딕"/>
-              </a:rPr>
-              <a:t>정부 자신의 공개 데이터와 기준만으로 제도의 전 과정을 감사한다.</a:t>
             </a:r>
           </a:p>
         </p:txBody>

--- a/05_작업자료/_PPT생성본/데이터분석_계획서.pptx
+++ b/05_작업자료/_PPT생성본/데이터분석_계획서.pptx
@@ -3543,7 +3543,7 @@
                 <a:latin typeface="맑은 고딕"/>
                 <a:ea typeface="맑은 고딕"/>
               </a:rPr>
-              <a:t>분석 설계 ① 지정 감사 (RQ1·RQ2)</a:t>
+              <a:t>분석 설계 ① 지정 감사 (Q1·Q2)</a:t>
             </a:r>
           </a:p>
         </p:txBody>
@@ -4437,7 +4437,7 @@
                 <a:latin typeface="맑은 고딕"/>
                 <a:ea typeface="맑은 고딕"/>
               </a:rPr>
-              <a:t>분석 설계 ② 배분 진단 (RQ3)</a:t>
+              <a:t>분석 설계 ② 배분 진단 (Q3)</a:t>
             </a:r>
           </a:p>
         </p:txBody>
@@ -5583,7 +5583,7 @@
                 <a:latin typeface="맑은 고딕"/>
                 <a:ea typeface="맑은 고딕"/>
               </a:rPr>
-              <a:t>분석 설계 ③ 처방 — 우선순위·유형 배정 모형 (RQ4)</a:t>
+              <a:t>분석 설계 ③ 처방 — 우선순위·유형 배정 모형 (Q4)</a:t>
             </a:r>
           </a:p>
         </p:txBody>
@@ -7086,7 +7086,7 @@
                           <a:latin typeface="맑은 고딕"/>
                           <a:ea typeface="맑은 고딕"/>
                         </a:rPr>
-                        <a:t>본 계획의 대응</a:t>
+                        <a:t>이 계획의 대응</a:t>
                       </a:r>
                     </a:p>
                   </a:txBody>
@@ -7144,7 +7144,7 @@
                           <a:latin typeface="맑은 고딕"/>
                           <a:ea typeface="맑은 고딕"/>
                         </a:rPr>
-                        <a:t>제도 파이프라인 문제화, RQ 4개, 접근성 2축 이론, 사전 명시된 판단 기준</a:t>
+                        <a:t>제도 파이프라인 문제화, Q 4개, 접근성 2축 이론, 사전 명시된 판단 기준</a:t>
                       </a:r>
                     </a:p>
                   </a:txBody>
@@ -8971,7 +8971,7 @@
                 <a:latin typeface="맑은 고딕"/>
                 <a:ea typeface="맑은 고딕"/>
               </a:rPr>
-              <a:t>05   연구 질문 (RQ 4개)</a:t>
+              <a:t>05   핵심 질문 (Q 4개)</a:t>
             </a:r>
           </a:p>
         </p:txBody>
@@ -9402,7 +9402,7 @@
                 <a:latin typeface="맑은 고딕"/>
                 <a:ea typeface="맑은 고딕"/>
               </a:rPr>
-              <a:t>RQ별로 어떤 방법을 쓸 것인가</a:t>
+              <a:t>Q별로 어떤 방법을 쓸 것인가</a:t>
             </a:r>
           </a:p>
           <a:p>
@@ -9422,7 +9422,7 @@
                 <a:latin typeface="맑은 고딕"/>
                 <a:ea typeface="맑은 고딕"/>
               </a:rPr>
-              <a:t>10   ① 지정 감사 (RQ1·RQ2)</a:t>
+              <a:t>10   ① 지정 감사 (Q1·Q2)</a:t>
             </a:r>
           </a:p>
           <a:p>
@@ -9442,7 +9442,7 @@
                 <a:latin typeface="맑은 고딕"/>
                 <a:ea typeface="맑은 고딕"/>
               </a:rPr>
-              <a:t>11   ② 배분 진단 (RQ3)</a:t>
+              <a:t>11   ② 배분 진단 (Q3)</a:t>
             </a:r>
           </a:p>
           <a:p>
@@ -9462,7 +9462,7 @@
                 <a:latin typeface="맑은 고딕"/>
                 <a:ea typeface="맑은 고딕"/>
               </a:rPr>
-              <a:t>12   ③ 처방 모형 (RQ4)</a:t>
+              <a:t>12   ③ 처방 모형 (Q4)</a:t>
             </a:r>
           </a:p>
         </p:txBody>
@@ -9965,7 +9965,7 @@
                 <a:latin typeface="맑은 고딕"/>
                 <a:ea typeface="맑은 고딕"/>
               </a:rPr>
-              <a:t>부족(㉠)과 배분(㉡)은 다른 문제이고 해법도 다르다 — 본 계획은 ㉡을 맡는다</a:t>
+              <a:t>부족(㉠)과 배분(㉡)은 다른 문제이고 해법도 다르다 — 이 계획은 ㉡을 맡는다</a:t>
             </a:r>
           </a:p>
         </p:txBody>
@@ -10496,7 +10496,7 @@
                 <a:latin typeface="맑은 고딕"/>
                 <a:ea typeface="맑은 고딕"/>
               </a:rPr>
-              <a:t>• 즉 이 제도에서 "취약"은 처음부터 끝까지 거리와 시간으로 정의된다 — 이 점이 본 연구의 첫 번째 표적이 된다</a:t>
+              <a:t>• 즉 이 제도에서 "취약"은 처음부터 끝까지 거리와 시간으로 정의된다 — 이 점이 이 프로젝트의 첫 번째 표적이 된다</a:t>
             </a:r>
           </a:p>
           <a:p>
@@ -10579,7 +10579,7 @@
                 <a:latin typeface="맑은 고딕"/>
                 <a:ea typeface="맑은 고딕"/>
               </a:rPr>
-              <a:t>"지금 있는 것은 체계적으로, 필요한 곳으로 배분되고 있는가" — 이를 데이터로 검증하는 것이 본 계획이다.</a:t>
+              <a:t>"지금 있는 것은 체계적으로, 필요한 곳으로 배분되고 있는가" — 이를 데이터로 검증하는 것이 이 계획이다.</a:t>
             </a:r>
           </a:p>
         </p:txBody>
@@ -12118,7 +12118,7 @@
                 <a:latin typeface="맑은 고딕"/>
                 <a:ea typeface="맑은 고딕"/>
               </a:rPr>
-              <a:t>연구 질문 (RQ) — 감사의 네 가지 물음</a:t>
+              <a:t>핵심 질문 (Q) — 감사의 네 가지 물음</a:t>
             </a:r>
           </a:p>
         </p:txBody>
@@ -12413,7 +12413,7 @@
                 <a:latin typeface="맑은 고딕"/>
                 <a:ea typeface="맑은 고딕"/>
               </a:rPr>
-              <a:t>RQ1 · 지정의 검증</a:t>
+              <a:t>Q1 · 지정의 검증</a:t>
             </a:r>
           </a:p>
           <a:p>
@@ -12610,7 +12610,7 @@
                 <a:latin typeface="맑은 고딕"/>
                 <a:ea typeface="맑은 고딕"/>
               </a:rPr>
-              <a:t>RQ2 · 사각지대 탐지</a:t>
+              <a:t>Q2 · 사각지대 탐지</a:t>
             </a:r>
           </a:p>
           <a:p>
@@ -12807,7 +12807,7 @@
                 <a:latin typeface="맑은 고딕"/>
                 <a:ea typeface="맑은 고딕"/>
               </a:rPr>
-              <a:t>RQ3 · 배분의 진단</a:t>
+              <a:t>Q3 · 배분의 진단</a:t>
             </a:r>
           </a:p>
           <a:p>
@@ -13004,7 +13004,7 @@
                 <a:latin typeface="맑은 고딕"/>
                 <a:ea typeface="맑은 고딕"/>
               </a:rPr>
-              <a:t>RQ4 · 처방과 대조</a:t>
+              <a:t>Q4 · 처방과 대조</a:t>
             </a:r>
           </a:p>
           <a:p>
@@ -13087,7 +13087,7 @@
                 <a:latin typeface="맑은 고딕"/>
                 <a:ea typeface="맑은 고딕"/>
               </a:rPr>
-              <a:t>RQ1·2는 지정을, RQ3·4는 배분을 본다. 앞의 둘로 "규칙이 무엇을 보는가"를 확정해야 뒤의 둘에서 "그 규칙대로 나눠지고 있는가"를 물을 수 있다.</a:t>
+              <a:t>Q1·2는 지정을, Q3·4는 배분을 본다. 앞의 둘로 "규칙이 무엇을 보는가"를 확정해야 뒤의 둘에서 "그 규칙대로 나눠지고 있는가"를 물을 수 있다.</a:t>
             </a:r>
           </a:p>
           <a:p>
@@ -13272,7 +13272,7 @@
                 <a:latin typeface="맑은 고딕"/>
                 <a:ea typeface="맑은 고딕"/>
               </a:rPr>
-              <a:t>이론적 고찰 — 접근성의 두 축과 연구의 차별점</a:t>
+              <a:t>이론적 고찰 — 접근성의 두 축과 이 프로젝트의 차별점</a:t>
             </a:r>
           </a:p>
         </p:txBody>
@@ -13861,7 +13861,7 @@
                           <a:latin typeface="맑은 고딕"/>
                           <a:ea typeface="맑은 고딕"/>
                         </a:rPr>
-                        <a:t>본 연구의 계획</a:t>
+                        <a:t>이 프로젝트의 계획</a:t>
                       </a:r>
                     </a:p>
                   </a:txBody>

--- a/05_작업자료/_PPT생성본/데이터분석_계획서.pptx
+++ b/05_작업자료/_PPT생성본/데이터분석_계획서.pptx
@@ -11953,6 +11953,46 @@
                 <a:latin typeface="맑은 고딕"/>
                 <a:ea typeface="맑은 고딕"/>
               </a:rPr>
+              <a:t>• 지원은 시·군 1곳 → 시·도 원칙 1개소 → 복지부 심사를 거친다. 15년 누적 57개소, 2025년 분만 신규는 전국 1개소</a:t>
+            </a:r>
+          </a:p>
+          <a:p>
+            <a:pPr marL="160020" indent="-160020">
+              <a:lnSpc>
+                <a:spcPct val="114000"/>
+              </a:lnSpc>
+              <a:spcAft>
+                <a:spcPts val="200"/>
+              </a:spcAft>
+            </a:pPr>
+            <a:r>
+              <a:rPr sz="1150" b="0">
+                <a:solidFill>
+                  <a:srgbClr val="1C1C1E"/>
+                </a:solidFill>
+                <a:latin typeface="맑은 고딕"/>
+                <a:ea typeface="맑은 고딕"/>
+              </a:rPr>
+              <a:t>• 나눠 줄 것이 적을수록 순서는 오히려 더 중요해진다 — 한 해에 한 곳뿐이면 순서가 곧 결과다. 그래서 선별 규칙을 따져야 한다</a:t>
+            </a:r>
+          </a:p>
+          <a:p>
+            <a:pPr marL="160020" indent="-160020">
+              <a:lnSpc>
+                <a:spcPct val="114000"/>
+              </a:lnSpc>
+              <a:spcAft>
+                <a:spcPts val="200"/>
+              </a:spcAft>
+            </a:pPr>
+            <a:r>
+              <a:rPr sz="1150" b="0">
+                <a:solidFill>
+                  <a:srgbClr val="1C1C1E"/>
+                </a:solidFill>
+                <a:latin typeface="맑은 고딕"/>
+                <a:ea typeface="맑은 고딕"/>
+              </a:rPr>
               <a:t>• 모든 판단 기준과 임계값은 정부 자신의 문서·데이터에서 가져와 실현 가능성을 확보할 계획이다</a:t>
             </a:r>
           </a:p>

--- a/05_작업자료/_PPT생성본/데이터분석_계획서.pptx
+++ b/05_작업자료/_PPT생성본/데이터분석_계획서.pptx
@@ -11780,6 +11780,26 @@
             </a:r>
           </a:p>
           <a:p>
+            <a:pPr marL="160020" indent="-160020">
+              <a:lnSpc>
+                <a:spcPct val="114000"/>
+              </a:lnSpc>
+              <a:spcAft>
+                <a:spcPts val="200"/>
+              </a:spcAft>
+            </a:pPr>
+            <a:r>
+              <a:rPr sz="1150" b="0">
+                <a:solidFill>
+                  <a:srgbClr val="1C1C1E"/>
+                </a:solidFill>
+                <a:latin typeface="맑은 고딕"/>
+                <a:ea typeface="맑은 고딕"/>
+              </a:rPr>
+              <a:t>• 15년 누적 57개소, 2025년 분만 신규는 전국 1개소 — 나눠 줄 것이 적을수록 순서는 오히려 더 중요해진다</a:t>
+            </a:r>
+          </a:p>
+          <a:p>
             <a:pPr>
               <a:lnSpc>
                 <a:spcPct val="114000"/>
@@ -11934,46 +11954,6 @@
                 <a:ea typeface="맑은 고딕"/>
               </a:rPr>
               <a:t>• 분석 대상은 취약지라는 현상이 아니라, 취약지를 판정하고 지원하는 제도 그 자체다 (제도 감사 프레임)</a:t>
-            </a:r>
-          </a:p>
-          <a:p>
-            <a:pPr marL="160020" indent="-160020">
-              <a:lnSpc>
-                <a:spcPct val="114000"/>
-              </a:lnSpc>
-              <a:spcAft>
-                <a:spcPts val="200"/>
-              </a:spcAft>
-            </a:pPr>
-            <a:r>
-              <a:rPr sz="1150" b="0">
-                <a:solidFill>
-                  <a:srgbClr val="1C1C1E"/>
-                </a:solidFill>
-                <a:latin typeface="맑은 고딕"/>
-                <a:ea typeface="맑은 고딕"/>
-              </a:rPr>
-              <a:t>• 지원은 시·군 1곳 → 시·도 원칙 1개소 → 복지부 심사를 거친다. 15년 누적 57개소, 2025년 분만 신규는 전국 1개소</a:t>
-            </a:r>
-          </a:p>
-          <a:p>
-            <a:pPr marL="160020" indent="-160020">
-              <a:lnSpc>
-                <a:spcPct val="114000"/>
-              </a:lnSpc>
-              <a:spcAft>
-                <a:spcPts val="200"/>
-              </a:spcAft>
-            </a:pPr>
-            <a:r>
-              <a:rPr sz="1150" b="0">
-                <a:solidFill>
-                  <a:srgbClr val="1C1C1E"/>
-                </a:solidFill>
-                <a:latin typeface="맑은 고딕"/>
-                <a:ea typeface="맑은 고딕"/>
-              </a:rPr>
-              <a:t>• 나눠 줄 것이 적을수록 순서는 오히려 더 중요해진다 — 한 해에 한 곳뿐이면 순서가 곧 결과다. 그래서 선별 규칙을 따져야 한다</a:t>
             </a:r>
           </a:p>
           <a:p>

--- a/05_작업자료/_PPT생성본/데이터분석_계획서.pptx
+++ b/05_작업자료/_PPT생성본/데이터분석_계획서.pptx
@@ -314,7 +314,7 @@
           <a:p>
             <a:fld id="{5BCAD085-E8A6-8845-BD4E-CB4CCA059FC4}" type="datetimeFigureOut">
               <a:rPr lang="en-US" smtClean="0"/>
-              <a:t>8/12/2026</a:t>
+              <a:t>8/13/2026</a:t>
             </a:fld>
             <a:endParaRPr lang="en-US"/>
           </a:p>
@@ -482,7 +482,7 @@
           <a:p>
             <a:fld id="{5BCAD085-E8A6-8845-BD4E-CB4CCA059FC4}" type="datetimeFigureOut">
               <a:rPr lang="en-US" smtClean="0"/>
-              <a:t>8/12/2026</a:t>
+              <a:t>8/13/2026</a:t>
             </a:fld>
             <a:endParaRPr lang="en-US"/>
           </a:p>
@@ -660,7 +660,7 @@
           <a:p>
             <a:fld id="{5BCAD085-E8A6-8845-BD4E-CB4CCA059FC4}" type="datetimeFigureOut">
               <a:rPr lang="en-US" smtClean="0"/>
-              <a:t>8/12/2026</a:t>
+              <a:t>8/13/2026</a:t>
             </a:fld>
             <a:endParaRPr lang="en-US"/>
           </a:p>
@@ -828,7 +828,7 @@
           <a:p>
             <a:fld id="{5BCAD085-E8A6-8845-BD4E-CB4CCA059FC4}" type="datetimeFigureOut">
               <a:rPr lang="en-US" smtClean="0"/>
-              <a:t>8/12/2026</a:t>
+              <a:t>8/13/2026</a:t>
             </a:fld>
             <a:endParaRPr lang="en-US"/>
           </a:p>
@@ -1073,7 +1073,7 @@
           <a:p>
             <a:fld id="{5BCAD085-E8A6-8845-BD4E-CB4CCA059FC4}" type="datetimeFigureOut">
               <a:rPr lang="en-US" smtClean="0"/>
-              <a:t>8/12/2026</a:t>
+              <a:t>8/13/2026</a:t>
             </a:fld>
             <a:endParaRPr lang="en-US"/>
           </a:p>
@@ -1358,7 +1358,7 @@
           <a:p>
             <a:fld id="{5BCAD085-E8A6-8845-BD4E-CB4CCA059FC4}" type="datetimeFigureOut">
               <a:rPr lang="en-US" smtClean="0"/>
-              <a:t>8/12/2026</a:t>
+              <a:t>8/13/2026</a:t>
             </a:fld>
             <a:endParaRPr lang="en-US"/>
           </a:p>
@@ -1777,7 +1777,7 @@
           <a:p>
             <a:fld id="{5BCAD085-E8A6-8845-BD4E-CB4CCA059FC4}" type="datetimeFigureOut">
               <a:rPr lang="en-US" smtClean="0"/>
-              <a:t>8/12/2026</a:t>
+              <a:t>8/13/2026</a:t>
             </a:fld>
             <a:endParaRPr lang="en-US"/>
           </a:p>
@@ -1894,7 +1894,7 @@
           <a:p>
             <a:fld id="{5BCAD085-E8A6-8845-BD4E-CB4CCA059FC4}" type="datetimeFigureOut">
               <a:rPr lang="en-US" smtClean="0"/>
-              <a:t>8/12/2026</a:t>
+              <a:t>8/13/2026</a:t>
             </a:fld>
             <a:endParaRPr lang="en-US"/>
           </a:p>
@@ -1989,7 +1989,7 @@
           <a:p>
             <a:fld id="{5BCAD085-E8A6-8845-BD4E-CB4CCA059FC4}" type="datetimeFigureOut">
               <a:rPr lang="en-US" smtClean="0"/>
-              <a:t>8/12/2026</a:t>
+              <a:t>8/13/2026</a:t>
             </a:fld>
             <a:endParaRPr lang="en-US"/>
           </a:p>
@@ -2264,7 +2264,7 @@
           <a:p>
             <a:fld id="{5BCAD085-E8A6-8845-BD4E-CB4CCA059FC4}" type="datetimeFigureOut">
               <a:rPr lang="en-US" smtClean="0"/>
-              <a:t>8/12/2026</a:t>
+              <a:t>8/13/2026</a:t>
             </a:fld>
             <a:endParaRPr lang="en-US"/>
           </a:p>
@@ -2516,7 +2516,7 @@
           <a:p>
             <a:fld id="{5BCAD085-E8A6-8845-BD4E-CB4CCA059FC4}" type="datetimeFigureOut">
               <a:rPr lang="en-US" smtClean="0"/>
-              <a:t>8/12/2026</a:t>
+              <a:t>8/13/2026</a:t>
             </a:fld>
             <a:endParaRPr lang="en-US"/>
           </a:p>
@@ -2727,7 +2727,7 @@
           <a:p>
             <a:fld id="{5BCAD085-E8A6-8845-BD4E-CB4CCA059FC4}" type="datetimeFigureOut">
               <a:rPr lang="en-US" smtClean="0"/>
-              <a:t>8/12/2026</a:t>
+              <a:t>8/13/2026</a:t>
             </a:fld>
             <a:endParaRPr lang="en-US"/>
           </a:p>
@@ -3594,7 +3594,7 @@
         </p:nvSpPr>
         <p:spPr>
           <a:xfrm>
-            <a:off x="1691640" y="402336"/>
+            <a:off x="1353312" y="384048"/>
             <a:ext cx="9006840" cy="530352"/>
           </a:xfrm>
           <a:prstGeom prst="rect">
@@ -3760,8 +3760,8 @@
         </p:nvSpPr>
         <p:spPr>
           <a:xfrm>
-            <a:off x="10835640" y="164592"/>
-            <a:ext cx="1188720" cy="777240"/>
+            <a:off x="11393424" y="6117336"/>
+            <a:ext cx="777240" cy="374904"/>
           </a:xfrm>
           <a:prstGeom prst="rect">
             <a:avLst/>
@@ -3997,7 +3997,7 @@
         <p:spPr>
           <a:xfrm>
             <a:off x="502920" y="1737360"/>
-            <a:ext cx="3611880" cy="1920240"/>
+            <a:ext cx="3611880" cy="1499616"/>
           </a:xfrm>
           <a:prstGeom prst="roundRect">
             <a:avLst>
@@ -4052,7 +4052,7 @@
         <p:spPr>
           <a:xfrm>
             <a:off x="685800" y="1865376"/>
-            <a:ext cx="3246120" cy="1664208"/>
+            <a:ext cx="3246120" cy="1243584"/>
           </a:xfrm>
           <a:prstGeom prst="rect">
             <a:avLst/>
@@ -4626,7 +4626,7 @@
         <p:spPr>
           <a:xfrm>
             <a:off x="4343400" y="1737360"/>
-            <a:ext cx="3611880" cy="1920240"/>
+            <a:ext cx="3611880" cy="1499616"/>
           </a:xfrm>
           <a:prstGeom prst="roundRect">
             <a:avLst>
@@ -4681,7 +4681,7 @@
         <p:spPr>
           <a:xfrm>
             <a:off x="4526280" y="1865376"/>
-            <a:ext cx="3246120" cy="1664208"/>
+            <a:ext cx="3246120" cy="1243584"/>
           </a:xfrm>
           <a:prstGeom prst="rect">
             <a:avLst/>
@@ -4764,7 +4764,7 @@
         <p:spPr>
           <a:xfrm>
             <a:off x="8183880" y="1737360"/>
-            <a:ext cx="3611880" cy="1920240"/>
+            <a:ext cx="3611880" cy="1499616"/>
           </a:xfrm>
           <a:prstGeom prst="roundRect">
             <a:avLst>
@@ -4819,7 +4819,7 @@
         <p:spPr>
           <a:xfrm>
             <a:off x="8366760" y="1865376"/>
-            <a:ext cx="3246120" cy="1664208"/>
+            <a:ext cx="3246120" cy="1243584"/>
           </a:xfrm>
           <a:prstGeom prst="rect">
             <a:avLst/>
@@ -5503,7 +5503,7 @@
         <p:spPr>
           <a:xfrm>
             <a:off x="502920" y="3977639"/>
-            <a:ext cx="11292840" cy="1417320"/>
+            <a:ext cx="11292840" cy="676656"/>
           </a:xfrm>
           <a:prstGeom prst="roundRect">
             <a:avLst>
@@ -5558,7 +5558,7 @@
         <p:spPr>
           <a:xfrm>
             <a:off x="685800" y="4105656"/>
-            <a:ext cx="10927080" cy="555217"/>
+            <a:ext cx="10927080" cy="420623"/>
           </a:xfrm>
           <a:prstGeom prst="rect">
             <a:avLst/>
@@ -5924,8 +5924,8 @@
         </p:nvSpPr>
         <p:spPr>
           <a:xfrm>
-            <a:off x="502920" y="182880"/>
-            <a:ext cx="1051560" cy="749808"/>
+            <a:off x="502920" y="356616"/>
+            <a:ext cx="1051560" cy="475488"/>
           </a:xfrm>
           <a:prstGeom prst="rect">
             <a:avLst/>
@@ -5967,8 +5967,8 @@
         </p:nvSpPr>
         <p:spPr>
           <a:xfrm>
-            <a:off x="1691640" y="182880"/>
-            <a:ext cx="9006840" cy="219456"/>
+            <a:off x="10698480" y="502920"/>
+            <a:ext cx="1417320" cy="274320"/>
           </a:xfrm>
           <a:prstGeom prst="rect">
             <a:avLst/>
@@ -6080,7 +6080,7 @@
         </p:nvSpPr>
         <p:spPr>
           <a:xfrm>
-            <a:off x="1691640" y="402336"/>
+            <a:off x="1353312" y="384048"/>
             <a:ext cx="9006840" cy="530352"/>
           </a:xfrm>
           <a:prstGeom prst="rect">
@@ -6176,8 +6176,8 @@
         </p:nvSpPr>
         <p:spPr>
           <a:xfrm>
-            <a:off x="10835640" y="164592"/>
-            <a:ext cx="1188720" cy="777240"/>
+            <a:off x="11393424" y="6117336"/>
+            <a:ext cx="777240" cy="374904"/>
           </a:xfrm>
           <a:prstGeom prst="rect">
             <a:avLst/>
@@ -6306,7 +6306,7 @@
         <p:spPr>
           <a:xfrm>
             <a:off x="502920" y="1737360"/>
-            <a:ext cx="11292840" cy="1188720"/>
+            <a:ext cx="11292840" cy="868680"/>
           </a:xfrm>
           <a:prstGeom prst="roundRect">
             <a:avLst>
@@ -6361,7 +6361,7 @@
         <p:spPr>
           <a:xfrm>
             <a:off x="685800" y="1865376"/>
-            <a:ext cx="10927080" cy="932688"/>
+            <a:ext cx="10927080" cy="612647"/>
           </a:xfrm>
           <a:prstGeom prst="rect">
             <a:avLst/>
@@ -6444,7 +6444,7 @@
         <p:spPr>
           <a:xfrm>
             <a:off x="502920" y="3154680"/>
-            <a:ext cx="2286000" cy="685800"/>
+            <a:ext cx="2286000" cy="502920"/>
           </a:xfrm>
           <a:prstGeom prst="roundRect">
             <a:avLst>
@@ -6505,7 +6505,7 @@
         <p:spPr>
           <a:xfrm>
             <a:off x="640080" y="3227832"/>
-            <a:ext cx="2103120" cy="548640"/>
+            <a:ext cx="2103120" cy="246888"/>
           </a:xfrm>
           <a:prstGeom prst="rect">
             <a:avLst/>
@@ -6548,7 +6548,7 @@
         <p:spPr>
           <a:xfrm>
             <a:off x="2926080" y="3154680"/>
-            <a:ext cx="8869680" cy="685800"/>
+            <a:ext cx="8869680" cy="502920"/>
           </a:xfrm>
           <a:prstGeom prst="roundRect">
             <a:avLst>
@@ -6603,7 +6603,7 @@
         <p:spPr>
           <a:xfrm>
             <a:off x="3108960" y="3227832"/>
-            <a:ext cx="8549640" cy="548640"/>
+            <a:ext cx="8549640" cy="246888"/>
           </a:xfrm>
           <a:prstGeom prst="rect">
             <a:avLst/>
@@ -6646,7 +6646,7 @@
         <p:spPr>
           <a:xfrm>
             <a:off x="502920" y="4023360"/>
-            <a:ext cx="2286000" cy="685800"/>
+            <a:ext cx="2286000" cy="502920"/>
           </a:xfrm>
           <a:prstGeom prst="roundRect">
             <a:avLst>
@@ -6707,7 +6707,7 @@
         <p:spPr>
           <a:xfrm>
             <a:off x="640080" y="4096512"/>
-            <a:ext cx="2103120" cy="548640"/>
+            <a:ext cx="2103120" cy="246888"/>
           </a:xfrm>
           <a:prstGeom prst="rect">
             <a:avLst/>
@@ -6750,7 +6750,7 @@
         <p:spPr>
           <a:xfrm>
             <a:off x="2926080" y="4023360"/>
-            <a:ext cx="8869680" cy="685800"/>
+            <a:ext cx="8869680" cy="502920"/>
           </a:xfrm>
           <a:prstGeom prst="roundRect">
             <a:avLst>
@@ -6805,7 +6805,7 @@
         <p:spPr>
           <a:xfrm>
             <a:off x="3108960" y="4096512"/>
-            <a:ext cx="8549640" cy="548640"/>
+            <a:ext cx="8549640" cy="246888"/>
           </a:xfrm>
           <a:prstGeom prst="rect">
             <a:avLst/>
@@ -7736,8 +7736,8 @@
         </p:nvSpPr>
         <p:spPr>
           <a:xfrm>
-            <a:off x="502920" y="182880"/>
-            <a:ext cx="1051560" cy="749808"/>
+            <a:off x="502920" y="356616"/>
+            <a:ext cx="1051560" cy="475488"/>
           </a:xfrm>
           <a:prstGeom prst="rect">
             <a:avLst/>
@@ -7779,8 +7779,8 @@
         </p:nvSpPr>
         <p:spPr>
           <a:xfrm>
-            <a:off x="1691640" y="182880"/>
-            <a:ext cx="9006840" cy="219456"/>
+            <a:off x="10698480" y="502920"/>
+            <a:ext cx="1417320" cy="274320"/>
           </a:xfrm>
           <a:prstGeom prst="rect">
             <a:avLst/>
@@ -7892,7 +7892,7 @@
         </p:nvSpPr>
         <p:spPr>
           <a:xfrm>
-            <a:off x="1691640" y="402336"/>
+            <a:off x="1353312" y="384048"/>
             <a:ext cx="9006840" cy="530352"/>
           </a:xfrm>
           <a:prstGeom prst="rect">
@@ -7988,8 +7988,8 @@
         </p:nvSpPr>
         <p:spPr>
           <a:xfrm>
-            <a:off x="10835640" y="164592"/>
-            <a:ext cx="1188720" cy="777240"/>
+            <a:off x="11393424" y="6117336"/>
+            <a:ext cx="777240" cy="374904"/>
           </a:xfrm>
           <a:prstGeom prst="rect">
             <a:avLst/>
@@ -9596,7 +9596,7 @@
         <p:spPr>
           <a:xfrm>
             <a:off x="502920" y="3474720"/>
-            <a:ext cx="11292840" cy="1417320"/>
+            <a:ext cx="11292840" cy="1252728"/>
           </a:xfrm>
           <a:prstGeom prst="roundRect">
             <a:avLst>
@@ -9651,7 +9651,7 @@
         <p:spPr>
           <a:xfrm>
             <a:off x="685800" y="3602736"/>
-            <a:ext cx="10927080" cy="1161288"/>
+            <a:ext cx="10927080" cy="996696"/>
           </a:xfrm>
           <a:prstGeom prst="rect">
             <a:avLst/>
@@ -10711,8 +10711,8 @@
         </p:nvSpPr>
         <p:spPr>
           <a:xfrm>
-            <a:off x="502920" y="182880"/>
-            <a:ext cx="1051560" cy="749808"/>
+            <a:off x="502920" y="356616"/>
+            <a:ext cx="1051560" cy="475488"/>
           </a:xfrm>
           <a:prstGeom prst="rect">
             <a:avLst/>
@@ -10754,8 +10754,8 @@
         </p:nvSpPr>
         <p:spPr>
           <a:xfrm>
-            <a:off x="1691640" y="182880"/>
-            <a:ext cx="9006840" cy="219456"/>
+            <a:off x="10698480" y="502920"/>
+            <a:ext cx="1417320" cy="274320"/>
           </a:xfrm>
           <a:prstGeom prst="rect">
             <a:avLst/>
@@ -10867,7 +10867,7 @@
         </p:nvSpPr>
         <p:spPr>
           <a:xfrm>
-            <a:off x="1691640" y="402336"/>
+            <a:off x="1353312" y="384048"/>
             <a:ext cx="9006840" cy="530352"/>
           </a:xfrm>
           <a:prstGeom prst="rect">
@@ -10970,8 +10970,8 @@
         </p:nvSpPr>
         <p:spPr>
           <a:xfrm>
-            <a:off x="10835640" y="164592"/>
-            <a:ext cx="1188720" cy="570926"/>
+            <a:off x="11393424" y="6117336"/>
+            <a:ext cx="777240" cy="374904"/>
           </a:xfrm>
           <a:prstGeom prst="rect">
             <a:avLst/>
@@ -11755,8 +11755,8 @@
         </p:nvSpPr>
         <p:spPr>
           <a:xfrm>
-            <a:off x="502920" y="182880"/>
-            <a:ext cx="1051560" cy="749808"/>
+            <a:off x="502920" y="356616"/>
+            <a:ext cx="1051560" cy="475488"/>
           </a:xfrm>
           <a:prstGeom prst="rect">
             <a:avLst/>
@@ -11798,8 +11798,8 @@
         </p:nvSpPr>
         <p:spPr>
           <a:xfrm>
-            <a:off x="1691640" y="182880"/>
-            <a:ext cx="9006840" cy="219456"/>
+            <a:off x="10698480" y="502920"/>
+            <a:ext cx="1417320" cy="274320"/>
           </a:xfrm>
           <a:prstGeom prst="rect">
             <a:avLst/>
@@ -12337,7 +12337,7 @@
         <p:spPr>
           <a:xfrm>
             <a:off x="502920" y="1325880"/>
-            <a:ext cx="5532120" cy="1499616"/>
+            <a:ext cx="5532120" cy="1042415"/>
           </a:xfrm>
           <a:prstGeom prst="roundRect">
             <a:avLst>
@@ -12392,7 +12392,7 @@
         <p:spPr>
           <a:xfrm>
             <a:off x="685800" y="1444752"/>
-            <a:ext cx="5166360" cy="1005916"/>
+            <a:ext cx="5166360" cy="786383"/>
           </a:xfrm>
           <a:prstGeom prst="rect">
             <a:avLst/>
@@ -12693,7 +12693,7 @@
         <p:spPr>
           <a:xfrm>
             <a:off x="502920" y="3026663"/>
-            <a:ext cx="5532120" cy="1225296"/>
+            <a:ext cx="5532120" cy="859536"/>
           </a:xfrm>
           <a:prstGeom prst="roundRect">
             <a:avLst>
@@ -12748,7 +12748,7 @@
         <p:spPr>
           <a:xfrm>
             <a:off x="685800" y="3145535"/>
-            <a:ext cx="5166360" cy="778546"/>
+            <a:ext cx="5166360" cy="603503"/>
           </a:xfrm>
           <a:prstGeom prst="rect">
             <a:avLst/>
@@ -13005,7 +13005,7 @@
         <p:spPr>
           <a:xfrm>
             <a:off x="502920" y="4453127"/>
-            <a:ext cx="5532120" cy="1225296"/>
+            <a:ext cx="5532120" cy="859536"/>
           </a:xfrm>
           <a:prstGeom prst="roundRect">
             <a:avLst>
@@ -13060,7 +13060,7 @@
         <p:spPr>
           <a:xfrm>
             <a:off x="685800" y="4571999"/>
-            <a:ext cx="5166360" cy="778546"/>
+            <a:ext cx="5166360" cy="603503"/>
           </a:xfrm>
           <a:prstGeom prst="rect">
             <a:avLst/>
@@ -13294,7 +13294,7 @@
         <p:spPr>
           <a:xfrm>
             <a:off x="6263640" y="1325880"/>
-            <a:ext cx="5532120" cy="1499616"/>
+            <a:ext cx="5532120" cy="1042415"/>
           </a:xfrm>
           <a:prstGeom prst="roundRect">
             <a:avLst>
@@ -13349,7 +13349,7 @@
         <p:spPr>
           <a:xfrm>
             <a:off x="6446520" y="1444752"/>
-            <a:ext cx="5166360" cy="1005916"/>
+            <a:ext cx="5166360" cy="786383"/>
           </a:xfrm>
           <a:prstGeom prst="rect">
             <a:avLst/>
@@ -13489,7 +13489,7 @@
         <p:spPr>
           <a:xfrm>
             <a:off x="6263640" y="3026663"/>
-            <a:ext cx="5532120" cy="1225296"/>
+            <a:ext cx="5532120" cy="859536"/>
           </a:xfrm>
           <a:prstGeom prst="roundRect">
             <a:avLst>
@@ -13544,7 +13544,7 @@
         <p:spPr>
           <a:xfrm>
             <a:off x="6446520" y="3145535"/>
-            <a:ext cx="5166360" cy="551177"/>
+            <a:ext cx="5166360" cy="603503"/>
           </a:xfrm>
           <a:prstGeom prst="rect">
             <a:avLst/>
@@ -13612,23 +13612,6 @@
               </a:rPr>
               <a:t>13   기간별 일정표</a:t>
             </a:r>
-            <a:r>
-              <a:rPr lang="ko-KR" altLang="en-US" sz="1150" b="0" dirty="0">
-                <a:solidFill>
-                  <a:srgbClr val="1C1C1E"/>
-                </a:solidFill>
-                <a:latin typeface="맑은 고딕"/>
-                <a:ea typeface="맑은 고딕"/>
-              </a:rPr>
-              <a:t/>
-            </a:r>
-            <a:endParaRPr sz="1150" b="0" dirty="0">
-              <a:solidFill>
-                <a:srgbClr val="1C1C1E"/>
-              </a:solidFill>
-              <a:latin typeface="맑은 고딕"/>
-              <a:ea typeface="맑은 고딕"/>
-            </a:endParaRPr>
           </a:p>
         </p:txBody>
       </p:sp>
@@ -13753,7 +13736,7 @@
         </p:nvSpPr>
         <p:spPr>
           <a:xfrm>
-            <a:off x="1691640" y="402336"/>
+            <a:off x="1348740" y="380129"/>
             <a:ext cx="9006840" cy="530352"/>
           </a:xfrm>
           <a:prstGeom prst="rect">
@@ -13916,8 +13899,8 @@
         </p:nvSpPr>
         <p:spPr>
           <a:xfrm>
-            <a:off x="10835640" y="164592"/>
-            <a:ext cx="1188720" cy="777240"/>
+            <a:off x="11393424" y="6117336"/>
+            <a:ext cx="777240" cy="374904"/>
           </a:xfrm>
           <a:prstGeom prst="rect">
             <a:avLst/>
@@ -13948,56 +13931,6 @@
               </a:rPr>
               <a:t>03</a:t>
             </a:r>
-          </a:p>
-        </p:txBody>
-      </p:sp>
-      <p:sp>
-        <p:nvSpPr>
-          <p:cNvPr id="7" name="TextBox 6"/>
-          <p:cNvSpPr txBox="1"/>
-          <p:nvPr/>
-        </p:nvSpPr>
-        <p:spPr>
-          <a:xfrm>
-            <a:off x="548640" y="1097280"/>
-            <a:ext cx="11155680" cy="384048"/>
-          </a:xfrm>
-          <a:prstGeom prst="rect">
-            <a:avLst/>
-          </a:prstGeom>
-          <a:noFill/>
-        </p:spPr>
-        <p:txBody>
-          <a:bodyPr wrap="square" anchor="t">
-            <a:spAutoFit/>
-          </a:bodyPr>
-          <a:lstStyle/>
-          <a:p>
-            <a:pPr>
-              <a:lnSpc>
-                <a:spcPct val="114000"/>
-              </a:lnSpc>
-              <a:spcAft>
-                <a:spcPts val="0"/>
-              </a:spcAft>
-            </a:pPr>
-            <a:r>
-              <a:rPr sz="1250" b="0" dirty="0" err="1">
-                <a:solidFill>
-                  <a:srgbClr val="767A7F"/>
-                </a:solidFill>
-                <a:latin typeface="맑은 고딕"/>
-                <a:ea typeface="맑은 고딕"/>
-              </a:rPr>
-              <a:t>부족(㉠)과 배분(㉡)은 다른 문제이며 해법도 다름 — 본 계획은 ㉡을 맡음</a:t>
-            </a:r>
-            <a:endParaRPr sz="1250" b="0" dirty="0">
-              <a:solidFill>
-                <a:srgbClr val="767A7F"/>
-              </a:solidFill>
-              <a:latin typeface="맑은 고딕"/>
-              <a:ea typeface="맑은 고딕"/>
-            </a:endParaRPr>
           </a:p>
         </p:txBody>
       </p:sp>
@@ -14053,7 +13986,7 @@
         <p:spPr>
           <a:xfrm>
             <a:off x="502920" y="1371600"/>
-            <a:ext cx="3611880" cy="1783080"/>
+            <a:ext cx="3611880" cy="1307592"/>
           </a:xfrm>
           <a:prstGeom prst="roundRect">
             <a:avLst>
@@ -14108,7 +14041,7 @@
         <p:spPr>
           <a:xfrm>
             <a:off x="685800" y="1499616"/>
-            <a:ext cx="3246120" cy="933269"/>
+            <a:ext cx="3246120" cy="1051560"/>
           </a:xfrm>
           <a:prstGeom prst="rect">
             <a:avLst/>
@@ -14575,7 +14508,7 @@
         <p:spPr>
           <a:xfrm>
             <a:off x="4343400" y="1371600"/>
-            <a:ext cx="3611880" cy="1783080"/>
+            <a:ext cx="3611880" cy="1307592"/>
           </a:xfrm>
           <a:prstGeom prst="roundRect">
             <a:avLst>
@@ -14630,7 +14563,7 @@
         <p:spPr>
           <a:xfrm>
             <a:off x="4526280" y="1499616"/>
-            <a:ext cx="3246120" cy="933269"/>
+            <a:ext cx="3246120" cy="1051560"/>
           </a:xfrm>
           <a:prstGeom prst="rect">
             <a:avLst/>
@@ -15037,7 +14970,7 @@
         <p:spPr>
           <a:xfrm>
             <a:off x="8183880" y="1371600"/>
-            <a:ext cx="3611880" cy="1783080"/>
+            <a:ext cx="3611880" cy="1307592"/>
           </a:xfrm>
           <a:prstGeom prst="roundRect">
             <a:avLst>
@@ -15092,7 +15025,7 @@
         <p:spPr>
           <a:xfrm>
             <a:off x="8366760" y="1499616"/>
-            <a:ext cx="3246120" cy="1126270"/>
+            <a:ext cx="3246120" cy="1051560"/>
           </a:xfrm>
           <a:prstGeom prst="rect">
             <a:avLst/>
@@ -15212,7 +15145,7 @@
         <p:spPr>
           <a:xfrm>
             <a:off x="502920" y="3401568"/>
-            <a:ext cx="11292840" cy="1783080"/>
+            <a:ext cx="11292840" cy="1362456"/>
           </a:xfrm>
           <a:prstGeom prst="roundRect">
             <a:avLst>
@@ -15267,7 +15200,7 @@
         <p:spPr>
           <a:xfrm>
             <a:off x="685800" y="3529584"/>
-            <a:ext cx="10927080" cy="1197864"/>
+            <a:ext cx="10927080" cy="1106424"/>
           </a:xfrm>
           <a:prstGeom prst="rect">
             <a:avLst/>
@@ -16189,8 +16122,8 @@
         </p:nvSpPr>
         <p:spPr>
           <a:xfrm>
-            <a:off x="502920" y="182880"/>
-            <a:ext cx="1051560" cy="749808"/>
+            <a:off x="502920" y="356616"/>
+            <a:ext cx="1051560" cy="475488"/>
           </a:xfrm>
           <a:prstGeom prst="rect">
             <a:avLst/>
@@ -16212,7 +16145,7 @@
               </a:spcAft>
             </a:pPr>
             <a:r>
-              <a:rPr sz="2200" b="1">
+              <a:rPr sz="2200" b="1" dirty="0">
                 <a:solidFill>
                   <a:srgbClr val="5A5E64"/>
                 </a:solidFill>
@@ -16232,8 +16165,8 @@
         </p:nvSpPr>
         <p:spPr>
           <a:xfrm>
-            <a:off x="1691640" y="182880"/>
-            <a:ext cx="9006840" cy="219456"/>
+            <a:off x="10698480" y="502920"/>
+            <a:ext cx="1417320" cy="274320"/>
           </a:xfrm>
           <a:prstGeom prst="rect">
             <a:avLst/>
@@ -16345,7 +16278,7 @@
         </p:nvSpPr>
         <p:spPr>
           <a:xfrm>
-            <a:off x="1691640" y="402336"/>
+            <a:off x="1353312" y="384048"/>
             <a:ext cx="9006840" cy="530352"/>
           </a:xfrm>
           <a:prstGeom prst="rect">
@@ -16441,8 +16374,8 @@
         </p:nvSpPr>
         <p:spPr>
           <a:xfrm>
-            <a:off x="10835640" y="164592"/>
-            <a:ext cx="1188720" cy="777240"/>
+            <a:off x="11393424" y="6117336"/>
+            <a:ext cx="777240" cy="374904"/>
           </a:xfrm>
           <a:prstGeom prst="rect">
             <a:avLst/>
@@ -16571,7 +16504,7 @@
         <p:spPr>
           <a:xfrm>
             <a:off x="502920" y="1371600"/>
-            <a:ext cx="3291840" cy="1298448"/>
+            <a:ext cx="3291840" cy="969264"/>
           </a:xfrm>
           <a:prstGeom prst="roundRect">
             <a:avLst>
@@ -16626,7 +16559,7 @@
         <p:spPr>
           <a:xfrm>
             <a:off x="667512" y="1444752"/>
-            <a:ext cx="3017520" cy="929935"/>
+            <a:ext cx="3017520" cy="713232"/>
           </a:xfrm>
           <a:prstGeom prst="rect">
             <a:avLst/>
@@ -17010,7 +16943,7 @@
         <p:spPr>
           <a:xfrm>
             <a:off x="4480559" y="1371600"/>
-            <a:ext cx="3291840" cy="1298448"/>
+            <a:ext cx="3291840" cy="969264"/>
           </a:xfrm>
           <a:prstGeom prst="roundRect">
             <a:avLst>
@@ -17065,7 +16998,7 @@
         <p:spPr>
           <a:xfrm>
             <a:off x="4645151" y="1444752"/>
-            <a:ext cx="3017520" cy="1152144"/>
+            <a:ext cx="3017520" cy="713232"/>
           </a:xfrm>
           <a:prstGeom prst="rect">
             <a:avLst/>
@@ -17349,7 +17282,7 @@
         <p:spPr>
           <a:xfrm>
             <a:off x="8458200" y="1371600"/>
-            <a:ext cx="3291840" cy="1298448"/>
+            <a:ext cx="3291840" cy="969264"/>
           </a:xfrm>
           <a:prstGeom prst="roundRect">
             <a:avLst>
@@ -17404,7 +17337,7 @@
         <p:spPr>
           <a:xfrm>
             <a:off x="8622792" y="1444752"/>
-            <a:ext cx="3017520" cy="1152144"/>
+            <a:ext cx="3017520" cy="713232"/>
           </a:xfrm>
           <a:prstGeom prst="rect">
             <a:avLst/>
@@ -17507,7 +17440,7 @@
         <p:spPr>
           <a:xfrm>
             <a:off x="502920" y="2834640"/>
-            <a:ext cx="5532120" cy="1965960"/>
+            <a:ext cx="5532120" cy="1755648"/>
           </a:xfrm>
           <a:prstGeom prst="roundRect">
             <a:avLst>
@@ -17562,7 +17495,7 @@
         <p:spPr>
           <a:xfrm>
             <a:off x="685800" y="2962656"/>
-            <a:ext cx="5166359" cy="1691640"/>
+            <a:ext cx="5166359" cy="1499616"/>
           </a:xfrm>
           <a:prstGeom prst="rect">
             <a:avLst/>
@@ -17712,7 +17645,7 @@
         <p:spPr>
           <a:xfrm>
             <a:off x="6263640" y="2834640"/>
-            <a:ext cx="5532120" cy="1965960"/>
+            <a:ext cx="5532120" cy="1755648"/>
           </a:xfrm>
           <a:prstGeom prst="roundRect">
             <a:avLst>
@@ -17767,7 +17700,7 @@
         <p:spPr>
           <a:xfrm>
             <a:off x="6446520" y="2962656"/>
-            <a:ext cx="5166359" cy="1691640"/>
+            <a:ext cx="5166359" cy="1499616"/>
           </a:xfrm>
           <a:prstGeom prst="rect">
             <a:avLst/>
@@ -17944,7 +17877,7 @@
         <p:spPr>
           <a:xfrm>
             <a:off x="502920" y="4965192"/>
-            <a:ext cx="11292840" cy="1371600"/>
+            <a:ext cx="11292840" cy="1060704"/>
           </a:xfrm>
           <a:prstGeom prst="roundRect">
             <a:avLst>
@@ -17999,7 +17932,7 @@
         <p:spPr>
           <a:xfrm>
             <a:off x="685800" y="5093207"/>
-            <a:ext cx="10927080" cy="1115568"/>
+            <a:ext cx="10927080" cy="804671"/>
           </a:xfrm>
           <a:prstGeom prst="rect">
             <a:avLst/>
@@ -18168,8 +18101,8 @@
         </p:nvSpPr>
         <p:spPr>
           <a:xfrm>
-            <a:off x="502920" y="182880"/>
-            <a:ext cx="1051560" cy="749808"/>
+            <a:off x="502920" y="356616"/>
+            <a:ext cx="1051560" cy="475488"/>
           </a:xfrm>
           <a:prstGeom prst="rect">
             <a:avLst/>
@@ -18211,8 +18144,8 @@
         </p:nvSpPr>
         <p:spPr>
           <a:xfrm>
-            <a:off x="1691640" y="182880"/>
-            <a:ext cx="9006840" cy="219456"/>
+            <a:off x="10698480" y="502920"/>
+            <a:ext cx="1417320" cy="274320"/>
           </a:xfrm>
           <a:prstGeom prst="rect">
             <a:avLst/>
@@ -18324,7 +18257,7 @@
         </p:nvSpPr>
         <p:spPr>
           <a:xfrm>
-            <a:off x="1691640" y="402336"/>
+            <a:off x="1353312" y="384048"/>
             <a:ext cx="9006840" cy="530352"/>
           </a:xfrm>
           <a:prstGeom prst="rect">
@@ -18477,8 +18410,8 @@
         </p:nvSpPr>
         <p:spPr>
           <a:xfrm>
-            <a:off x="10835640" y="164592"/>
-            <a:ext cx="1188720" cy="777240"/>
+            <a:off x="11393424" y="6117336"/>
+            <a:ext cx="777240" cy="374904"/>
           </a:xfrm>
           <a:prstGeom prst="rect">
             <a:avLst/>
@@ -18564,7 +18497,7 @@
         <p:spPr>
           <a:xfrm>
             <a:off x="502920" y="1371600"/>
-            <a:ext cx="5532120" cy="1737360"/>
+            <a:ext cx="5532120" cy="1106424"/>
           </a:xfrm>
           <a:prstGeom prst="roundRect">
             <a:avLst>
@@ -18619,7 +18552,7 @@
         <p:spPr>
           <a:xfrm>
             <a:off x="521208" y="1600200"/>
-            <a:ext cx="82296" cy="1280160"/>
+            <a:ext cx="82296" cy="649224"/>
           </a:xfrm>
           <a:prstGeom prst="roundRect">
             <a:avLst>
@@ -18680,7 +18613,7 @@
         <p:spPr>
           <a:xfrm>
             <a:off x="822960" y="1536192"/>
-            <a:ext cx="5074920" cy="847220"/>
+            <a:ext cx="5074920" cy="850392"/>
           </a:xfrm>
           <a:prstGeom prst="rect">
             <a:avLst/>
@@ -19060,7 +18993,7 @@
         <p:spPr>
           <a:xfrm>
             <a:off x="6263640" y="1371600"/>
-            <a:ext cx="5532120" cy="1737360"/>
+            <a:ext cx="5532120" cy="1106424"/>
           </a:xfrm>
           <a:prstGeom prst="roundRect">
             <a:avLst>
@@ -19115,7 +19048,7 @@
         <p:spPr>
           <a:xfrm>
             <a:off x="6281927" y="1600200"/>
-            <a:ext cx="82296" cy="1280160"/>
+            <a:ext cx="82296" cy="649224"/>
           </a:xfrm>
           <a:prstGeom prst="roundRect">
             <a:avLst>
@@ -19176,7 +19109,7 @@
         <p:spPr>
           <a:xfrm>
             <a:off x="6583679" y="1536192"/>
-            <a:ext cx="5074920" cy="847220"/>
+            <a:ext cx="5074920" cy="850392"/>
           </a:xfrm>
           <a:prstGeom prst="rect">
             <a:avLst/>
@@ -19516,7 +19449,7 @@
         <p:spPr>
           <a:xfrm>
             <a:off x="502920" y="3337560"/>
-            <a:ext cx="5532120" cy="1737360"/>
+            <a:ext cx="5532120" cy="1106424"/>
           </a:xfrm>
           <a:prstGeom prst="roundRect">
             <a:avLst>
@@ -19571,7 +19504,7 @@
         <p:spPr>
           <a:xfrm>
             <a:off x="521208" y="3566160"/>
-            <a:ext cx="82296" cy="1280160"/>
+            <a:ext cx="82296" cy="649224"/>
           </a:xfrm>
           <a:prstGeom prst="roundRect">
             <a:avLst>
@@ -19632,7 +19565,7 @@
         <p:spPr>
           <a:xfrm>
             <a:off x="822960" y="3502152"/>
-            <a:ext cx="5074920" cy="847220"/>
+            <a:ext cx="5074920" cy="850392"/>
           </a:xfrm>
           <a:prstGeom prst="rect">
             <a:avLst/>
@@ -19992,7 +19925,7 @@
         <p:spPr>
           <a:xfrm>
             <a:off x="6263640" y="3337560"/>
-            <a:ext cx="5532120" cy="1737360"/>
+            <a:ext cx="5532120" cy="1106424"/>
           </a:xfrm>
           <a:prstGeom prst="roundRect">
             <a:avLst>
@@ -20047,7 +19980,7 @@
         <p:spPr>
           <a:xfrm>
             <a:off x="6281927" y="3566160"/>
-            <a:ext cx="82296" cy="1280160"/>
+            <a:ext cx="82296" cy="649224"/>
           </a:xfrm>
           <a:prstGeom prst="roundRect">
             <a:avLst>
@@ -20108,7 +20041,7 @@
         <p:spPr>
           <a:xfrm>
             <a:off x="6583679" y="3502152"/>
-            <a:ext cx="5074920" cy="847220"/>
+            <a:ext cx="5074920" cy="850392"/>
           </a:xfrm>
           <a:prstGeom prst="rect">
             <a:avLst/>
@@ -20524,8 +20457,8 @@
         </p:nvSpPr>
         <p:spPr>
           <a:xfrm>
-            <a:off x="502920" y="182880"/>
-            <a:ext cx="1051560" cy="749808"/>
+            <a:off x="502920" y="356616"/>
+            <a:ext cx="1051560" cy="475488"/>
           </a:xfrm>
           <a:prstGeom prst="rect">
             <a:avLst/>
@@ -20547,7 +20480,7 @@
               </a:spcAft>
             </a:pPr>
             <a:r>
-              <a:rPr sz="2200" b="1">
+              <a:rPr sz="2200" b="1" dirty="0">
                 <a:solidFill>
                   <a:srgbClr val="5A5E64"/>
                 </a:solidFill>
@@ -20567,8 +20500,8 @@
         </p:nvSpPr>
         <p:spPr>
           <a:xfrm>
-            <a:off x="1691640" y="182880"/>
-            <a:ext cx="9006840" cy="219456"/>
+            <a:off x="10698480" y="502920"/>
+            <a:ext cx="1417320" cy="274320"/>
           </a:xfrm>
           <a:prstGeom prst="rect">
             <a:avLst/>
@@ -20680,7 +20613,7 @@
         </p:nvSpPr>
         <p:spPr>
           <a:xfrm>
-            <a:off x="1691640" y="402336"/>
+            <a:off x="1353312" y="384048"/>
             <a:ext cx="9006840" cy="530352"/>
           </a:xfrm>
           <a:prstGeom prst="rect">
@@ -20776,8 +20709,8 @@
         </p:nvSpPr>
         <p:spPr>
           <a:xfrm>
-            <a:off x="10835640" y="164592"/>
-            <a:ext cx="1188720" cy="777240"/>
+            <a:off x="11393424" y="6117336"/>
+            <a:ext cx="777240" cy="374904"/>
           </a:xfrm>
           <a:prstGeom prst="rect">
             <a:avLst/>
@@ -20863,7 +20796,7 @@
         <p:spPr>
           <a:xfrm>
             <a:off x="502920" y="1371600"/>
-            <a:ext cx="5532120" cy="1645920"/>
+            <a:ext cx="5532120" cy="1426464"/>
           </a:xfrm>
           <a:prstGeom prst="roundRect">
             <a:avLst>
@@ -20918,7 +20851,7 @@
         <p:spPr>
           <a:xfrm>
             <a:off x="685800" y="1499616"/>
-            <a:ext cx="5166359" cy="1389888"/>
+            <a:ext cx="5166359" cy="1170432"/>
           </a:xfrm>
           <a:prstGeom prst="rect">
             <a:avLst/>
@@ -21041,7 +20974,7 @@
         <p:spPr>
           <a:xfrm>
             <a:off x="6263640" y="1371600"/>
-            <a:ext cx="5532120" cy="1645920"/>
+            <a:ext cx="5532120" cy="1426464"/>
           </a:xfrm>
           <a:prstGeom prst="roundRect">
             <a:avLst>
@@ -21096,7 +21029,7 @@
         <p:spPr>
           <a:xfrm>
             <a:off x="6446520" y="1499616"/>
-            <a:ext cx="5166359" cy="1389888"/>
+            <a:ext cx="5166359" cy="1170432"/>
           </a:xfrm>
           <a:prstGeom prst="rect">
             <a:avLst/>
@@ -22532,8 +22465,8 @@
         </p:nvSpPr>
         <p:spPr>
           <a:xfrm>
-            <a:off x="502920" y="182880"/>
-            <a:ext cx="1051560" cy="749808"/>
+            <a:off x="502920" y="356616"/>
+            <a:ext cx="1051560" cy="475488"/>
           </a:xfrm>
           <a:prstGeom prst="rect">
             <a:avLst/>
@@ -22575,8 +22508,8 @@
         </p:nvSpPr>
         <p:spPr>
           <a:xfrm>
-            <a:off x="1691640" y="182880"/>
-            <a:ext cx="9006840" cy="219456"/>
+            <a:off x="10698480" y="502920"/>
+            <a:ext cx="1417320" cy="274320"/>
           </a:xfrm>
           <a:prstGeom prst="rect">
             <a:avLst/>
@@ -22688,7 +22621,7 @@
         </p:nvSpPr>
         <p:spPr>
           <a:xfrm>
-            <a:off x="1691640" y="402336"/>
+            <a:off x="1353312" y="384048"/>
             <a:ext cx="9006840" cy="530352"/>
           </a:xfrm>
           <a:prstGeom prst="rect">
@@ -22931,8 +22864,8 @@
         </p:nvSpPr>
         <p:spPr>
           <a:xfrm>
-            <a:off x="10835640" y="164592"/>
-            <a:ext cx="1188720" cy="777240"/>
+            <a:off x="11393424" y="6117336"/>
+            <a:ext cx="777240" cy="374904"/>
           </a:xfrm>
           <a:prstGeom prst="rect">
             <a:avLst/>
@@ -23649,7 +23582,7 @@
         <p:spPr>
           <a:xfrm>
             <a:off x="502920" y="3703320"/>
-            <a:ext cx="5532120" cy="1920240"/>
+            <a:ext cx="5532120" cy="1609344"/>
           </a:xfrm>
           <a:prstGeom prst="roundRect">
             <a:avLst>
@@ -23704,7 +23637,7 @@
         <p:spPr>
           <a:xfrm>
             <a:off x="685800" y="3831335"/>
-            <a:ext cx="5166359" cy="1211678"/>
+            <a:ext cx="5166359" cy="1353312"/>
           </a:xfrm>
           <a:prstGeom prst="rect">
             <a:avLst/>
@@ -24357,7 +24290,7 @@
         <p:spPr>
           <a:xfrm>
             <a:off x="6263640" y="3703320"/>
-            <a:ext cx="5532120" cy="1920240"/>
+            <a:ext cx="5532120" cy="1609344"/>
           </a:xfrm>
           <a:prstGeom prst="roundRect">
             <a:avLst>
@@ -24412,7 +24345,7 @@
         <p:spPr>
           <a:xfrm>
             <a:off x="6446520" y="3831335"/>
-            <a:ext cx="5166359" cy="1262974"/>
+            <a:ext cx="5166359" cy="1353312"/>
           </a:xfrm>
           <a:prstGeom prst="rect">
             <a:avLst/>
@@ -25439,8 +25372,8 @@
         </p:nvSpPr>
         <p:spPr>
           <a:xfrm>
-            <a:off x="502920" y="182880"/>
-            <a:ext cx="1051560" cy="749808"/>
+            <a:off x="502920" y="356616"/>
+            <a:ext cx="1051560" cy="475488"/>
           </a:xfrm>
           <a:prstGeom prst="rect">
             <a:avLst/>
@@ -25482,8 +25415,8 @@
         </p:nvSpPr>
         <p:spPr>
           <a:xfrm>
-            <a:off x="1691640" y="182880"/>
-            <a:ext cx="9006840" cy="219456"/>
+            <a:off x="10698480" y="502920"/>
+            <a:ext cx="1417320" cy="274320"/>
           </a:xfrm>
           <a:prstGeom prst="rect">
             <a:avLst/>
@@ -25595,7 +25528,7 @@
         </p:nvSpPr>
         <p:spPr>
           <a:xfrm>
-            <a:off x="1691640" y="402336"/>
+            <a:off x="1353312" y="384048"/>
             <a:ext cx="9006840" cy="530352"/>
           </a:xfrm>
           <a:prstGeom prst="rect">
@@ -25838,8 +25771,8 @@
         </p:nvSpPr>
         <p:spPr>
           <a:xfrm>
-            <a:off x="10835640" y="164592"/>
-            <a:ext cx="1188720" cy="777240"/>
+            <a:off x="11393424" y="6117336"/>
+            <a:ext cx="777240" cy="374904"/>
           </a:xfrm>
           <a:prstGeom prst="rect">
             <a:avLst/>
@@ -26628,7 +26561,7 @@
         <p:spPr>
           <a:xfrm>
             <a:off x="502920" y="4297680"/>
-            <a:ext cx="3611880" cy="1627632"/>
+            <a:ext cx="3611880" cy="1179576"/>
           </a:xfrm>
           <a:prstGeom prst="roundRect">
             <a:avLst>
@@ -26683,7 +26616,7 @@
         <p:spPr>
           <a:xfrm>
             <a:off x="685800" y="4425696"/>
-            <a:ext cx="3246120" cy="1371600"/>
+            <a:ext cx="3246120" cy="923544"/>
           </a:xfrm>
           <a:prstGeom prst="rect">
             <a:avLst/>
@@ -26990,7 +26923,7 @@
         <p:spPr>
           <a:xfrm>
             <a:off x="4343400" y="4297680"/>
-            <a:ext cx="3611880" cy="1627632"/>
+            <a:ext cx="3611880" cy="1179576"/>
           </a:xfrm>
           <a:prstGeom prst="roundRect">
             <a:avLst>
@@ -27045,7 +26978,7 @@
         <p:spPr>
           <a:xfrm>
             <a:off x="4526280" y="4425696"/>
-            <a:ext cx="3246120" cy="1371600"/>
+            <a:ext cx="3246120" cy="923544"/>
           </a:xfrm>
           <a:prstGeom prst="rect">
             <a:avLst/>
@@ -27382,7 +27315,7 @@
         <p:spPr>
           <a:xfrm>
             <a:off x="8183880" y="4297680"/>
-            <a:ext cx="3611880" cy="1627632"/>
+            <a:ext cx="3611880" cy="1179576"/>
           </a:xfrm>
           <a:prstGeom prst="roundRect">
             <a:avLst>
@@ -27437,7 +27370,7 @@
         <p:spPr>
           <a:xfrm>
             <a:off x="8366760" y="4425696"/>
-            <a:ext cx="3246120" cy="1371600"/>
+            <a:ext cx="3246120" cy="923544"/>
           </a:xfrm>
           <a:prstGeom prst="rect">
             <a:avLst/>
@@ -28019,8 +27952,8 @@
         </p:nvSpPr>
         <p:spPr>
           <a:xfrm>
-            <a:off x="502920" y="182880"/>
-            <a:ext cx="1051560" cy="749808"/>
+            <a:off x="502920" y="356616"/>
+            <a:ext cx="1051560" cy="475488"/>
           </a:xfrm>
           <a:prstGeom prst="rect">
             <a:avLst/>
@@ -28062,8 +27995,8 @@
         </p:nvSpPr>
         <p:spPr>
           <a:xfrm>
-            <a:off x="1691640" y="182880"/>
-            <a:ext cx="9006840" cy="219456"/>
+            <a:off x="10698480" y="502920"/>
+            <a:ext cx="1417320" cy="274320"/>
           </a:xfrm>
           <a:prstGeom prst="rect">
             <a:avLst/>
@@ -28175,7 +28108,7 @@
         </p:nvSpPr>
         <p:spPr>
           <a:xfrm>
-            <a:off x="1691640" y="402336"/>
+            <a:off x="1353312" y="384048"/>
             <a:ext cx="9006840" cy="530352"/>
           </a:xfrm>
           <a:prstGeom prst="rect">
@@ -28338,8 +28271,8 @@
         </p:nvSpPr>
         <p:spPr>
           <a:xfrm>
-            <a:off x="10835640" y="164592"/>
-            <a:ext cx="1188720" cy="777240"/>
+            <a:off x="11393424" y="6117336"/>
+            <a:ext cx="777240" cy="374904"/>
           </a:xfrm>
           <a:prstGeom prst="rect">
             <a:avLst/>
@@ -29509,7 +29442,7 @@
         <p:spPr>
           <a:xfrm>
             <a:off x="502920" y="4480560"/>
-            <a:ext cx="11292840" cy="1600200"/>
+            <a:ext cx="11292840" cy="1060704"/>
           </a:xfrm>
           <a:prstGeom prst="roundRect">
             <a:avLst>
@@ -29564,7 +29497,7 @@
         <p:spPr>
           <a:xfrm>
             <a:off x="685800" y="4608576"/>
-            <a:ext cx="10927080" cy="1344168"/>
+            <a:ext cx="10927080" cy="804671"/>
           </a:xfrm>
           <a:prstGeom prst="rect">
             <a:avLst/>
@@ -29666,8 +29599,8 @@
         </p:nvSpPr>
         <p:spPr>
           <a:xfrm>
-            <a:off x="502920" y="182880"/>
-            <a:ext cx="1051560" cy="749808"/>
+            <a:off x="502920" y="356616"/>
+            <a:ext cx="1051560" cy="475488"/>
           </a:xfrm>
           <a:prstGeom prst="rect">
             <a:avLst/>
@@ -29709,8 +29642,8 @@
         </p:nvSpPr>
         <p:spPr>
           <a:xfrm>
-            <a:off x="1691640" y="182880"/>
-            <a:ext cx="9006840" cy="219456"/>
+            <a:off x="10698480" y="502920"/>
+            <a:ext cx="1417320" cy="274320"/>
           </a:xfrm>
           <a:prstGeom prst="rect">
             <a:avLst/>

--- a/05_작업자료/_PPT생성본/데이터분석_계획서.pptx
+++ b/05_작업자료/_PPT생성본/데이터분석_계획서.pptx
@@ -6504,8 +6504,8 @@
         </p:nvSpPr>
         <p:spPr>
           <a:xfrm>
-            <a:off x="640080" y="3227832"/>
-            <a:ext cx="2103120" cy="246888"/>
+            <a:off x="685800" y="3282696"/>
+            <a:ext cx="1920239" cy="246888"/>
           </a:xfrm>
           <a:prstGeom prst="rect">
             <a:avLst/>
@@ -6602,8 +6602,8 @@
         </p:nvSpPr>
         <p:spPr>
           <a:xfrm>
-            <a:off x="3108960" y="3227832"/>
-            <a:ext cx="8549640" cy="246888"/>
+            <a:off x="3108960" y="3282696"/>
+            <a:ext cx="8503920" cy="246888"/>
           </a:xfrm>
           <a:prstGeom prst="rect">
             <a:avLst/>
@@ -6706,8 +6706,8 @@
         </p:nvSpPr>
         <p:spPr>
           <a:xfrm>
-            <a:off x="640080" y="4096512"/>
-            <a:ext cx="2103120" cy="246888"/>
+            <a:off x="685800" y="4151376"/>
+            <a:ext cx="1920239" cy="246888"/>
           </a:xfrm>
           <a:prstGeom prst="rect">
             <a:avLst/>
@@ -6804,8 +6804,8 @@
         </p:nvSpPr>
         <p:spPr>
           <a:xfrm>
-            <a:off x="3108960" y="4096512"/>
-            <a:ext cx="8549640" cy="246888"/>
+            <a:off x="3108960" y="4151376"/>
+            <a:ext cx="8503920" cy="246888"/>
           </a:xfrm>
           <a:prstGeom prst="rect">
             <a:avLst/>
@@ -7095,8 +7095,8 @@
         </p:nvSpPr>
         <p:spPr>
           <a:xfrm>
-            <a:off x="640080" y="4965192"/>
-            <a:ext cx="2103120" cy="548640"/>
+            <a:off x="685800" y="5020055"/>
+            <a:ext cx="1920239" cy="429768"/>
           </a:xfrm>
           <a:prstGeom prst="rect">
             <a:avLst/>
@@ -7193,8 +7193,8 @@
         </p:nvSpPr>
         <p:spPr>
           <a:xfrm>
-            <a:off x="3108960" y="4965192"/>
-            <a:ext cx="8549640" cy="548640"/>
+            <a:off x="3108960" y="5020055"/>
+            <a:ext cx="8503920" cy="429768"/>
           </a:xfrm>
           <a:prstGeom prst="rect">
             <a:avLst/>
@@ -12337,7 +12337,7 @@
         <p:spPr>
           <a:xfrm>
             <a:off x="502920" y="1325880"/>
-            <a:ext cx="5532120" cy="1042415"/>
+            <a:ext cx="5532120" cy="1188720"/>
           </a:xfrm>
           <a:prstGeom prst="roundRect">
             <a:avLst>
@@ -12391,8 +12391,8 @@
         </p:nvSpPr>
         <p:spPr>
           <a:xfrm>
-            <a:off x="685800" y="1444752"/>
-            <a:ext cx="5166360" cy="786383"/>
+            <a:off x="685800" y="1453895"/>
+            <a:ext cx="5166359" cy="932688"/>
           </a:xfrm>
           <a:prstGeom prst="rect">
             <a:avLst/>
@@ -12693,7 +12693,7 @@
         <p:spPr>
           <a:xfrm>
             <a:off x="502920" y="3026663"/>
-            <a:ext cx="5532120" cy="859536"/>
+            <a:ext cx="5532120" cy="1005840"/>
           </a:xfrm>
           <a:prstGeom prst="roundRect">
             <a:avLst>
@@ -12747,8 +12747,8 @@
         </p:nvSpPr>
         <p:spPr>
           <a:xfrm>
-            <a:off x="685800" y="3145535"/>
-            <a:ext cx="5166360" cy="603503"/>
+            <a:off x="685800" y="3154679"/>
+            <a:ext cx="5166359" cy="749808"/>
           </a:xfrm>
           <a:prstGeom prst="rect">
             <a:avLst/>
@@ -13005,7 +13005,7 @@
         <p:spPr>
           <a:xfrm>
             <a:off x="502920" y="4453127"/>
-            <a:ext cx="5532120" cy="859536"/>
+            <a:ext cx="5532120" cy="1005840"/>
           </a:xfrm>
           <a:prstGeom prst="roundRect">
             <a:avLst>
@@ -13059,8 +13059,8 @@
         </p:nvSpPr>
         <p:spPr>
           <a:xfrm>
-            <a:off x="685800" y="4571999"/>
-            <a:ext cx="5166360" cy="603503"/>
+            <a:off x="685800" y="4581143"/>
+            <a:ext cx="5166359" cy="749808"/>
           </a:xfrm>
           <a:prstGeom prst="rect">
             <a:avLst/>
@@ -13294,7 +13294,7 @@
         <p:spPr>
           <a:xfrm>
             <a:off x="6263640" y="1325880"/>
-            <a:ext cx="5532120" cy="1042415"/>
+            <a:ext cx="5532120" cy="1188720"/>
           </a:xfrm>
           <a:prstGeom prst="roundRect">
             <a:avLst>
@@ -13348,8 +13348,8 @@
         </p:nvSpPr>
         <p:spPr>
           <a:xfrm>
-            <a:off x="6446520" y="1444752"/>
-            <a:ext cx="5166360" cy="786383"/>
+            <a:off x="6446520" y="1453895"/>
+            <a:ext cx="5166359" cy="932688"/>
           </a:xfrm>
           <a:prstGeom prst="rect">
             <a:avLst/>
@@ -16558,8 +16558,8 @@
         </p:nvSpPr>
         <p:spPr>
           <a:xfrm>
-            <a:off x="667512" y="1444752"/>
-            <a:ext cx="3017520" cy="713232"/>
+            <a:off x="685800" y="1499616"/>
+            <a:ext cx="2926079" cy="713232"/>
           </a:xfrm>
           <a:prstGeom prst="rect">
             <a:avLst/>
@@ -16997,8 +16997,8 @@
         </p:nvSpPr>
         <p:spPr>
           <a:xfrm>
-            <a:off x="4645151" y="1444752"/>
-            <a:ext cx="3017520" cy="713232"/>
+            <a:off x="4663439" y="1499616"/>
+            <a:ext cx="2926079" cy="713232"/>
           </a:xfrm>
           <a:prstGeom prst="rect">
             <a:avLst/>
@@ -17336,8 +17336,8 @@
         </p:nvSpPr>
         <p:spPr>
           <a:xfrm>
-            <a:off x="8622792" y="1444752"/>
-            <a:ext cx="3017520" cy="713232"/>
+            <a:off x="8641080" y="1499616"/>
+            <a:ext cx="2926079" cy="713232"/>
           </a:xfrm>
           <a:prstGeom prst="rect">
             <a:avLst/>
@@ -18612,8 +18612,8 @@
         </p:nvSpPr>
         <p:spPr>
           <a:xfrm>
-            <a:off x="822960" y="1536192"/>
-            <a:ext cx="5074920" cy="850392"/>
+            <a:off x="822960" y="1499616"/>
+            <a:ext cx="5029200" cy="850391"/>
           </a:xfrm>
           <a:prstGeom prst="rect">
             <a:avLst/>
@@ -19108,8 +19108,8 @@
         </p:nvSpPr>
         <p:spPr>
           <a:xfrm>
-            <a:off x="6583679" y="1536192"/>
-            <a:ext cx="5074920" cy="850392"/>
+            <a:off x="6583679" y="1499616"/>
+            <a:ext cx="5029200" cy="850391"/>
           </a:xfrm>
           <a:prstGeom prst="rect">
             <a:avLst/>
@@ -19564,8 +19564,8 @@
         </p:nvSpPr>
         <p:spPr>
           <a:xfrm>
-            <a:off x="822960" y="3502152"/>
-            <a:ext cx="5074920" cy="850392"/>
+            <a:off x="822960" y="3465576"/>
+            <a:ext cx="5029200" cy="850391"/>
           </a:xfrm>
           <a:prstGeom prst="rect">
             <a:avLst/>
@@ -20040,8 +20040,8 @@
         </p:nvSpPr>
         <p:spPr>
           <a:xfrm>
-            <a:off x="6583679" y="3502152"/>
-            <a:ext cx="5074920" cy="850392"/>
+            <a:off x="6583679" y="3465576"/>
+            <a:ext cx="5029200" cy="850391"/>
           </a:xfrm>
           <a:prstGeom prst="rect">
             <a:avLst/>
@@ -23582,7 +23582,7 @@
         <p:spPr>
           <a:xfrm>
             <a:off x="502920" y="3703320"/>
-            <a:ext cx="5532120" cy="1609344"/>
+            <a:ext cx="5532120" cy="1920240"/>
           </a:xfrm>
           <a:prstGeom prst="roundRect">
             <a:avLst>
@@ -23636,8 +23636,8 @@
         </p:nvSpPr>
         <p:spPr>
           <a:xfrm>
-            <a:off x="685800" y="3831335"/>
-            <a:ext cx="5166359" cy="1353312"/>
+            <a:off x="685800" y="3831336"/>
+            <a:ext cx="5166360" cy="237744"/>
           </a:xfrm>
           <a:prstGeom prst="rect">
             <a:avLst/>
@@ -23709,576 +23709,6 @@
               <a:t> 제2026-144호, 108곳)</a:t>
             </a:r>
           </a:p>
-          <a:p>
-            <a:pPr marL="160020" indent="-160020">
-              <a:lnSpc>
-                <a:spcPct val="114000"/>
-              </a:lnSpc>
-              <a:spcAft>
-                <a:spcPts val="200"/>
-              </a:spcAft>
-            </a:pPr>
-            <a:r>
-              <a:rPr sz="1150" b="0" dirty="0">
-                <a:solidFill>
-                  <a:srgbClr val="1C1C1E"/>
-                </a:solidFill>
-                <a:latin typeface="맑은 고딕"/>
-                <a:ea typeface="맑은 고딕"/>
-              </a:rPr>
-              <a:t>• A: 두 </a:t>
-            </a:r>
-            <a:r>
-              <a:rPr lang="ko-KR" altLang="en-US" sz="1150" b="0" dirty="0">
-                <a:solidFill>
-                  <a:srgbClr val="1C1C1E"/>
-                </a:solidFill>
-                <a:latin typeface="맑은 고딕"/>
-                <a:ea typeface="맑은 고딕"/>
-              </a:rPr>
-              <a:t>판정 </a:t>
-            </a:r>
-            <a:r>
-              <a:rPr sz="1150" b="0" dirty="0" err="1">
-                <a:solidFill>
-                  <a:srgbClr val="1C1C1E"/>
-                </a:solidFill>
-                <a:latin typeface="맑은 고딕"/>
-                <a:ea typeface="맑은 고딕"/>
-              </a:rPr>
-              <a:t>지표</a:t>
-            </a:r>
-            <a:r>
-              <a:rPr sz="1150" b="0" dirty="0">
-                <a:solidFill>
-                  <a:srgbClr val="1C1C1E"/>
-                </a:solidFill>
-                <a:latin typeface="맑은 고딕"/>
-                <a:ea typeface="맑은 고딕"/>
-              </a:rPr>
-              <a:t> </a:t>
-            </a:r>
-            <a:r>
-              <a:rPr sz="1150" b="0" dirty="0" err="1">
-                <a:solidFill>
-                  <a:srgbClr val="1C1C1E"/>
-                </a:solidFill>
-                <a:latin typeface="맑은 고딕"/>
-                <a:ea typeface="맑은 고딕"/>
-              </a:rPr>
-              <a:t>모두</a:t>
-            </a:r>
-            <a:r>
-              <a:rPr sz="1150" b="0" dirty="0">
-                <a:solidFill>
-                  <a:srgbClr val="1C1C1E"/>
-                </a:solidFill>
-                <a:latin typeface="맑은 고딕"/>
-                <a:ea typeface="맑은 고딕"/>
-              </a:rPr>
-              <a:t> </a:t>
-            </a:r>
-            <a:r>
-              <a:rPr sz="1150" b="0" dirty="0" err="1">
-                <a:solidFill>
-                  <a:srgbClr val="1C1C1E"/>
-                </a:solidFill>
-                <a:latin typeface="맑은 고딕"/>
-                <a:ea typeface="맑은 고딕"/>
-              </a:rPr>
-              <a:t>취약</a:t>
-            </a:r>
-            <a:r>
-              <a:rPr sz="1150" b="0" dirty="0">
-                <a:solidFill>
-                  <a:srgbClr val="1C1C1E"/>
-                </a:solidFill>
-                <a:latin typeface="맑은 고딕"/>
-                <a:ea typeface="맑은 고딕"/>
-              </a:rPr>
-              <a:t> (32곳) / B: </a:t>
-            </a:r>
-            <a:r>
-              <a:rPr sz="1150" b="0" dirty="0" err="1">
-                <a:solidFill>
-                  <a:srgbClr val="1C1C1E"/>
-                </a:solidFill>
-                <a:latin typeface="맑은 고딕"/>
-                <a:ea typeface="맑은 고딕"/>
-              </a:rPr>
-              <a:t>하나만</a:t>
-            </a:r>
-            <a:r>
-              <a:rPr sz="1150" b="0" dirty="0">
-                <a:solidFill>
-                  <a:srgbClr val="1C1C1E"/>
-                </a:solidFill>
-                <a:latin typeface="맑은 고딕"/>
-                <a:ea typeface="맑은 고딕"/>
-              </a:rPr>
-              <a:t> </a:t>
-            </a:r>
-            <a:r>
-              <a:rPr sz="1150" b="0" dirty="0" err="1">
-                <a:solidFill>
-                  <a:srgbClr val="1C1C1E"/>
-                </a:solidFill>
-                <a:latin typeface="맑은 고딕"/>
-                <a:ea typeface="맑은 고딕"/>
-              </a:rPr>
-              <a:t>취약</a:t>
-            </a:r>
-            <a:r>
-              <a:rPr sz="1150" b="0" dirty="0">
-                <a:solidFill>
-                  <a:srgbClr val="1C1C1E"/>
-                </a:solidFill>
-                <a:latin typeface="맑은 고딕"/>
-                <a:ea typeface="맑은 고딕"/>
-              </a:rPr>
-              <a:t> (21곳)</a:t>
-            </a:r>
-          </a:p>
-          <a:p>
-            <a:pPr marL="160020" indent="-160020">
-              <a:lnSpc>
-                <a:spcPct val="114000"/>
-              </a:lnSpc>
-              <a:spcAft>
-                <a:spcPts val="200"/>
-              </a:spcAft>
-            </a:pPr>
-            <a:r>
-              <a:rPr sz="1150" b="0" dirty="0">
-                <a:solidFill>
-                  <a:srgbClr val="1C1C1E"/>
-                </a:solidFill>
-                <a:latin typeface="맑은 고딕"/>
-                <a:ea typeface="맑은 고딕"/>
-              </a:rPr>
-              <a:t>• C: </a:t>
-            </a:r>
-            <a:r>
-              <a:rPr sz="1150" b="0" dirty="0" err="1">
-                <a:solidFill>
-                  <a:srgbClr val="1C1C1E"/>
-                </a:solidFill>
-                <a:latin typeface="맑은 고딕"/>
-                <a:ea typeface="맑은 고딕"/>
-              </a:rPr>
-              <a:t>배경인구</a:t>
-            </a:r>
-            <a:r>
-              <a:rPr sz="1150" b="0" dirty="0">
-                <a:solidFill>
-                  <a:srgbClr val="1C1C1E"/>
-                </a:solidFill>
-                <a:latin typeface="맑은 고딕"/>
-                <a:ea typeface="맑은 고딕"/>
-              </a:rPr>
-              <a:t> </a:t>
-            </a:r>
-            <a:r>
-              <a:rPr sz="1150" b="0" dirty="0" err="1">
-                <a:solidFill>
-                  <a:srgbClr val="1C1C1E"/>
-                </a:solidFill>
-                <a:latin typeface="맑은 고딕"/>
-                <a:ea typeface="맑은 고딕"/>
-              </a:rPr>
-              <a:t>미달</a:t>
-            </a:r>
-            <a:r>
-              <a:rPr sz="1150" b="0" dirty="0">
-                <a:solidFill>
-                  <a:srgbClr val="1C1C1E"/>
-                </a:solidFill>
-                <a:latin typeface="맑은 고딕"/>
-                <a:ea typeface="맑은 고딕"/>
-              </a:rPr>
-              <a:t> </a:t>
-            </a:r>
-            <a:r>
-              <a:rPr sz="1150" b="0" dirty="0" err="1">
-                <a:solidFill>
-                  <a:srgbClr val="1C1C1E"/>
-                </a:solidFill>
-                <a:latin typeface="맑은 고딕"/>
-                <a:ea typeface="맑은 고딕"/>
-              </a:rPr>
-              <a:t>또는</a:t>
-            </a:r>
-            <a:r>
-              <a:rPr sz="1150" b="0" dirty="0">
-                <a:solidFill>
-                  <a:srgbClr val="1C1C1E"/>
-                </a:solidFill>
-                <a:latin typeface="맑은 고딕"/>
-                <a:ea typeface="맑은 고딕"/>
-              </a:rPr>
-              <a:t> </a:t>
-            </a:r>
-            <a:r>
-              <a:rPr sz="1150" b="0" dirty="0" err="1">
-                <a:solidFill>
-                  <a:srgbClr val="1C1C1E"/>
-                </a:solidFill>
-                <a:latin typeface="맑은 고딕"/>
-                <a:ea typeface="맑은 고딕"/>
-              </a:rPr>
-              <a:t>분만</a:t>
-            </a:r>
-            <a:r>
-              <a:rPr sz="1150" b="0" dirty="0">
-                <a:solidFill>
-                  <a:srgbClr val="1C1C1E"/>
-                </a:solidFill>
-                <a:latin typeface="맑은 고딕"/>
-                <a:ea typeface="맑은 고딕"/>
-              </a:rPr>
-              <a:t> </a:t>
-            </a:r>
-            <a:r>
-              <a:rPr sz="1150" b="0" dirty="0" err="1">
-                <a:solidFill>
-                  <a:srgbClr val="1C1C1E"/>
-                </a:solidFill>
-                <a:latin typeface="맑은 고딕"/>
-                <a:ea typeface="맑은 고딕"/>
-              </a:rPr>
-              <a:t>지원</a:t>
-            </a:r>
-            <a:r>
-              <a:rPr sz="1150" b="0" dirty="0">
-                <a:solidFill>
-                  <a:srgbClr val="1C1C1E"/>
-                </a:solidFill>
-                <a:latin typeface="맑은 고딕"/>
-                <a:ea typeface="맑은 고딕"/>
-              </a:rPr>
-              <a:t> </a:t>
-            </a:r>
-            <a:r>
-              <a:rPr sz="1150" b="0" dirty="0" err="1">
-                <a:solidFill>
-                  <a:srgbClr val="1C1C1E"/>
-                </a:solidFill>
-                <a:latin typeface="맑은 고딕"/>
-                <a:ea typeface="맑은 고딕"/>
-              </a:rPr>
-              <a:t>기수령</a:t>
-            </a:r>
-            <a:r>
-              <a:rPr sz="1150" b="0" dirty="0">
-                <a:solidFill>
-                  <a:srgbClr val="1C1C1E"/>
-                </a:solidFill>
-                <a:latin typeface="맑은 고딕"/>
-                <a:ea typeface="맑은 고딕"/>
-              </a:rPr>
-              <a:t> (55곳)</a:t>
-            </a:r>
-          </a:p>
-          <a:p>
-            <a:pPr marL="160020" indent="-160020">
-              <a:lnSpc>
-                <a:spcPct val="114000"/>
-              </a:lnSpc>
-              <a:spcAft>
-                <a:spcPts val="200"/>
-              </a:spcAft>
-            </a:pPr>
-            <a:r>
-              <a:rPr sz="1150" b="0" dirty="0">
-                <a:solidFill>
-                  <a:srgbClr val="1C1C1E"/>
-                </a:solidFill>
-                <a:latin typeface="맑은 고딕"/>
-                <a:ea typeface="맑은 고딕"/>
-              </a:rPr>
-              <a:t>• </a:t>
-            </a:r>
-            <a:r>
-              <a:rPr sz="1150" b="0" dirty="0" err="1">
-                <a:solidFill>
-                  <a:srgbClr val="1C1C1E"/>
-                </a:solidFill>
-                <a:latin typeface="맑은 고딕"/>
-                <a:ea typeface="맑은 고딕"/>
-              </a:rPr>
-              <a:t>C는</a:t>
-            </a:r>
-            <a:r>
-              <a:rPr sz="1150" b="0" dirty="0">
-                <a:solidFill>
-                  <a:srgbClr val="1C1C1E"/>
-                </a:solidFill>
-                <a:latin typeface="맑은 고딕"/>
-                <a:ea typeface="맑은 고딕"/>
-              </a:rPr>
-              <a:t> </a:t>
-            </a:r>
-            <a:r>
-              <a:rPr sz="1150" b="0" dirty="0" err="1">
-                <a:solidFill>
-                  <a:srgbClr val="1C1C1E"/>
-                </a:solidFill>
-                <a:latin typeface="맑은 고딕"/>
-                <a:ea typeface="맑은 고딕"/>
-              </a:rPr>
-              <a:t>취약도</a:t>
-            </a:r>
-            <a:r>
-              <a:rPr sz="1150" b="0" dirty="0">
-                <a:solidFill>
-                  <a:srgbClr val="1C1C1E"/>
-                </a:solidFill>
-                <a:latin typeface="맑은 고딕"/>
-                <a:ea typeface="맑은 고딕"/>
-              </a:rPr>
-              <a:t> </a:t>
-            </a:r>
-            <a:r>
-              <a:rPr sz="1150" b="0" dirty="0" err="1">
-                <a:solidFill>
-                  <a:srgbClr val="1C1C1E"/>
-                </a:solidFill>
-                <a:latin typeface="맑은 고딕"/>
-                <a:ea typeface="맑은 고딕"/>
-              </a:rPr>
-              <a:t>서열이</a:t>
-            </a:r>
-            <a:r>
-              <a:rPr sz="1150" b="0" dirty="0">
-                <a:solidFill>
-                  <a:srgbClr val="1C1C1E"/>
-                </a:solidFill>
-                <a:latin typeface="맑은 고딕"/>
-                <a:ea typeface="맑은 고딕"/>
-              </a:rPr>
-              <a:t> </a:t>
-            </a:r>
-            <a:r>
-              <a:rPr sz="1150" b="0" dirty="0" err="1">
-                <a:solidFill>
-                  <a:srgbClr val="1C1C1E"/>
-                </a:solidFill>
-                <a:latin typeface="맑은 고딕"/>
-                <a:ea typeface="맑은 고딕"/>
-              </a:rPr>
-              <a:t>아니라</a:t>
-            </a:r>
-            <a:r>
-              <a:rPr sz="1150" b="0" dirty="0">
-                <a:solidFill>
-                  <a:srgbClr val="1C1C1E"/>
-                </a:solidFill>
-                <a:latin typeface="맑은 고딕"/>
-                <a:ea typeface="맑은 고딕"/>
-              </a:rPr>
-              <a:t> </a:t>
-            </a:r>
-            <a:r>
-              <a:rPr sz="1150" b="0" dirty="0" err="1">
-                <a:solidFill>
-                  <a:srgbClr val="1C1C1E"/>
-                </a:solidFill>
-                <a:latin typeface="맑은 고딕"/>
-                <a:ea typeface="맑은 고딕"/>
-              </a:rPr>
-              <a:t>자격표</a:t>
-            </a:r>
-            <a:r>
-              <a:rPr sz="1150" b="0" dirty="0">
-                <a:solidFill>
-                  <a:srgbClr val="1C1C1E"/>
-                </a:solidFill>
-                <a:latin typeface="맑은 고딕"/>
-                <a:ea typeface="맑은 고딕"/>
-              </a:rPr>
-              <a:t> </a:t>
-            </a:r>
-            <a:r>
-              <a:rPr sz="1150" b="0" dirty="0" err="1">
-                <a:solidFill>
-                  <a:srgbClr val="1C1C1E"/>
-                </a:solidFill>
-                <a:latin typeface="맑은 고딕"/>
-                <a:ea typeface="맑은 고딕"/>
-              </a:rPr>
-              <a:t>성격</a:t>
-            </a:r>
-            <a:r>
-              <a:rPr sz="1150" b="0" dirty="0">
-                <a:solidFill>
-                  <a:srgbClr val="1C1C1E"/>
-                </a:solidFill>
-                <a:latin typeface="맑은 고딕"/>
-                <a:ea typeface="맑은 고딕"/>
-              </a:rPr>
-              <a:t> — "</a:t>
-            </a:r>
-            <a:r>
-              <a:rPr sz="1150" b="0" dirty="0" err="1">
-                <a:solidFill>
-                  <a:srgbClr val="1C1C1E"/>
-                </a:solidFill>
-                <a:latin typeface="맑은 고딕"/>
-                <a:ea typeface="맑은 고딕"/>
-              </a:rPr>
-              <a:t>지원받으면</a:t>
-            </a:r>
-            <a:r>
-              <a:rPr sz="1150" b="0" dirty="0">
-                <a:solidFill>
-                  <a:srgbClr val="1C1C1E"/>
-                </a:solidFill>
-                <a:latin typeface="맑은 고딕"/>
-                <a:ea typeface="맑은 고딕"/>
-              </a:rPr>
-              <a:t> </a:t>
-            </a:r>
-            <a:r>
-              <a:rPr sz="1150" b="0" dirty="0" err="1">
-                <a:solidFill>
-                  <a:srgbClr val="1C1C1E"/>
-                </a:solidFill>
-                <a:latin typeface="맑은 고딕"/>
-                <a:ea typeface="맑은 고딕"/>
-              </a:rPr>
-              <a:t>C가</a:t>
-            </a:r>
-            <a:r>
-              <a:rPr sz="1150" b="0" dirty="0">
-                <a:solidFill>
-                  <a:srgbClr val="1C1C1E"/>
-                </a:solidFill>
-                <a:latin typeface="맑은 고딕"/>
-                <a:ea typeface="맑은 고딕"/>
-              </a:rPr>
-              <a:t> </a:t>
-            </a:r>
-            <a:r>
-              <a:rPr sz="1150" b="0" dirty="0" err="1">
-                <a:solidFill>
-                  <a:srgbClr val="1C1C1E"/>
-                </a:solidFill>
-                <a:latin typeface="맑은 고딕"/>
-                <a:ea typeface="맑은 고딕"/>
-              </a:rPr>
-              <a:t>되는</a:t>
-            </a:r>
-            <a:r>
-              <a:rPr sz="1150" b="0" dirty="0">
-                <a:solidFill>
-                  <a:srgbClr val="1C1C1E"/>
-                </a:solidFill>
-                <a:latin typeface="맑은 고딕"/>
-                <a:ea typeface="맑은 고딕"/>
-              </a:rPr>
-              <a:t>" </a:t>
-            </a:r>
-            <a:r>
-              <a:rPr sz="1150" b="0" dirty="0" err="1">
-                <a:solidFill>
-                  <a:srgbClr val="1C1C1E"/>
-                </a:solidFill>
-                <a:latin typeface="맑은 고딕"/>
-                <a:ea typeface="맑은 고딕"/>
-              </a:rPr>
-              <a:t>정의</a:t>
-            </a:r>
-            <a:r>
-              <a:rPr sz="1150" b="0" dirty="0">
-                <a:solidFill>
-                  <a:srgbClr val="1C1C1E"/>
-                </a:solidFill>
-                <a:latin typeface="맑은 고딕"/>
-                <a:ea typeface="맑은 고딕"/>
-              </a:rPr>
-              <a:t> </a:t>
-            </a:r>
-            <a:r>
-              <a:rPr sz="1150" b="0" dirty="0" err="1">
-                <a:solidFill>
-                  <a:srgbClr val="1C1C1E"/>
-                </a:solidFill>
-                <a:latin typeface="맑은 고딕"/>
-                <a:ea typeface="맑은 고딕"/>
-              </a:rPr>
-              <a:t>구조를</a:t>
-            </a:r>
-            <a:r>
-              <a:rPr sz="1150" b="0" dirty="0">
-                <a:solidFill>
-                  <a:srgbClr val="1C1C1E"/>
-                </a:solidFill>
-                <a:latin typeface="맑은 고딕"/>
-                <a:ea typeface="맑은 고딕"/>
-              </a:rPr>
-              <a:t> </a:t>
-            </a:r>
-            <a:r>
-              <a:rPr sz="1150" b="0" dirty="0" err="1">
-                <a:solidFill>
-                  <a:srgbClr val="1C1C1E"/>
-                </a:solidFill>
-                <a:latin typeface="맑은 고딕"/>
-                <a:ea typeface="맑은 고딕"/>
-              </a:rPr>
-              <a:t>분석</a:t>
-            </a:r>
-            <a:r>
-              <a:rPr sz="1150" b="0" dirty="0">
-                <a:solidFill>
-                  <a:srgbClr val="1C1C1E"/>
-                </a:solidFill>
-                <a:latin typeface="맑은 고딕"/>
-                <a:ea typeface="맑은 고딕"/>
-              </a:rPr>
-              <a:t> </a:t>
-            </a:r>
-            <a:r>
-              <a:rPr sz="1150" b="0" dirty="0" err="1">
-                <a:solidFill>
-                  <a:srgbClr val="1C1C1E"/>
-                </a:solidFill>
-                <a:latin typeface="맑은 고딕"/>
-                <a:ea typeface="맑은 고딕"/>
-              </a:rPr>
-              <a:t>설계에</a:t>
-            </a:r>
-            <a:r>
-              <a:rPr sz="1150" b="0" dirty="0">
-                <a:solidFill>
-                  <a:srgbClr val="1C1C1E"/>
-                </a:solidFill>
-                <a:latin typeface="맑은 고딕"/>
-                <a:ea typeface="맑은 고딕"/>
-              </a:rPr>
-              <a:t> </a:t>
-            </a:r>
-            <a:r>
-              <a:rPr sz="1150" b="0" dirty="0" err="1">
-                <a:solidFill>
-                  <a:srgbClr val="1C1C1E"/>
-                </a:solidFill>
-                <a:latin typeface="맑은 고딕"/>
-                <a:ea typeface="맑은 고딕"/>
-              </a:rPr>
-              <a:t>반영해야</a:t>
-            </a:r>
-            <a:r>
-              <a:rPr sz="1150" b="0" dirty="0">
-                <a:solidFill>
-                  <a:srgbClr val="1C1C1E"/>
-                </a:solidFill>
-                <a:latin typeface="맑은 고딕"/>
-                <a:ea typeface="맑은 고딕"/>
-              </a:rPr>
-              <a:t> 함</a:t>
-            </a:r>
-          </a:p>
         </p:txBody>
       </p:sp>
       <p:sp>
@@ -24290,7 +23720,7 @@
         <p:spPr>
           <a:xfrm>
             <a:off x="6263640" y="3703320"/>
-            <a:ext cx="5532120" cy="1609344"/>
+            <a:ext cx="5532120" cy="1920240"/>
           </a:xfrm>
           <a:prstGeom prst="roundRect">
             <a:avLst>
@@ -24345,7 +23775,7 @@
         <p:spPr>
           <a:xfrm>
             <a:off x="6446520" y="3831335"/>
-            <a:ext cx="5166359" cy="1353312"/>
+            <a:ext cx="5166359" cy="1664208"/>
           </a:xfrm>
           <a:prstGeom prst="rect">
             <a:avLst/>
@@ -25446,6 +24876,420 @@
                 <a:ea typeface="맑은 고딕"/>
               </a:rPr>
               <a:t>Ⅱ. 배경 이해</a:t>
+            </a:r>
+          </a:p>
+        </p:txBody>
+      </p:sp>
+      <p:graphicFrame>
+        <p:nvGraphicFramePr>
+          <p:cNvPr id="18" name="Table 17"/>
+          <p:cNvGraphicFramePr>
+            <a:graphicFrameLocks noGrp="1"/>
+          </p:cNvGraphicFramePr>
+          <p:nvPr/>
+        </p:nvGraphicFramePr>
+        <p:xfrm>
+          <a:off x="685800" y="4133087"/>
+          <a:ext cx="5166360" cy="1207008"/>
+        </p:xfrm>
+        <a:graphic>
+          <a:graphicData uri="http://schemas.openxmlformats.org/drawingml/2006/table">
+            <a:tbl>
+              <a:tblPr>
+                <a:tableStyleId>{5C22544A-7EE6-4342-B048-85BDC9FD1C3A}</a:tableStyleId>
+              </a:tblPr>
+              <a:tblGrid>
+                <a:gridCol w="685800"/>
+                <a:gridCol w="3520440"/>
+                <a:gridCol w="960120"/>
+              </a:tblGrid>
+              <a:tr h="301752">
+                <a:tc>
+                  <a:txBody>
+                    <a:bodyPr/>
+                    <a:lstStyle/>
+                    <a:p>
+                      <a:pPr>
+                        <a:lnSpc>
+                          <a:spcPct val="105000"/>
+                        </a:lnSpc>
+                      </a:pPr>
+                      <a:r>
+                        <a:rPr sz="1050" b="1">
+                          <a:solidFill>
+                            <a:srgbClr val="FFFFFF"/>
+                          </a:solidFill>
+                          <a:latin typeface="맑은 고딕"/>
+                          <a:ea typeface="맑은 고딕"/>
+                        </a:rPr>
+                        <a:t>등급</a:t>
+                      </a:r>
+                    </a:p>
+                  </a:txBody>
+                  <a:tcPr marT="27432" marB="27432" marL="73152" marR="73152" anchor="ctr">
+                    <a:solidFill>
+                      <a:srgbClr val="33393F"/>
+                    </a:solidFill>
+                  </a:tcPr>
+                </a:tc>
+                <a:tc>
+                  <a:txBody>
+                    <a:bodyPr/>
+                    <a:lstStyle/>
+                    <a:p>
+                      <a:pPr>
+                        <a:lnSpc>
+                          <a:spcPct val="105000"/>
+                        </a:lnSpc>
+                      </a:pPr>
+                      <a:r>
+                        <a:rPr sz="1050" b="1">
+                          <a:solidFill>
+                            <a:srgbClr val="FFFFFF"/>
+                          </a:solidFill>
+                          <a:latin typeface="맑은 고딕"/>
+                          <a:ea typeface="맑은 고딕"/>
+                        </a:rPr>
+                        <a:t>정의</a:t>
+                      </a:r>
+                    </a:p>
+                  </a:txBody>
+                  <a:tcPr marT="27432" marB="27432" marL="73152" marR="73152" anchor="ctr">
+                    <a:solidFill>
+                      <a:srgbClr val="33393F"/>
+                    </a:solidFill>
+                  </a:tcPr>
+                </a:tc>
+                <a:tc>
+                  <a:txBody>
+                    <a:bodyPr/>
+                    <a:lstStyle/>
+                    <a:p>
+                      <a:pPr>
+                        <a:lnSpc>
+                          <a:spcPct val="105000"/>
+                        </a:lnSpc>
+                      </a:pPr>
+                      <a:r>
+                        <a:rPr sz="1050" b="1">
+                          <a:solidFill>
+                            <a:srgbClr val="FFFFFF"/>
+                          </a:solidFill>
+                          <a:latin typeface="맑은 고딕"/>
+                          <a:ea typeface="맑은 고딕"/>
+                        </a:rPr>
+                        <a:t>곳수</a:t>
+                      </a:r>
+                    </a:p>
+                  </a:txBody>
+                  <a:tcPr marT="27432" marB="27432" marL="73152" marR="73152" anchor="ctr">
+                    <a:solidFill>
+                      <a:srgbClr val="33393F"/>
+                    </a:solidFill>
+                  </a:tcPr>
+                </a:tc>
+              </a:tr>
+              <a:tr h="301752">
+                <a:tc>
+                  <a:txBody>
+                    <a:bodyPr/>
+                    <a:lstStyle/>
+                    <a:p>
+                      <a:pPr>
+                        <a:lnSpc>
+                          <a:spcPct val="105000"/>
+                        </a:lnSpc>
+                      </a:pPr>
+                      <a:r>
+                        <a:rPr sz="1050" b="0">
+                          <a:solidFill>
+                            <a:srgbClr val="1C1C1E"/>
+                          </a:solidFill>
+                          <a:latin typeface="맑은 고딕"/>
+                          <a:ea typeface="맑은 고딕"/>
+                        </a:rPr>
+                        <a:t>A</a:t>
+                      </a:r>
+                    </a:p>
+                  </a:txBody>
+                  <a:tcPr marT="27432" marB="27432" marL="73152" marR="73152" anchor="ctr">
+                    <a:solidFill>
+                      <a:srgbClr val="FFFFFF"/>
+                    </a:solidFill>
+                  </a:tcPr>
+                </a:tc>
+                <a:tc>
+                  <a:txBody>
+                    <a:bodyPr/>
+                    <a:lstStyle/>
+                    <a:p>
+                      <a:pPr>
+                        <a:lnSpc>
+                          <a:spcPct val="105000"/>
+                        </a:lnSpc>
+                      </a:pPr>
+                      <a:r>
+                        <a:rPr sz="1050" b="0">
+                          <a:solidFill>
+                            <a:srgbClr val="1C1C1E"/>
+                          </a:solidFill>
+                          <a:latin typeface="맑은 고딕"/>
+                          <a:ea typeface="맑은 고딕"/>
+                        </a:rPr>
+                        <a:t>두 판정 지표 모두 취약</a:t>
+                      </a:r>
+                    </a:p>
+                  </a:txBody>
+                  <a:tcPr marT="27432" marB="27432" marL="73152" marR="73152" anchor="ctr">
+                    <a:solidFill>
+                      <a:srgbClr val="FFFFFF"/>
+                    </a:solidFill>
+                  </a:tcPr>
+                </a:tc>
+                <a:tc>
+                  <a:txBody>
+                    <a:bodyPr/>
+                    <a:lstStyle/>
+                    <a:p>
+                      <a:pPr>
+                        <a:lnSpc>
+                          <a:spcPct val="105000"/>
+                        </a:lnSpc>
+                      </a:pPr>
+                      <a:r>
+                        <a:rPr sz="1050" b="0">
+                          <a:solidFill>
+                            <a:srgbClr val="1C1C1E"/>
+                          </a:solidFill>
+                          <a:latin typeface="맑은 고딕"/>
+                          <a:ea typeface="맑은 고딕"/>
+                        </a:rPr>
+                        <a:t>32</a:t>
+                      </a:r>
+                    </a:p>
+                  </a:txBody>
+                  <a:tcPr marT="27432" marB="27432" marL="73152" marR="73152" anchor="ctr">
+                    <a:solidFill>
+                      <a:srgbClr val="FFFFFF"/>
+                    </a:solidFill>
+                  </a:tcPr>
+                </a:tc>
+              </a:tr>
+              <a:tr h="301752">
+                <a:tc>
+                  <a:txBody>
+                    <a:bodyPr/>
+                    <a:lstStyle/>
+                    <a:p>
+                      <a:pPr>
+                        <a:lnSpc>
+                          <a:spcPct val="105000"/>
+                        </a:lnSpc>
+                      </a:pPr>
+                      <a:r>
+                        <a:rPr sz="1050" b="0">
+                          <a:solidFill>
+                            <a:srgbClr val="1C1C1E"/>
+                          </a:solidFill>
+                          <a:latin typeface="맑은 고딕"/>
+                          <a:ea typeface="맑은 고딕"/>
+                        </a:rPr>
+                        <a:t>B</a:t>
+                      </a:r>
+                    </a:p>
+                  </a:txBody>
+                  <a:tcPr marT="27432" marB="27432" marL="73152" marR="73152" anchor="ctr">
+                    <a:solidFill>
+                      <a:srgbClr val="F6F7F8"/>
+                    </a:solidFill>
+                  </a:tcPr>
+                </a:tc>
+                <a:tc>
+                  <a:txBody>
+                    <a:bodyPr/>
+                    <a:lstStyle/>
+                    <a:p>
+                      <a:pPr>
+                        <a:lnSpc>
+                          <a:spcPct val="105000"/>
+                        </a:lnSpc>
+                      </a:pPr>
+                      <a:r>
+                        <a:rPr sz="1050" b="0">
+                          <a:solidFill>
+                            <a:srgbClr val="1C1C1E"/>
+                          </a:solidFill>
+                          <a:latin typeface="맑은 고딕"/>
+                          <a:ea typeface="맑은 고딕"/>
+                        </a:rPr>
+                        <a:t>두 기준 중 하나만 취약</a:t>
+                      </a:r>
+                    </a:p>
+                  </a:txBody>
+                  <a:tcPr marT="27432" marB="27432" marL="73152" marR="73152" anchor="ctr">
+                    <a:solidFill>
+                      <a:srgbClr val="F6F7F8"/>
+                    </a:solidFill>
+                  </a:tcPr>
+                </a:tc>
+                <a:tc>
+                  <a:txBody>
+                    <a:bodyPr/>
+                    <a:lstStyle/>
+                    <a:p>
+                      <a:pPr>
+                        <a:lnSpc>
+                          <a:spcPct val="105000"/>
+                        </a:lnSpc>
+                      </a:pPr>
+                      <a:r>
+                        <a:rPr sz="1050" b="0">
+                          <a:solidFill>
+                            <a:srgbClr val="1C1C1E"/>
+                          </a:solidFill>
+                          <a:latin typeface="맑은 고딕"/>
+                          <a:ea typeface="맑은 고딕"/>
+                        </a:rPr>
+                        <a:t>21</a:t>
+                      </a:r>
+                    </a:p>
+                  </a:txBody>
+                  <a:tcPr marT="27432" marB="27432" marL="73152" marR="73152" anchor="ctr">
+                    <a:solidFill>
+                      <a:srgbClr val="F6F7F8"/>
+                    </a:solidFill>
+                  </a:tcPr>
+                </a:tc>
+              </a:tr>
+              <a:tr h="301752">
+                <a:tc>
+                  <a:txBody>
+                    <a:bodyPr/>
+                    <a:lstStyle/>
+                    <a:p>
+                      <a:pPr>
+                        <a:lnSpc>
+                          <a:spcPct val="105000"/>
+                        </a:lnSpc>
+                      </a:pPr>
+                      <a:r>
+                        <a:rPr sz="1050" b="0">
+                          <a:solidFill>
+                            <a:srgbClr val="1C1C1E"/>
+                          </a:solidFill>
+                          <a:latin typeface="맑은 고딕"/>
+                          <a:ea typeface="맑은 고딕"/>
+                        </a:rPr>
+                        <a:t>C</a:t>
+                      </a:r>
+                    </a:p>
+                  </a:txBody>
+                  <a:tcPr marT="27432" marB="27432" marL="73152" marR="73152" anchor="ctr">
+                    <a:solidFill>
+                      <a:srgbClr val="FFFFFF"/>
+                    </a:solidFill>
+                  </a:tcPr>
+                </a:tc>
+                <a:tc>
+                  <a:txBody>
+                    <a:bodyPr/>
+                    <a:lstStyle/>
+                    <a:p>
+                      <a:pPr>
+                        <a:lnSpc>
+                          <a:spcPct val="105000"/>
+                        </a:lnSpc>
+                      </a:pPr>
+                      <a:r>
+                        <a:rPr sz="1050" b="0">
+                          <a:solidFill>
+                            <a:srgbClr val="1C1C1E"/>
+                          </a:solidFill>
+                          <a:latin typeface="맑은 고딕"/>
+                          <a:ea typeface="맑은 고딕"/>
+                        </a:rPr>
+                        <a:t>배경인구 미달 또는 분만 지원 기수령</a:t>
+                      </a:r>
+                    </a:p>
+                  </a:txBody>
+                  <a:tcPr marT="27432" marB="27432" marL="73152" marR="73152" anchor="ctr">
+                    <a:solidFill>
+                      <a:srgbClr val="FFFFFF"/>
+                    </a:solidFill>
+                  </a:tcPr>
+                </a:tc>
+                <a:tc>
+                  <a:txBody>
+                    <a:bodyPr/>
+                    <a:lstStyle/>
+                    <a:p>
+                      <a:pPr>
+                        <a:lnSpc>
+                          <a:spcPct val="105000"/>
+                        </a:lnSpc>
+                      </a:pPr>
+                      <a:r>
+                        <a:rPr sz="1050" b="0">
+                          <a:solidFill>
+                            <a:srgbClr val="1C1C1E"/>
+                          </a:solidFill>
+                          <a:latin typeface="맑은 고딕"/>
+                          <a:ea typeface="맑은 고딕"/>
+                        </a:rPr>
+                        <a:t>55</a:t>
+                      </a:r>
+                    </a:p>
+                  </a:txBody>
+                  <a:tcPr marT="27432" marB="27432" marL="73152" marR="73152" anchor="ctr">
+                    <a:solidFill>
+                      <a:srgbClr val="FFFFFF"/>
+                    </a:solidFill>
+                  </a:tcPr>
+                </a:tc>
+              </a:tr>
+            </a:tbl>
+          </a:graphicData>
+        </a:graphic>
+      </p:graphicFrame>
+      <p:sp>
+        <p:nvSpPr>
+          <p:cNvPr id="19" name="TextBox 18"/>
+          <p:cNvSpPr txBox="1"/>
+          <p:nvPr/>
+        </p:nvSpPr>
+        <p:spPr>
+          <a:xfrm>
+            <a:off x="685800" y="5358384"/>
+            <a:ext cx="5166360" cy="219456"/>
+          </a:xfrm>
+          <a:prstGeom prst="rect">
+            <a:avLst/>
+          </a:prstGeom>
+          <a:noFill/>
+        </p:spPr>
+        <p:txBody>
+          <a:bodyPr wrap="square" anchor="t">
+            <a:spAutoFit/>
+          </a:bodyPr>
+          <a:lstStyle/>
+          <a:p>
+            <a:pPr>
+              <a:lnSpc>
+                <a:spcPct val="114000"/>
+              </a:lnSpc>
+              <a:spcAft>
+                <a:spcPts val="0"/>
+              </a:spcAft>
+            </a:pPr>
+            <a:r>
+              <a:rPr sz="950" b="0">
+                <a:solidFill>
+                  <a:srgbClr val="767A7F"/>
+                </a:solidFill>
+                <a:latin typeface="맑은 고딕"/>
+                <a:ea typeface="맑은 고딕"/>
+              </a:rPr>
+              <a:t>C는 취약도 서열이 아니라 자격표 — "지원받으면 C가 된다"</a:t>
             </a:r>
           </a:p>
         </p:txBody>

--- a/05_작업자료/_PPT생성본/데이터분석_계획서.pptx
+++ b/05_작업자료/_PPT생성본/데이터분석_계획서.pptx
@@ -3997,7 +3997,7 @@
         <p:spPr>
           <a:xfrm>
             <a:off x="502920" y="1737360"/>
-            <a:ext cx="3611880" cy="1499616"/>
+            <a:ext cx="3611880" cy="1645920"/>
           </a:xfrm>
           <a:prstGeom prst="roundRect">
             <a:avLst>
@@ -4052,7 +4052,7 @@
         <p:spPr>
           <a:xfrm>
             <a:off x="685800" y="1865376"/>
-            <a:ext cx="3246120" cy="1243584"/>
+            <a:ext cx="3246120" cy="1389888"/>
           </a:xfrm>
           <a:prstGeom prst="rect">
             <a:avLst/>
@@ -4626,7 +4626,7 @@
         <p:spPr>
           <a:xfrm>
             <a:off x="4343400" y="1737360"/>
-            <a:ext cx="3611880" cy="1499616"/>
+            <a:ext cx="3611880" cy="1645920"/>
           </a:xfrm>
           <a:prstGeom prst="roundRect">
             <a:avLst>
@@ -4681,7 +4681,7 @@
         <p:spPr>
           <a:xfrm>
             <a:off x="4526280" y="1865376"/>
-            <a:ext cx="3246120" cy="1243584"/>
+            <a:ext cx="3246120" cy="1389888"/>
           </a:xfrm>
           <a:prstGeom prst="rect">
             <a:avLst/>
@@ -4764,7 +4764,7 @@
         <p:spPr>
           <a:xfrm>
             <a:off x="8183880" y="1737360"/>
-            <a:ext cx="3611880" cy="1499616"/>
+            <a:ext cx="3611880" cy="1645920"/>
           </a:xfrm>
           <a:prstGeom prst="roundRect">
             <a:avLst>
@@ -4819,7 +4819,7 @@
         <p:spPr>
           <a:xfrm>
             <a:off x="8366760" y="1865376"/>
-            <a:ext cx="3246120" cy="1243584"/>
+            <a:ext cx="3246120" cy="1389888"/>
           </a:xfrm>
           <a:prstGeom prst="rect">
             <a:avLst/>
@@ -5503,7 +5503,7 @@
         <p:spPr>
           <a:xfrm>
             <a:off x="502920" y="3977639"/>
-            <a:ext cx="11292840" cy="676656"/>
+            <a:ext cx="11292840" cy="822960"/>
           </a:xfrm>
           <a:prstGeom prst="roundRect">
             <a:avLst>
@@ -5557,8 +5557,8 @@
         </p:nvSpPr>
         <p:spPr>
           <a:xfrm>
-            <a:off x="685800" y="4105656"/>
-            <a:ext cx="10927080" cy="420623"/>
+            <a:off x="685800" y="4105655"/>
+            <a:ext cx="10927080" cy="566928"/>
           </a:xfrm>
           <a:prstGeom prst="rect">
             <a:avLst/>
@@ -6306,7 +6306,7 @@
         <p:spPr>
           <a:xfrm>
             <a:off x="502920" y="1737360"/>
-            <a:ext cx="11292840" cy="868680"/>
+            <a:ext cx="11292840" cy="1014984"/>
           </a:xfrm>
           <a:prstGeom prst="roundRect">
             <a:avLst>
@@ -6361,7 +6361,7 @@
         <p:spPr>
           <a:xfrm>
             <a:off x="685800" y="1865376"/>
-            <a:ext cx="10927080" cy="612647"/>
+            <a:ext cx="10927080" cy="758952"/>
           </a:xfrm>
           <a:prstGeom prst="rect">
             <a:avLst/>
@@ -6444,7 +6444,7 @@
         <p:spPr>
           <a:xfrm>
             <a:off x="502920" y="3154680"/>
-            <a:ext cx="2286000" cy="502920"/>
+            <a:ext cx="2286000" cy="594360"/>
           </a:xfrm>
           <a:prstGeom prst="roundRect">
             <a:avLst>
@@ -6505,7 +6505,7 @@
         <p:spPr>
           <a:xfrm>
             <a:off x="685800" y="3282696"/>
-            <a:ext cx="1920239" cy="246888"/>
+            <a:ext cx="1920239" cy="338328"/>
           </a:xfrm>
           <a:prstGeom prst="rect">
             <a:avLst/>
@@ -6548,7 +6548,7 @@
         <p:spPr>
           <a:xfrm>
             <a:off x="2926080" y="3154680"/>
-            <a:ext cx="8869680" cy="502920"/>
+            <a:ext cx="8869680" cy="594360"/>
           </a:xfrm>
           <a:prstGeom prst="roundRect">
             <a:avLst>
@@ -6603,7 +6603,7 @@
         <p:spPr>
           <a:xfrm>
             <a:off x="3108960" y="3282696"/>
-            <a:ext cx="8503920" cy="246888"/>
+            <a:ext cx="8503920" cy="338328"/>
           </a:xfrm>
           <a:prstGeom prst="rect">
             <a:avLst/>
@@ -6646,7 +6646,7 @@
         <p:spPr>
           <a:xfrm>
             <a:off x="502920" y="4023360"/>
-            <a:ext cx="2286000" cy="502920"/>
+            <a:ext cx="2286000" cy="594360"/>
           </a:xfrm>
           <a:prstGeom prst="roundRect">
             <a:avLst>
@@ -6707,7 +6707,7 @@
         <p:spPr>
           <a:xfrm>
             <a:off x="685800" y="4151376"/>
-            <a:ext cx="1920239" cy="246888"/>
+            <a:ext cx="1920239" cy="338328"/>
           </a:xfrm>
           <a:prstGeom prst="rect">
             <a:avLst/>
@@ -6750,7 +6750,7 @@
         <p:spPr>
           <a:xfrm>
             <a:off x="2926080" y="4023360"/>
-            <a:ext cx="8869680" cy="502920"/>
+            <a:ext cx="8869680" cy="594360"/>
           </a:xfrm>
           <a:prstGeom prst="roundRect">
             <a:avLst>
@@ -6805,7 +6805,7 @@
         <p:spPr>
           <a:xfrm>
             <a:off x="3108960" y="4151376"/>
-            <a:ext cx="8503920" cy="246888"/>
+            <a:ext cx="8503920" cy="338328"/>
           </a:xfrm>
           <a:prstGeom prst="rect">
             <a:avLst/>
@@ -7035,7 +7035,7 @@
         <p:spPr>
           <a:xfrm>
             <a:off x="502920" y="4892040"/>
-            <a:ext cx="2286000" cy="685800"/>
+            <a:ext cx="2286000" cy="731520"/>
           </a:xfrm>
           <a:prstGeom prst="roundRect">
             <a:avLst>
@@ -7096,7 +7096,7 @@
         <p:spPr>
           <a:xfrm>
             <a:off x="685800" y="5020055"/>
-            <a:ext cx="1920239" cy="429768"/>
+            <a:ext cx="1920239" cy="475488"/>
           </a:xfrm>
           <a:prstGeom prst="rect">
             <a:avLst/>
@@ -7139,7 +7139,7 @@
         <p:spPr>
           <a:xfrm>
             <a:off x="2926080" y="4892040"/>
-            <a:ext cx="8869680" cy="685800"/>
+            <a:ext cx="8869680" cy="731520"/>
           </a:xfrm>
           <a:prstGeom prst="roundRect">
             <a:avLst>
@@ -7194,7 +7194,7 @@
         <p:spPr>
           <a:xfrm>
             <a:off x="3108960" y="5020055"/>
-            <a:ext cx="8503920" cy="429768"/>
+            <a:ext cx="8503920" cy="475488"/>
           </a:xfrm>
           <a:prstGeom prst="rect">
             <a:avLst/>
@@ -8118,7 +8118,7 @@
         <p:spPr>
           <a:xfrm>
             <a:off x="502920" y="1737360"/>
-            <a:ext cx="5532120" cy="1463040"/>
+            <a:ext cx="5532120" cy="1545336"/>
           </a:xfrm>
           <a:prstGeom prst="roundRect">
             <a:avLst>
@@ -8173,7 +8173,7 @@
         <p:spPr>
           <a:xfrm>
             <a:off x="685800" y="1865376"/>
-            <a:ext cx="5166359" cy="1207008"/>
+            <a:ext cx="5166359" cy="1289304"/>
           </a:xfrm>
           <a:prstGeom prst="rect">
             <a:avLst/>
@@ -8894,7 +8894,7 @@
         <p:spPr>
           <a:xfrm>
             <a:off x="6263640" y="1737360"/>
-            <a:ext cx="5532120" cy="1463040"/>
+            <a:ext cx="5532120" cy="1545336"/>
           </a:xfrm>
           <a:prstGeom prst="roundRect">
             <a:avLst>
@@ -8949,7 +8949,7 @@
         <p:spPr>
           <a:xfrm>
             <a:off x="6446520" y="1865376"/>
-            <a:ext cx="5166359" cy="1207008"/>
+            <a:ext cx="5166359" cy="1289304"/>
           </a:xfrm>
           <a:prstGeom prst="rect">
             <a:avLst/>
@@ -9596,7 +9596,7 @@
         <p:spPr>
           <a:xfrm>
             <a:off x="502920" y="3474720"/>
-            <a:ext cx="11292840" cy="1252728"/>
+            <a:ext cx="11292840" cy="1399032"/>
           </a:xfrm>
           <a:prstGeom prst="roundRect">
             <a:avLst>
@@ -9651,7 +9651,7 @@
         <p:spPr>
           <a:xfrm>
             <a:off x="685800" y="3602736"/>
-            <a:ext cx="10927080" cy="996696"/>
+            <a:ext cx="10927080" cy="1143000"/>
           </a:xfrm>
           <a:prstGeom prst="rect">
             <a:avLst/>
@@ -13489,7 +13489,7 @@
         <p:spPr>
           <a:xfrm>
             <a:off x="6263640" y="3026663"/>
-            <a:ext cx="5532120" cy="859536"/>
+            <a:ext cx="5532120" cy="1005840"/>
           </a:xfrm>
           <a:prstGeom prst="roundRect">
             <a:avLst>
@@ -13543,8 +13543,8 @@
         </p:nvSpPr>
         <p:spPr>
           <a:xfrm>
-            <a:off x="6446520" y="3145535"/>
-            <a:ext cx="5166360" cy="603503"/>
+            <a:off x="6446520" y="3154680"/>
+            <a:ext cx="5166360" cy="749808"/>
           </a:xfrm>
           <a:prstGeom prst="rect">
             <a:avLst/>
@@ -13986,7 +13986,7 @@
         <p:spPr>
           <a:xfrm>
             <a:off x="502920" y="1371600"/>
-            <a:ext cx="3611880" cy="1307592"/>
+            <a:ext cx="3611880" cy="1453896"/>
           </a:xfrm>
           <a:prstGeom prst="roundRect">
             <a:avLst>
@@ -14041,7 +14041,7 @@
         <p:spPr>
           <a:xfrm>
             <a:off x="685800" y="1499616"/>
-            <a:ext cx="3246120" cy="1051560"/>
+            <a:ext cx="3246120" cy="1197864"/>
           </a:xfrm>
           <a:prstGeom prst="rect">
             <a:avLst/>
@@ -14508,7 +14508,7 @@
         <p:spPr>
           <a:xfrm>
             <a:off x="4343400" y="1371600"/>
-            <a:ext cx="3611880" cy="1307592"/>
+            <a:ext cx="3611880" cy="1453896"/>
           </a:xfrm>
           <a:prstGeom prst="roundRect">
             <a:avLst>
@@ -14563,7 +14563,7 @@
         <p:spPr>
           <a:xfrm>
             <a:off x="4526280" y="1499616"/>
-            <a:ext cx="3246120" cy="1051560"/>
+            <a:ext cx="3246120" cy="1197864"/>
           </a:xfrm>
           <a:prstGeom prst="rect">
             <a:avLst/>
@@ -14970,7 +14970,7 @@
         <p:spPr>
           <a:xfrm>
             <a:off x="8183880" y="1371600"/>
-            <a:ext cx="3611880" cy="1307592"/>
+            <a:ext cx="3611880" cy="1453896"/>
           </a:xfrm>
           <a:prstGeom prst="roundRect">
             <a:avLst>
@@ -15025,7 +15025,7 @@
         <p:spPr>
           <a:xfrm>
             <a:off x="8366760" y="1499616"/>
-            <a:ext cx="3246120" cy="1051560"/>
+            <a:ext cx="3246120" cy="1197864"/>
           </a:xfrm>
           <a:prstGeom prst="rect">
             <a:avLst/>
@@ -15145,7 +15145,7 @@
         <p:spPr>
           <a:xfrm>
             <a:off x="502920" y="3401568"/>
-            <a:ext cx="11292840" cy="1362456"/>
+            <a:ext cx="11292840" cy="1508760"/>
           </a:xfrm>
           <a:prstGeom prst="roundRect">
             <a:avLst>
@@ -15200,7 +15200,7 @@
         <p:spPr>
           <a:xfrm>
             <a:off x="685800" y="3529584"/>
-            <a:ext cx="10927080" cy="1106424"/>
+            <a:ext cx="10927080" cy="1252728"/>
           </a:xfrm>
           <a:prstGeom prst="rect">
             <a:avLst/>
@@ -16504,7 +16504,7 @@
         <p:spPr>
           <a:xfrm>
             <a:off x="502920" y="1371600"/>
-            <a:ext cx="3291840" cy="969264"/>
+            <a:ext cx="3291840" cy="1115568"/>
           </a:xfrm>
           <a:prstGeom prst="roundRect">
             <a:avLst>
@@ -16559,7 +16559,7 @@
         <p:spPr>
           <a:xfrm>
             <a:off x="685800" y="1499616"/>
-            <a:ext cx="2926079" cy="713232"/>
+            <a:ext cx="2926079" cy="859536"/>
           </a:xfrm>
           <a:prstGeom prst="rect">
             <a:avLst/>
@@ -16943,7 +16943,7 @@
         <p:spPr>
           <a:xfrm>
             <a:off x="4480559" y="1371600"/>
-            <a:ext cx="3291840" cy="969264"/>
+            <a:ext cx="3291840" cy="1115568"/>
           </a:xfrm>
           <a:prstGeom prst="roundRect">
             <a:avLst>
@@ -16998,7 +16998,7 @@
         <p:spPr>
           <a:xfrm>
             <a:off x="4663439" y="1499616"/>
-            <a:ext cx="2926079" cy="713232"/>
+            <a:ext cx="2926079" cy="859536"/>
           </a:xfrm>
           <a:prstGeom prst="rect">
             <a:avLst/>
@@ -17282,7 +17282,7 @@
         <p:spPr>
           <a:xfrm>
             <a:off x="8458200" y="1371600"/>
-            <a:ext cx="3291840" cy="969264"/>
+            <a:ext cx="3291840" cy="1115568"/>
           </a:xfrm>
           <a:prstGeom prst="roundRect">
             <a:avLst>
@@ -17337,7 +17337,7 @@
         <p:spPr>
           <a:xfrm>
             <a:off x="8641080" y="1499616"/>
-            <a:ext cx="2926079" cy="713232"/>
+            <a:ext cx="2926079" cy="859536"/>
           </a:xfrm>
           <a:prstGeom prst="rect">
             <a:avLst/>
@@ -17440,7 +17440,7 @@
         <p:spPr>
           <a:xfrm>
             <a:off x="502920" y="2834640"/>
-            <a:ext cx="5532120" cy="1755648"/>
+            <a:ext cx="5532120" cy="1901952"/>
           </a:xfrm>
           <a:prstGeom prst="roundRect">
             <a:avLst>
@@ -17495,7 +17495,7 @@
         <p:spPr>
           <a:xfrm>
             <a:off x="685800" y="2962656"/>
-            <a:ext cx="5166359" cy="1499616"/>
+            <a:ext cx="5166359" cy="1645920"/>
           </a:xfrm>
           <a:prstGeom prst="rect">
             <a:avLst/>
@@ -17645,7 +17645,7 @@
         <p:spPr>
           <a:xfrm>
             <a:off x="6263640" y="2834640"/>
-            <a:ext cx="5532120" cy="1755648"/>
+            <a:ext cx="5532120" cy="1901952"/>
           </a:xfrm>
           <a:prstGeom prst="roundRect">
             <a:avLst>
@@ -17700,7 +17700,7 @@
         <p:spPr>
           <a:xfrm>
             <a:off x="6446520" y="2962656"/>
-            <a:ext cx="5166359" cy="1499616"/>
+            <a:ext cx="5166359" cy="1645920"/>
           </a:xfrm>
           <a:prstGeom prst="rect">
             <a:avLst/>
@@ -17877,7 +17877,7 @@
         <p:spPr>
           <a:xfrm>
             <a:off x="502920" y="4965192"/>
-            <a:ext cx="11292840" cy="1060704"/>
+            <a:ext cx="11292840" cy="1207008"/>
           </a:xfrm>
           <a:prstGeom prst="roundRect">
             <a:avLst>
@@ -17932,7 +17932,7 @@
         <p:spPr>
           <a:xfrm>
             <a:off x="685800" y="5093207"/>
-            <a:ext cx="10927080" cy="804671"/>
+            <a:ext cx="10927080" cy="950976"/>
           </a:xfrm>
           <a:prstGeom prst="rect">
             <a:avLst/>
@@ -18497,7 +18497,7 @@
         <p:spPr>
           <a:xfrm>
             <a:off x="502920" y="1371600"/>
-            <a:ext cx="5532120" cy="1106424"/>
+            <a:ext cx="5532120" cy="1252728"/>
           </a:xfrm>
           <a:prstGeom prst="roundRect">
             <a:avLst>
@@ -18552,7 +18552,7 @@
         <p:spPr>
           <a:xfrm>
             <a:off x="521208" y="1600200"/>
-            <a:ext cx="82296" cy="649224"/>
+            <a:ext cx="82296" cy="795528"/>
           </a:xfrm>
           <a:prstGeom prst="roundRect">
             <a:avLst>
@@ -18613,7 +18613,7 @@
         <p:spPr>
           <a:xfrm>
             <a:off x="822960" y="1499616"/>
-            <a:ext cx="5029200" cy="850391"/>
+            <a:ext cx="5029200" cy="996696"/>
           </a:xfrm>
           <a:prstGeom prst="rect">
             <a:avLst/>
@@ -18993,7 +18993,7 @@
         <p:spPr>
           <a:xfrm>
             <a:off x="6263640" y="1371600"/>
-            <a:ext cx="5532120" cy="1106424"/>
+            <a:ext cx="5532120" cy="1252728"/>
           </a:xfrm>
           <a:prstGeom prst="roundRect">
             <a:avLst>
@@ -19048,7 +19048,7 @@
         <p:spPr>
           <a:xfrm>
             <a:off x="6281927" y="1600200"/>
-            <a:ext cx="82296" cy="649224"/>
+            <a:ext cx="82296" cy="795528"/>
           </a:xfrm>
           <a:prstGeom prst="roundRect">
             <a:avLst>
@@ -19109,7 +19109,7 @@
         <p:spPr>
           <a:xfrm>
             <a:off x="6583679" y="1499616"/>
-            <a:ext cx="5029200" cy="850391"/>
+            <a:ext cx="5029200" cy="996696"/>
           </a:xfrm>
           <a:prstGeom prst="rect">
             <a:avLst/>
@@ -19449,7 +19449,7 @@
         <p:spPr>
           <a:xfrm>
             <a:off x="502920" y="3337560"/>
-            <a:ext cx="5532120" cy="1106424"/>
+            <a:ext cx="5532120" cy="1252728"/>
           </a:xfrm>
           <a:prstGeom prst="roundRect">
             <a:avLst>
@@ -19504,7 +19504,7 @@
         <p:spPr>
           <a:xfrm>
             <a:off x="521208" y="3566160"/>
-            <a:ext cx="82296" cy="649224"/>
+            <a:ext cx="82296" cy="795528"/>
           </a:xfrm>
           <a:prstGeom prst="roundRect">
             <a:avLst>
@@ -19565,7 +19565,7 @@
         <p:spPr>
           <a:xfrm>
             <a:off x="822960" y="3465576"/>
-            <a:ext cx="5029200" cy="850391"/>
+            <a:ext cx="5029200" cy="996696"/>
           </a:xfrm>
           <a:prstGeom prst="rect">
             <a:avLst/>
@@ -19925,7 +19925,7 @@
         <p:spPr>
           <a:xfrm>
             <a:off x="6263640" y="3337560"/>
-            <a:ext cx="5532120" cy="1106424"/>
+            <a:ext cx="5532120" cy="1252728"/>
           </a:xfrm>
           <a:prstGeom prst="roundRect">
             <a:avLst>
@@ -19980,7 +19980,7 @@
         <p:spPr>
           <a:xfrm>
             <a:off x="6281927" y="3566160"/>
-            <a:ext cx="82296" cy="649224"/>
+            <a:ext cx="82296" cy="795528"/>
           </a:xfrm>
           <a:prstGeom prst="roundRect">
             <a:avLst>
@@ -20041,7 +20041,7 @@
         <p:spPr>
           <a:xfrm>
             <a:off x="6583679" y="3465576"/>
-            <a:ext cx="5029200" cy="850391"/>
+            <a:ext cx="5029200" cy="996696"/>
           </a:xfrm>
           <a:prstGeom prst="rect">
             <a:avLst/>
@@ -20796,7 +20796,7 @@
         <p:spPr>
           <a:xfrm>
             <a:off x="502920" y="1371600"/>
-            <a:ext cx="5532120" cy="1426464"/>
+            <a:ext cx="5532120" cy="1572768"/>
           </a:xfrm>
           <a:prstGeom prst="roundRect">
             <a:avLst>
@@ -20851,7 +20851,7 @@
         <p:spPr>
           <a:xfrm>
             <a:off x="685800" y="1499616"/>
-            <a:ext cx="5166359" cy="1170432"/>
+            <a:ext cx="5166359" cy="1316736"/>
           </a:xfrm>
           <a:prstGeom prst="rect">
             <a:avLst/>
@@ -20974,7 +20974,7 @@
         <p:spPr>
           <a:xfrm>
             <a:off x="6263640" y="1371600"/>
-            <a:ext cx="5532120" cy="1426464"/>
+            <a:ext cx="5532120" cy="1572768"/>
           </a:xfrm>
           <a:prstGeom prst="roundRect">
             <a:avLst>
@@ -21029,7 +21029,7 @@
         <p:spPr>
           <a:xfrm>
             <a:off x="6446520" y="1499616"/>
-            <a:ext cx="5166359" cy="1170432"/>
+            <a:ext cx="5166359" cy="1316736"/>
           </a:xfrm>
           <a:prstGeom prst="rect">
             <a:avLst/>
@@ -26405,7 +26405,7 @@
         <p:spPr>
           <a:xfrm>
             <a:off x="502920" y="4297680"/>
-            <a:ext cx="3611880" cy="1179576"/>
+            <a:ext cx="3611880" cy="1325880"/>
           </a:xfrm>
           <a:prstGeom prst="roundRect">
             <a:avLst>
@@ -26460,7 +26460,7 @@
         <p:spPr>
           <a:xfrm>
             <a:off x="685800" y="4425696"/>
-            <a:ext cx="3246120" cy="923544"/>
+            <a:ext cx="3246120" cy="1069848"/>
           </a:xfrm>
           <a:prstGeom prst="rect">
             <a:avLst/>
@@ -26767,7 +26767,7 @@
         <p:spPr>
           <a:xfrm>
             <a:off x="4343400" y="4297680"/>
-            <a:ext cx="3611880" cy="1179576"/>
+            <a:ext cx="3611880" cy="1325880"/>
           </a:xfrm>
           <a:prstGeom prst="roundRect">
             <a:avLst>
@@ -26822,7 +26822,7 @@
         <p:spPr>
           <a:xfrm>
             <a:off x="4526280" y="4425696"/>
-            <a:ext cx="3246120" cy="923544"/>
+            <a:ext cx="3246120" cy="1069848"/>
           </a:xfrm>
           <a:prstGeom prst="rect">
             <a:avLst/>
@@ -27159,7 +27159,7 @@
         <p:spPr>
           <a:xfrm>
             <a:off x="8183880" y="4297680"/>
-            <a:ext cx="3611880" cy="1179576"/>
+            <a:ext cx="3611880" cy="1325880"/>
           </a:xfrm>
           <a:prstGeom prst="roundRect">
             <a:avLst>
@@ -27214,7 +27214,7 @@
         <p:spPr>
           <a:xfrm>
             <a:off x="8366760" y="4425696"/>
-            <a:ext cx="3246120" cy="923544"/>
+            <a:ext cx="3246120" cy="1069848"/>
           </a:xfrm>
           <a:prstGeom prst="rect">
             <a:avLst/>
@@ -29286,7 +29286,7 @@
         <p:spPr>
           <a:xfrm>
             <a:off x="502920" y="4480560"/>
-            <a:ext cx="11292840" cy="1060704"/>
+            <a:ext cx="11292840" cy="1207008"/>
           </a:xfrm>
           <a:prstGeom prst="roundRect">
             <a:avLst>
@@ -29341,7 +29341,7 @@
         <p:spPr>
           <a:xfrm>
             <a:off x="685800" y="4608576"/>
-            <a:ext cx="10927080" cy="804671"/>
+            <a:ext cx="10927080" cy="950976"/>
           </a:xfrm>
           <a:prstGeom prst="rect">
             <a:avLst/>
